--- a/content/05-teaching-resources/slides/core/23-employer-set-project.pptx
+++ b/content/05-teaching-resources/slides/core/23-employer-set-project.pptx
@@ -10,10 +10,14 @@
     <p:sldId id="258" r:id="rId9"/>
     <p:sldId id="259" r:id="rId10"/>
     <p:sldId id="260" r:id="rId11"/>
-    <p:sldId id="261" r:id="rId12"/>
+    <p:sldId id="261" r:id="rId13"/>
     <p:sldId id="262" r:id="rId14"/>
     <p:sldId id="263" r:id="rId15"/>
     <p:sldId id="264" r:id="rId16"/>
+    <p:sldId id="265" r:id="rId17"/>
+    <p:sldId id="266" r:id="rId18"/>
+    <p:sldId id="267" r:id="rId19"/>
+    <p:sldId id="268" r:id="rId20"/>
   </p:sldIdLst>
   <p:sldSz cx="12191695" cy="6858000" type="screen4x3"/>
   <p:notesSz cx="6858000" cy="9144000"/>
@@ -510,7 +514,22 @@
           <a:lstStyle/>
           <a:p>
             <a:r>
-              <a:t>Give students a few minutes to answer on mini whiteboards or paper, then reveal the answers on the next slide.</a:t>
+              <a:t>Answers:</a:t>
+            </a:r>
+          </a:p>
+          <a:p>
+            <a:r>
+              <a:t>1. 30%.</a:t>
+            </a:r>
+          </a:p>
+          <a:p>
+            <a:r>
+              <a:t>2. City &amp; Guilds.</a:t>
+            </a:r>
+          </a:p>
+          <a:p>
+            <a:r>
+              <a:t>3. Any two: planning and preparation, communication, develop and manufacture, evaluation.</a:t>
             </a:r>
           </a:p>
         </p:txBody>
@@ -580,7 +599,22 @@
           <a:lstStyle/>
           <a:p>
             <a:r>
-              <a:t>Talk through any answers the class found difficult.</a:t>
+              <a:t>Answers:</a:t>
+            </a:r>
+          </a:p>
+          <a:p>
+            <a:r>
+              <a:t>1. AO2.</a:t>
+            </a:r>
+          </a:p>
+          <a:p>
+            <a:r>
+              <a:t>2. Maths, English and digital skills.</a:t>
+            </a:r>
+          </a:p>
+          <a:p>
+            <a:r>
+              <a:t>3. AO5 rewards evaluating other options considered.</a:t>
             </a:r>
           </a:p>
         </p:txBody>
@@ -606,6 +640,146 @@
 </file>
 
 <file path=ppt/notesSlides/notesSlide3.xml><?xml version="1.0" encoding="utf-8"?>
+<p:notes xmlns:a="http://schemas.openxmlformats.org/drawingml/2006/main" xmlns:p="http://schemas.openxmlformats.org/presentationml/2006/main" xmlns:r="http://schemas.openxmlformats.org/officeDocument/2006/relationships">
+  <p:cSld>
+    <p:spTree>
+      <p:nvGrpSpPr>
+        <p:cNvPr id="1" name=""/>
+        <p:cNvGrpSpPr/>
+        <p:nvPr/>
+      </p:nvGrpSpPr>
+      <p:grpSpPr>
+        <a:xfrm>
+          <a:off x="0" y="0"/>
+          <a:ext cx="0" cy="0"/>
+          <a:chOff x="0" y="0"/>
+          <a:chExt cx="0" cy="0"/>
+        </a:xfrm>
+      </p:grpSpPr>
+      <p:sp>
+        <p:nvSpPr>
+          <p:cNvPr id="2" name="Slide Image Placeholder 1"/>
+          <p:cNvSpPr>
+            <a:spLocks noGrp="1"/>
+          </p:cNvSpPr>
+          <p:nvPr>
+            <p:ph type="sldImg" idx="2"/>
+          </p:nvPr>
+        </p:nvSpPr>
+        <p:spPr/>
+      </p:sp>
+      <p:sp>
+        <p:nvSpPr>
+          <p:cNvPr id="3" name="Notes Placeholder 2"/>
+          <p:cNvSpPr>
+            <a:spLocks noGrp="1"/>
+          </p:cNvSpPr>
+          <p:nvPr>
+            <p:ph type="body" idx="3" sz="quarter"/>
+          </p:nvPr>
+        </p:nvSpPr>
+        <p:spPr/>
+        <p:txBody>
+          <a:bodyPr/>
+          <a:lstStyle/>
+          <a:p>
+            <a:r>
+              <a:t>Give students a few minutes to answer on mini whiteboards or paper, then reveal the answers on the next slide.</a:t>
+            </a:r>
+          </a:p>
+        </p:txBody>
+      </p:sp>
+      <p:sp>
+        <p:nvSpPr>
+          <p:cNvPr id="4" name="Slide Number Placeholder 3"/>
+          <p:cNvSpPr>
+            <a:spLocks noGrp="1"/>
+          </p:cNvSpPr>
+          <p:nvPr>
+            <p:ph type="sldNum" idx="5" sz="quarter"/>
+          </p:nvPr>
+        </p:nvSpPr>
+        <p:spPr/>
+      </p:sp>
+    </p:spTree>
+  </p:cSld>
+  <p:clrMapOvr>
+    <a:masterClrMapping/>
+  </p:clrMapOvr>
+</p:notes>
+</file>
+
+<file path=ppt/notesSlides/notesSlide4.xml><?xml version="1.0" encoding="utf-8"?>
+<p:notes xmlns:a="http://schemas.openxmlformats.org/drawingml/2006/main" xmlns:p="http://schemas.openxmlformats.org/presentationml/2006/main" xmlns:r="http://schemas.openxmlformats.org/officeDocument/2006/relationships">
+  <p:cSld>
+    <p:spTree>
+      <p:nvGrpSpPr>
+        <p:cNvPr id="1" name=""/>
+        <p:cNvGrpSpPr/>
+        <p:nvPr/>
+      </p:nvGrpSpPr>
+      <p:grpSpPr>
+        <a:xfrm>
+          <a:off x="0" y="0"/>
+          <a:ext cx="0" cy="0"/>
+          <a:chOff x="0" y="0"/>
+          <a:chExt cx="0" cy="0"/>
+        </a:xfrm>
+      </p:grpSpPr>
+      <p:sp>
+        <p:nvSpPr>
+          <p:cNvPr id="2" name="Slide Image Placeholder 1"/>
+          <p:cNvSpPr>
+            <a:spLocks noGrp="1"/>
+          </p:cNvSpPr>
+          <p:nvPr>
+            <p:ph type="sldImg" idx="2"/>
+          </p:nvPr>
+        </p:nvSpPr>
+        <p:spPr/>
+      </p:sp>
+      <p:sp>
+        <p:nvSpPr>
+          <p:cNvPr id="3" name="Notes Placeholder 2"/>
+          <p:cNvSpPr>
+            <a:spLocks noGrp="1"/>
+          </p:cNvSpPr>
+          <p:nvPr>
+            <p:ph type="body" idx="3" sz="quarter"/>
+          </p:nvPr>
+        </p:nvSpPr>
+        <p:spPr/>
+        <p:txBody>
+          <a:bodyPr/>
+          <a:lstStyle/>
+          <a:p>
+            <a:r>
+              <a:t>Talk through any answers the class found difficult.</a:t>
+            </a:r>
+          </a:p>
+        </p:txBody>
+      </p:sp>
+      <p:sp>
+        <p:nvSpPr>
+          <p:cNvPr id="4" name="Slide Number Placeholder 3"/>
+          <p:cNvSpPr>
+            <a:spLocks noGrp="1"/>
+          </p:cNvSpPr>
+          <p:nvPr>
+            <p:ph type="sldNum" idx="5" sz="quarter"/>
+          </p:nvPr>
+        </p:nvSpPr>
+        <p:spPr/>
+      </p:sp>
+    </p:spTree>
+  </p:cSld>
+  <p:clrMapOvr>
+    <a:masterClrMapping/>
+  </p:clrMapOvr>
+</p:notes>
+</file>
+
+<file path=ppt/notesSlides/notesSlide5.xml><?xml version="1.0" encoding="utf-8"?>
 <p:notes xmlns:a="http://schemas.openxmlformats.org/drawingml/2006/main" xmlns:p="http://schemas.openxmlformats.org/presentationml/2006/main" xmlns:r="http://schemas.openxmlformats.org/officeDocument/2006/relationships">
   <p:cSld>
     <p:spTree>
@@ -3975,6 +4149,2355 @@
 </p:sld>
 </file>
 
+<file path=ppt/slides/slide10.xml><?xml version="1.0" encoding="utf-8"?>
+<p:sld xmlns:a="http://schemas.openxmlformats.org/drawingml/2006/main" xmlns:p="http://schemas.openxmlformats.org/presentationml/2006/main" xmlns:r="http://schemas.openxmlformats.org/officeDocument/2006/relationships">
+  <p:cSld>
+    <p:bg>
+      <p:bgPr>
+        <a:solidFill>
+          <a:srgbClr val="FFFFFF"/>
+        </a:solidFill>
+        <a:effectLst/>
+      </p:bgPr>
+    </p:bg>
+    <p:spTree>
+      <p:nvGrpSpPr>
+        <p:cNvPr id="1" name=""/>
+        <p:cNvGrpSpPr/>
+        <p:nvPr/>
+      </p:nvGrpSpPr>
+      <p:grpSpPr/>
+      <p:sp>
+        <p:nvSpPr>
+          <p:cNvPr id="2" name="TextBox 1"/>
+          <p:cNvSpPr txBox="1"/>
+          <p:nvPr/>
+        </p:nvSpPr>
+        <p:spPr>
+          <a:xfrm>
+            <a:off x="548640" y="320040"/>
+            <a:ext cx="11094415" cy="274320"/>
+          </a:xfrm>
+          <a:prstGeom prst="rect">
+            <a:avLst/>
+          </a:prstGeom>
+          <a:noFill/>
+        </p:spPr>
+        <p:txBody>
+          <a:bodyPr wrap="square" anchor="t" lIns="0" rIns="0" tIns="0" bIns="0"/>
+          <a:lstStyle/>
+          <a:p>
+            <a:pPr algn="l"/>
+            <a:r>
+              <a:rPr sz="1100" b="1" i="0">
+                <a:solidFill>
+                  <a:srgbClr val="54595D"/>
+                </a:solidFill>
+                <a:latin typeface="Calibri"/>
+              </a:rPr>
+              <a:t>ENGINEERING CORE  ·  Core Component</a:t>
+            </a:r>
+          </a:p>
+        </p:txBody>
+      </p:sp>
+      <p:sp>
+        <p:nvSpPr>
+          <p:cNvPr id="3" name="TextBox 2"/>
+          <p:cNvSpPr txBox="1"/>
+          <p:nvPr/>
+        </p:nvSpPr>
+        <p:spPr>
+          <a:xfrm>
+            <a:off x="548640" y="566928"/>
+            <a:ext cx="11094415" cy="822960"/>
+          </a:xfrm>
+          <a:prstGeom prst="rect">
+            <a:avLst/>
+          </a:prstGeom>
+          <a:noFill/>
+        </p:spPr>
+        <p:txBody>
+          <a:bodyPr wrap="square" anchor="ctr" lIns="0" rIns="0" tIns="0" bIns="0"/>
+          <a:lstStyle/>
+          <a:p>
+            <a:pPr algn="l"/>
+            <a:r>
+              <a:rPr sz="3200" b="1" i="0">
+                <a:solidFill>
+                  <a:srgbClr val="03306E"/>
+                </a:solidFill>
+                <a:latin typeface="Cambria"/>
+              </a:rPr>
+              <a:t>Check your understanding</a:t>
+            </a:r>
+          </a:p>
+        </p:txBody>
+      </p:sp>
+      <p:sp>
+        <p:nvSpPr>
+          <p:cNvPr id="4" name="TextBox 3"/>
+          <p:cNvSpPr txBox="1"/>
+          <p:nvPr/>
+        </p:nvSpPr>
+        <p:spPr>
+          <a:xfrm>
+            <a:off x="548640" y="6446520"/>
+            <a:ext cx="8229600" cy="274320"/>
+          </a:xfrm>
+          <a:prstGeom prst="rect">
+            <a:avLst/>
+          </a:prstGeom>
+          <a:noFill/>
+        </p:spPr>
+        <p:txBody>
+          <a:bodyPr wrap="square" anchor="t" lIns="0" rIns="0" tIns="0" bIns="0"/>
+          <a:lstStyle/>
+          <a:p>
+            <a:pPr algn="l"/>
+            <a:r>
+              <a:rPr sz="1000" b="0" i="0">
+                <a:solidFill>
+                  <a:srgbClr val="54595D"/>
+                </a:solidFill>
+                <a:latin typeface="Calibri"/>
+              </a:rPr>
+              <a:t>Design and Development for Engineering and Manufacturing T Level  ·  The Employer-set Project</a:t>
+            </a:r>
+          </a:p>
+        </p:txBody>
+      </p:sp>
+      <p:sp>
+        <p:nvSpPr>
+          <p:cNvPr id="5" name="TextBox 4"/>
+          <p:cNvSpPr txBox="1"/>
+          <p:nvPr/>
+        </p:nvSpPr>
+        <p:spPr>
+          <a:xfrm>
+            <a:off x="10728655" y="6446520"/>
+            <a:ext cx="914400" cy="274320"/>
+          </a:xfrm>
+          <a:prstGeom prst="rect">
+            <a:avLst/>
+          </a:prstGeom>
+          <a:noFill/>
+        </p:spPr>
+        <p:txBody>
+          <a:bodyPr wrap="square" anchor="t" lIns="0" rIns="0" tIns="0" bIns="0"/>
+          <a:lstStyle/>
+          <a:p>
+            <a:pPr algn="r"/>
+            <a:r>
+              <a:rPr sz="1000" b="0" i="0">
+                <a:solidFill>
+                  <a:srgbClr val="54595D"/>
+                </a:solidFill>
+                <a:latin typeface="Calibri"/>
+              </a:rPr>
+              <a:t>10</a:t>
+            </a:r>
+          </a:p>
+        </p:txBody>
+      </p:sp>
+      <p:sp>
+        <p:nvSpPr>
+          <p:cNvPr id="6" name="Oval 5"/>
+          <p:cNvSpPr/>
+          <p:nvPr/>
+        </p:nvSpPr>
+        <p:spPr>
+          <a:xfrm>
+            <a:off x="548640" y="1618488"/>
+            <a:ext cx="411480" cy="411480"/>
+          </a:xfrm>
+          <a:prstGeom prst="ellipse">
+            <a:avLst/>
+          </a:prstGeom>
+          <a:solidFill>
+            <a:srgbClr val="F2B705"/>
+          </a:solidFill>
+          <a:ln>
+            <a:noFill/>
+          </a:ln>
+          <a:effectLst/>
+        </p:spPr>
+        <p:style>
+          <a:lnRef idx="1">
+            <a:schemeClr val="accent1"/>
+          </a:lnRef>
+          <a:fillRef idx="3">
+            <a:schemeClr val="accent1"/>
+          </a:fillRef>
+          <a:effectRef idx="2">
+            <a:schemeClr val="accent1"/>
+          </a:effectRef>
+          <a:fontRef idx="minor">
+            <a:schemeClr val="lt1"/>
+          </a:fontRef>
+        </p:style>
+        <p:txBody>
+          <a:bodyPr rtlCol="0" anchor="ctr" lIns="0" rIns="0" tIns="0" bIns="0"/>
+          <a:lstStyle/>
+          <a:p>
+            <a:pPr algn="ctr"/>
+            <a:r>
+              <a:rPr sz="1400" b="1">
+                <a:solidFill>
+                  <a:srgbClr val="202122"/>
+                </a:solidFill>
+                <a:latin typeface="Calibri"/>
+              </a:rPr>
+              <a:t>1</a:t>
+            </a:r>
+          </a:p>
+        </p:txBody>
+      </p:sp>
+      <p:sp>
+        <p:nvSpPr>
+          <p:cNvPr id="7" name="TextBox 6"/>
+          <p:cNvSpPr txBox="1"/>
+          <p:nvPr/>
+        </p:nvSpPr>
+        <p:spPr>
+          <a:xfrm>
+            <a:off x="1234440" y="1600200"/>
+            <a:ext cx="10408615" cy="1030986"/>
+          </a:xfrm>
+          <a:prstGeom prst="rect">
+            <a:avLst/>
+          </a:prstGeom>
+          <a:noFill/>
+        </p:spPr>
+        <p:txBody>
+          <a:bodyPr wrap="square" anchor="t" lIns="0" rIns="0" tIns="0" bIns="0"/>
+          <a:lstStyle/>
+          <a:p>
+            <a:pPr algn="l"/>
+            <a:r>
+              <a:rPr sz="2200" b="0" i="0">
+                <a:solidFill>
+                  <a:srgbClr val="202122"/>
+                </a:solidFill>
+                <a:latin typeface="Calibri"/>
+              </a:rPr>
+              <a:t>What percentage of the core is the ESP?</a:t>
+            </a:r>
+          </a:p>
+        </p:txBody>
+      </p:sp>
+      <p:sp>
+        <p:nvSpPr>
+          <p:cNvPr id="8" name="Oval 7"/>
+          <p:cNvSpPr/>
+          <p:nvPr/>
+        </p:nvSpPr>
+        <p:spPr>
+          <a:xfrm>
+            <a:off x="548640" y="2814066"/>
+            <a:ext cx="411480" cy="411480"/>
+          </a:xfrm>
+          <a:prstGeom prst="ellipse">
+            <a:avLst/>
+          </a:prstGeom>
+          <a:solidFill>
+            <a:srgbClr val="F2B705"/>
+          </a:solidFill>
+          <a:ln>
+            <a:noFill/>
+          </a:ln>
+          <a:effectLst/>
+        </p:spPr>
+        <p:style>
+          <a:lnRef idx="1">
+            <a:schemeClr val="accent1"/>
+          </a:lnRef>
+          <a:fillRef idx="3">
+            <a:schemeClr val="accent1"/>
+          </a:fillRef>
+          <a:effectRef idx="2">
+            <a:schemeClr val="accent1"/>
+          </a:effectRef>
+          <a:fontRef idx="minor">
+            <a:schemeClr val="lt1"/>
+          </a:fontRef>
+        </p:style>
+        <p:txBody>
+          <a:bodyPr rtlCol="0" anchor="ctr" lIns="0" rIns="0" tIns="0" bIns="0"/>
+          <a:lstStyle/>
+          <a:p>
+            <a:pPr algn="ctr"/>
+            <a:r>
+              <a:rPr sz="1400" b="1">
+                <a:solidFill>
+                  <a:srgbClr val="202122"/>
+                </a:solidFill>
+                <a:latin typeface="Calibri"/>
+              </a:rPr>
+              <a:t>2</a:t>
+            </a:r>
+          </a:p>
+        </p:txBody>
+      </p:sp>
+      <p:sp>
+        <p:nvSpPr>
+          <p:cNvPr id="9" name="TextBox 8"/>
+          <p:cNvSpPr txBox="1"/>
+          <p:nvPr/>
+        </p:nvSpPr>
+        <p:spPr>
+          <a:xfrm>
+            <a:off x="1234440" y="2795778"/>
+            <a:ext cx="10408615" cy="1030986"/>
+          </a:xfrm>
+          <a:prstGeom prst="rect">
+            <a:avLst/>
+          </a:prstGeom>
+          <a:noFill/>
+        </p:spPr>
+        <p:txBody>
+          <a:bodyPr wrap="square" anchor="t" lIns="0" rIns="0" tIns="0" bIns="0"/>
+          <a:lstStyle/>
+          <a:p>
+            <a:pPr algn="l"/>
+            <a:r>
+              <a:rPr sz="2200" b="0" i="0">
+                <a:solidFill>
+                  <a:srgbClr val="202122"/>
+                </a:solidFill>
+                <a:latin typeface="Calibri"/>
+              </a:rPr>
+              <a:t>Which AO carries the most marks?</a:t>
+            </a:r>
+          </a:p>
+        </p:txBody>
+      </p:sp>
+      <p:sp>
+        <p:nvSpPr>
+          <p:cNvPr id="10" name="Oval 9"/>
+          <p:cNvSpPr/>
+          <p:nvPr/>
+        </p:nvSpPr>
+        <p:spPr>
+          <a:xfrm>
+            <a:off x="548640" y="4009644"/>
+            <a:ext cx="411480" cy="411480"/>
+          </a:xfrm>
+          <a:prstGeom prst="ellipse">
+            <a:avLst/>
+          </a:prstGeom>
+          <a:solidFill>
+            <a:srgbClr val="F2B705"/>
+          </a:solidFill>
+          <a:ln>
+            <a:noFill/>
+          </a:ln>
+          <a:effectLst/>
+        </p:spPr>
+        <p:style>
+          <a:lnRef idx="1">
+            <a:schemeClr val="accent1"/>
+          </a:lnRef>
+          <a:fillRef idx="3">
+            <a:schemeClr val="accent1"/>
+          </a:fillRef>
+          <a:effectRef idx="2">
+            <a:schemeClr val="accent1"/>
+          </a:effectRef>
+          <a:fontRef idx="minor">
+            <a:schemeClr val="lt1"/>
+          </a:fontRef>
+        </p:style>
+        <p:txBody>
+          <a:bodyPr rtlCol="0" anchor="ctr" lIns="0" rIns="0" tIns="0" bIns="0"/>
+          <a:lstStyle/>
+          <a:p>
+            <a:pPr algn="ctr"/>
+            <a:r>
+              <a:rPr sz="1400" b="1">
+                <a:solidFill>
+                  <a:srgbClr val="202122"/>
+                </a:solidFill>
+                <a:latin typeface="Calibri"/>
+              </a:rPr>
+              <a:t>3</a:t>
+            </a:r>
+          </a:p>
+        </p:txBody>
+      </p:sp>
+      <p:sp>
+        <p:nvSpPr>
+          <p:cNvPr id="11" name="TextBox 10"/>
+          <p:cNvSpPr txBox="1"/>
+          <p:nvPr/>
+        </p:nvSpPr>
+        <p:spPr>
+          <a:xfrm>
+            <a:off x="1234440" y="3991356"/>
+            <a:ext cx="10408615" cy="1030986"/>
+          </a:xfrm>
+          <a:prstGeom prst="rect">
+            <a:avLst/>
+          </a:prstGeom>
+          <a:noFill/>
+        </p:spPr>
+        <p:txBody>
+          <a:bodyPr wrap="square" anchor="t" lIns="0" rIns="0" tIns="0" bIns="0"/>
+          <a:lstStyle/>
+          <a:p>
+            <a:pPr algn="l"/>
+            <a:r>
+              <a:rPr sz="2200" b="0" i="0">
+                <a:solidFill>
+                  <a:srgbClr val="202122"/>
+                </a:solidFill>
+                <a:latin typeface="Calibri"/>
+              </a:rPr>
+              <a:t>Name the four task areas.</a:t>
+            </a:r>
+          </a:p>
+        </p:txBody>
+      </p:sp>
+      <p:sp>
+        <p:nvSpPr>
+          <p:cNvPr id="12" name="Oval 11"/>
+          <p:cNvSpPr/>
+          <p:nvPr/>
+        </p:nvSpPr>
+        <p:spPr>
+          <a:xfrm>
+            <a:off x="548640" y="5205221"/>
+            <a:ext cx="411480" cy="411480"/>
+          </a:xfrm>
+          <a:prstGeom prst="ellipse">
+            <a:avLst/>
+          </a:prstGeom>
+          <a:solidFill>
+            <a:srgbClr val="F2B705"/>
+          </a:solidFill>
+          <a:ln>
+            <a:noFill/>
+          </a:ln>
+          <a:effectLst/>
+        </p:spPr>
+        <p:style>
+          <a:lnRef idx="1">
+            <a:schemeClr val="accent1"/>
+          </a:lnRef>
+          <a:fillRef idx="3">
+            <a:schemeClr val="accent1"/>
+          </a:fillRef>
+          <a:effectRef idx="2">
+            <a:schemeClr val="accent1"/>
+          </a:effectRef>
+          <a:fontRef idx="minor">
+            <a:schemeClr val="lt1"/>
+          </a:fontRef>
+        </p:style>
+        <p:txBody>
+          <a:bodyPr rtlCol="0" anchor="ctr" lIns="0" rIns="0" tIns="0" bIns="0"/>
+          <a:lstStyle/>
+          <a:p>
+            <a:pPr algn="ctr"/>
+            <a:r>
+              <a:rPr sz="1400" b="1">
+                <a:solidFill>
+                  <a:srgbClr val="202122"/>
+                </a:solidFill>
+                <a:latin typeface="Calibri"/>
+              </a:rPr>
+              <a:t>4</a:t>
+            </a:r>
+          </a:p>
+        </p:txBody>
+      </p:sp>
+      <p:sp>
+        <p:nvSpPr>
+          <p:cNvPr id="13" name="TextBox 12"/>
+          <p:cNvSpPr txBox="1"/>
+          <p:nvPr/>
+        </p:nvSpPr>
+        <p:spPr>
+          <a:xfrm>
+            <a:off x="1234440" y="5186933"/>
+            <a:ext cx="10408615" cy="1030986"/>
+          </a:xfrm>
+          <a:prstGeom prst="rect">
+            <a:avLst/>
+          </a:prstGeom>
+          <a:noFill/>
+        </p:spPr>
+        <p:txBody>
+          <a:bodyPr wrap="square" anchor="t" lIns="0" rIns="0" tIns="0" bIns="0"/>
+          <a:lstStyle/>
+          <a:p>
+            <a:pPr algn="l"/>
+            <a:r>
+              <a:rPr sz="2200" b="0" i="0">
+                <a:solidFill>
+                  <a:srgbClr val="202122"/>
+                </a:solidFill>
+                <a:latin typeface="Calibri"/>
+              </a:rPr>
+              <a:t>What does AO5 ask for?</a:t>
+            </a:r>
+          </a:p>
+        </p:txBody>
+      </p:sp>
+    </p:spTree>
+  </p:cSld>
+  <p:clrMapOvr>
+    <a:masterClrMapping/>
+  </p:clrMapOvr>
+</p:sld>
+</file>
+
+<file path=ppt/slides/slide11.xml><?xml version="1.0" encoding="utf-8"?>
+<p:sld xmlns:a="http://schemas.openxmlformats.org/drawingml/2006/main" xmlns:p="http://schemas.openxmlformats.org/presentationml/2006/main" xmlns:r="http://schemas.openxmlformats.org/officeDocument/2006/relationships">
+  <p:cSld>
+    <p:bg>
+      <p:bgPr>
+        <a:solidFill>
+          <a:srgbClr val="FFFFFF"/>
+        </a:solidFill>
+        <a:effectLst/>
+      </p:bgPr>
+    </p:bg>
+    <p:spTree>
+      <p:nvGrpSpPr>
+        <p:cNvPr id="1" name=""/>
+        <p:cNvGrpSpPr/>
+        <p:nvPr/>
+      </p:nvGrpSpPr>
+      <p:grpSpPr/>
+      <p:sp>
+        <p:nvSpPr>
+          <p:cNvPr id="2" name="TextBox 1"/>
+          <p:cNvSpPr txBox="1"/>
+          <p:nvPr/>
+        </p:nvSpPr>
+        <p:spPr>
+          <a:xfrm>
+            <a:off x="548640" y="320040"/>
+            <a:ext cx="11094415" cy="274320"/>
+          </a:xfrm>
+          <a:prstGeom prst="rect">
+            <a:avLst/>
+          </a:prstGeom>
+          <a:noFill/>
+        </p:spPr>
+        <p:txBody>
+          <a:bodyPr wrap="square" anchor="t" lIns="0" rIns="0" tIns="0" bIns="0"/>
+          <a:lstStyle/>
+          <a:p>
+            <a:pPr algn="l"/>
+            <a:r>
+              <a:rPr sz="1100" b="1" i="0">
+                <a:solidFill>
+                  <a:srgbClr val="54595D"/>
+                </a:solidFill>
+                <a:latin typeface="Calibri"/>
+              </a:rPr>
+              <a:t>ENGINEERING CORE  ·  Core Component</a:t>
+            </a:r>
+          </a:p>
+        </p:txBody>
+      </p:sp>
+      <p:sp>
+        <p:nvSpPr>
+          <p:cNvPr id="3" name="TextBox 2"/>
+          <p:cNvSpPr txBox="1"/>
+          <p:nvPr/>
+        </p:nvSpPr>
+        <p:spPr>
+          <a:xfrm>
+            <a:off x="548640" y="566928"/>
+            <a:ext cx="11094415" cy="822960"/>
+          </a:xfrm>
+          <a:prstGeom prst="rect">
+            <a:avLst/>
+          </a:prstGeom>
+          <a:noFill/>
+        </p:spPr>
+        <p:txBody>
+          <a:bodyPr wrap="square" anchor="ctr" lIns="0" rIns="0" tIns="0" bIns="0"/>
+          <a:lstStyle/>
+          <a:p>
+            <a:pPr algn="l"/>
+            <a:r>
+              <a:rPr sz="3200" b="1" i="0">
+                <a:solidFill>
+                  <a:srgbClr val="03306E"/>
+                </a:solidFill>
+                <a:latin typeface="Cambria"/>
+              </a:rPr>
+              <a:t>Answers</a:t>
+            </a:r>
+          </a:p>
+        </p:txBody>
+      </p:sp>
+      <p:sp>
+        <p:nvSpPr>
+          <p:cNvPr id="4" name="TextBox 3"/>
+          <p:cNvSpPr txBox="1"/>
+          <p:nvPr/>
+        </p:nvSpPr>
+        <p:spPr>
+          <a:xfrm>
+            <a:off x="548640" y="6446520"/>
+            <a:ext cx="8229600" cy="274320"/>
+          </a:xfrm>
+          <a:prstGeom prst="rect">
+            <a:avLst/>
+          </a:prstGeom>
+          <a:noFill/>
+        </p:spPr>
+        <p:txBody>
+          <a:bodyPr wrap="square" anchor="t" lIns="0" rIns="0" tIns="0" bIns="0"/>
+          <a:lstStyle/>
+          <a:p>
+            <a:pPr algn="l"/>
+            <a:r>
+              <a:rPr sz="1000" b="0" i="0">
+                <a:solidFill>
+                  <a:srgbClr val="54595D"/>
+                </a:solidFill>
+                <a:latin typeface="Calibri"/>
+              </a:rPr>
+              <a:t>Design and Development for Engineering and Manufacturing T Level  ·  The Employer-set Project</a:t>
+            </a:r>
+          </a:p>
+        </p:txBody>
+      </p:sp>
+      <p:sp>
+        <p:nvSpPr>
+          <p:cNvPr id="5" name="TextBox 4"/>
+          <p:cNvSpPr txBox="1"/>
+          <p:nvPr/>
+        </p:nvSpPr>
+        <p:spPr>
+          <a:xfrm>
+            <a:off x="10728655" y="6446520"/>
+            <a:ext cx="914400" cy="274320"/>
+          </a:xfrm>
+          <a:prstGeom prst="rect">
+            <a:avLst/>
+          </a:prstGeom>
+          <a:noFill/>
+        </p:spPr>
+        <p:txBody>
+          <a:bodyPr wrap="square" anchor="t" lIns="0" rIns="0" tIns="0" bIns="0"/>
+          <a:lstStyle/>
+          <a:p>
+            <a:pPr algn="r"/>
+            <a:r>
+              <a:rPr sz="1000" b="0" i="0">
+                <a:solidFill>
+                  <a:srgbClr val="54595D"/>
+                </a:solidFill>
+                <a:latin typeface="Calibri"/>
+              </a:rPr>
+              <a:t>11</a:t>
+            </a:r>
+          </a:p>
+        </p:txBody>
+      </p:sp>
+      <p:sp>
+        <p:nvSpPr>
+          <p:cNvPr id="6" name="Oval 5"/>
+          <p:cNvSpPr/>
+          <p:nvPr/>
+        </p:nvSpPr>
+        <p:spPr>
+          <a:xfrm>
+            <a:off x="548640" y="1618488"/>
+            <a:ext cx="411480" cy="411480"/>
+          </a:xfrm>
+          <a:prstGeom prst="ellipse">
+            <a:avLst/>
+          </a:prstGeom>
+          <a:solidFill>
+            <a:srgbClr val="F2B705"/>
+          </a:solidFill>
+          <a:ln>
+            <a:noFill/>
+          </a:ln>
+          <a:effectLst/>
+        </p:spPr>
+        <p:style>
+          <a:lnRef idx="1">
+            <a:schemeClr val="accent1"/>
+          </a:lnRef>
+          <a:fillRef idx="3">
+            <a:schemeClr val="accent1"/>
+          </a:fillRef>
+          <a:effectRef idx="2">
+            <a:schemeClr val="accent1"/>
+          </a:effectRef>
+          <a:fontRef idx="minor">
+            <a:schemeClr val="lt1"/>
+          </a:fontRef>
+        </p:style>
+        <p:txBody>
+          <a:bodyPr rtlCol="0" anchor="ctr" lIns="0" rIns="0" tIns="0" bIns="0"/>
+          <a:lstStyle/>
+          <a:p>
+            <a:pPr algn="ctr"/>
+            <a:r>
+              <a:rPr sz="1400" b="1">
+                <a:solidFill>
+                  <a:srgbClr val="202122"/>
+                </a:solidFill>
+                <a:latin typeface="Calibri"/>
+              </a:rPr>
+              <a:t>1</a:t>
+            </a:r>
+          </a:p>
+        </p:txBody>
+      </p:sp>
+      <p:sp>
+        <p:nvSpPr>
+          <p:cNvPr id="7" name="TextBox 6"/>
+          <p:cNvSpPr txBox="1"/>
+          <p:nvPr/>
+        </p:nvSpPr>
+        <p:spPr>
+          <a:xfrm>
+            <a:off x="1234440" y="1600200"/>
+            <a:ext cx="10408615" cy="1030986"/>
+          </a:xfrm>
+          <a:prstGeom prst="rect">
+            <a:avLst/>
+          </a:prstGeom>
+          <a:noFill/>
+        </p:spPr>
+        <p:txBody>
+          <a:bodyPr wrap="square" anchor="t" lIns="0" rIns="0" tIns="0" bIns="0"/>
+          <a:lstStyle/>
+          <a:p>
+            <a:pPr algn="l"/>
+            <a:r>
+              <a:rPr sz="1800" b="0" i="0">
+                <a:solidFill>
+                  <a:srgbClr val="54595D"/>
+                </a:solidFill>
+                <a:latin typeface="Calibri"/>
+              </a:rPr>
+              <a:t>What percentage of the core is the ESP?</a:t>
+            </a:r>
+          </a:p>
+          <a:p>
+            <a:r>
+              <a:rPr sz="1800" b="1">
+                <a:solidFill>
+                  <a:srgbClr val="03306E"/>
+                </a:solidFill>
+                <a:latin typeface="Calibri"/>
+              </a:rPr>
+              <a:t>30%.</a:t>
+            </a:r>
+          </a:p>
+        </p:txBody>
+      </p:sp>
+      <p:sp>
+        <p:nvSpPr>
+          <p:cNvPr id="8" name="Oval 7"/>
+          <p:cNvSpPr/>
+          <p:nvPr/>
+        </p:nvSpPr>
+        <p:spPr>
+          <a:xfrm>
+            <a:off x="548640" y="2814066"/>
+            <a:ext cx="411480" cy="411480"/>
+          </a:xfrm>
+          <a:prstGeom prst="ellipse">
+            <a:avLst/>
+          </a:prstGeom>
+          <a:solidFill>
+            <a:srgbClr val="F2B705"/>
+          </a:solidFill>
+          <a:ln>
+            <a:noFill/>
+          </a:ln>
+          <a:effectLst/>
+        </p:spPr>
+        <p:style>
+          <a:lnRef idx="1">
+            <a:schemeClr val="accent1"/>
+          </a:lnRef>
+          <a:fillRef idx="3">
+            <a:schemeClr val="accent1"/>
+          </a:fillRef>
+          <a:effectRef idx="2">
+            <a:schemeClr val="accent1"/>
+          </a:effectRef>
+          <a:fontRef idx="minor">
+            <a:schemeClr val="lt1"/>
+          </a:fontRef>
+        </p:style>
+        <p:txBody>
+          <a:bodyPr rtlCol="0" anchor="ctr" lIns="0" rIns="0" tIns="0" bIns="0"/>
+          <a:lstStyle/>
+          <a:p>
+            <a:pPr algn="ctr"/>
+            <a:r>
+              <a:rPr sz="1400" b="1">
+                <a:solidFill>
+                  <a:srgbClr val="202122"/>
+                </a:solidFill>
+                <a:latin typeface="Calibri"/>
+              </a:rPr>
+              <a:t>2</a:t>
+            </a:r>
+          </a:p>
+        </p:txBody>
+      </p:sp>
+      <p:sp>
+        <p:nvSpPr>
+          <p:cNvPr id="9" name="TextBox 8"/>
+          <p:cNvSpPr txBox="1"/>
+          <p:nvPr/>
+        </p:nvSpPr>
+        <p:spPr>
+          <a:xfrm>
+            <a:off x="1234440" y="2795778"/>
+            <a:ext cx="10408615" cy="1030986"/>
+          </a:xfrm>
+          <a:prstGeom prst="rect">
+            <a:avLst/>
+          </a:prstGeom>
+          <a:noFill/>
+        </p:spPr>
+        <p:txBody>
+          <a:bodyPr wrap="square" anchor="t" lIns="0" rIns="0" tIns="0" bIns="0"/>
+          <a:lstStyle/>
+          <a:p>
+            <a:pPr algn="l"/>
+            <a:r>
+              <a:rPr sz="1800" b="0" i="0">
+                <a:solidFill>
+                  <a:srgbClr val="54595D"/>
+                </a:solidFill>
+                <a:latin typeface="Calibri"/>
+              </a:rPr>
+              <a:t>Which AO carries the most marks?</a:t>
+            </a:r>
+          </a:p>
+          <a:p>
+            <a:r>
+              <a:rPr sz="1800" b="1">
+                <a:solidFill>
+                  <a:srgbClr val="03306E"/>
+                </a:solidFill>
+                <a:latin typeface="Calibri"/>
+              </a:rPr>
+              <a:t>AO2, applying core knowledge and skills (50%).</a:t>
+            </a:r>
+          </a:p>
+        </p:txBody>
+      </p:sp>
+      <p:sp>
+        <p:nvSpPr>
+          <p:cNvPr id="10" name="Oval 9"/>
+          <p:cNvSpPr/>
+          <p:nvPr/>
+        </p:nvSpPr>
+        <p:spPr>
+          <a:xfrm>
+            <a:off x="548640" y="4009644"/>
+            <a:ext cx="411480" cy="411480"/>
+          </a:xfrm>
+          <a:prstGeom prst="ellipse">
+            <a:avLst/>
+          </a:prstGeom>
+          <a:solidFill>
+            <a:srgbClr val="F2B705"/>
+          </a:solidFill>
+          <a:ln>
+            <a:noFill/>
+          </a:ln>
+          <a:effectLst/>
+        </p:spPr>
+        <p:style>
+          <a:lnRef idx="1">
+            <a:schemeClr val="accent1"/>
+          </a:lnRef>
+          <a:fillRef idx="3">
+            <a:schemeClr val="accent1"/>
+          </a:fillRef>
+          <a:effectRef idx="2">
+            <a:schemeClr val="accent1"/>
+          </a:effectRef>
+          <a:fontRef idx="minor">
+            <a:schemeClr val="lt1"/>
+          </a:fontRef>
+        </p:style>
+        <p:txBody>
+          <a:bodyPr rtlCol="0" anchor="ctr" lIns="0" rIns="0" tIns="0" bIns="0"/>
+          <a:lstStyle/>
+          <a:p>
+            <a:pPr algn="ctr"/>
+            <a:r>
+              <a:rPr sz="1400" b="1">
+                <a:solidFill>
+                  <a:srgbClr val="202122"/>
+                </a:solidFill>
+                <a:latin typeface="Calibri"/>
+              </a:rPr>
+              <a:t>3</a:t>
+            </a:r>
+          </a:p>
+        </p:txBody>
+      </p:sp>
+      <p:sp>
+        <p:nvSpPr>
+          <p:cNvPr id="11" name="TextBox 10"/>
+          <p:cNvSpPr txBox="1"/>
+          <p:nvPr/>
+        </p:nvSpPr>
+        <p:spPr>
+          <a:xfrm>
+            <a:off x="1234440" y="3991356"/>
+            <a:ext cx="10408615" cy="1030986"/>
+          </a:xfrm>
+          <a:prstGeom prst="rect">
+            <a:avLst/>
+          </a:prstGeom>
+          <a:noFill/>
+        </p:spPr>
+        <p:txBody>
+          <a:bodyPr wrap="square" anchor="t" lIns="0" rIns="0" tIns="0" bIns="0"/>
+          <a:lstStyle/>
+          <a:p>
+            <a:pPr algn="l"/>
+            <a:r>
+              <a:rPr sz="1800" b="0" i="0">
+                <a:solidFill>
+                  <a:srgbClr val="54595D"/>
+                </a:solidFill>
+                <a:latin typeface="Calibri"/>
+              </a:rPr>
+              <a:t>Name the four task areas.</a:t>
+            </a:r>
+          </a:p>
+          <a:p>
+            <a:r>
+              <a:rPr sz="1800" b="1">
+                <a:solidFill>
+                  <a:srgbClr val="03306E"/>
+                </a:solidFill>
+                <a:latin typeface="Calibri"/>
+              </a:rPr>
+              <a:t>Research, design, plan, present.</a:t>
+            </a:r>
+          </a:p>
+        </p:txBody>
+      </p:sp>
+      <p:sp>
+        <p:nvSpPr>
+          <p:cNvPr id="12" name="Oval 11"/>
+          <p:cNvSpPr/>
+          <p:nvPr/>
+        </p:nvSpPr>
+        <p:spPr>
+          <a:xfrm>
+            <a:off x="548640" y="5205221"/>
+            <a:ext cx="411480" cy="411480"/>
+          </a:xfrm>
+          <a:prstGeom prst="ellipse">
+            <a:avLst/>
+          </a:prstGeom>
+          <a:solidFill>
+            <a:srgbClr val="F2B705"/>
+          </a:solidFill>
+          <a:ln>
+            <a:noFill/>
+          </a:ln>
+          <a:effectLst/>
+        </p:spPr>
+        <p:style>
+          <a:lnRef idx="1">
+            <a:schemeClr val="accent1"/>
+          </a:lnRef>
+          <a:fillRef idx="3">
+            <a:schemeClr val="accent1"/>
+          </a:fillRef>
+          <a:effectRef idx="2">
+            <a:schemeClr val="accent1"/>
+          </a:effectRef>
+          <a:fontRef idx="minor">
+            <a:schemeClr val="lt1"/>
+          </a:fontRef>
+        </p:style>
+        <p:txBody>
+          <a:bodyPr rtlCol="0" anchor="ctr" lIns="0" rIns="0" tIns="0" bIns="0"/>
+          <a:lstStyle/>
+          <a:p>
+            <a:pPr algn="ctr"/>
+            <a:r>
+              <a:rPr sz="1400" b="1">
+                <a:solidFill>
+                  <a:srgbClr val="202122"/>
+                </a:solidFill>
+                <a:latin typeface="Calibri"/>
+              </a:rPr>
+              <a:t>4</a:t>
+            </a:r>
+          </a:p>
+        </p:txBody>
+      </p:sp>
+      <p:sp>
+        <p:nvSpPr>
+          <p:cNvPr id="13" name="TextBox 12"/>
+          <p:cNvSpPr txBox="1"/>
+          <p:nvPr/>
+        </p:nvSpPr>
+        <p:spPr>
+          <a:xfrm>
+            <a:off x="1234440" y="5186933"/>
+            <a:ext cx="10408615" cy="1030986"/>
+          </a:xfrm>
+          <a:prstGeom prst="rect">
+            <a:avLst/>
+          </a:prstGeom>
+          <a:noFill/>
+        </p:spPr>
+        <p:txBody>
+          <a:bodyPr wrap="square" anchor="t" lIns="0" rIns="0" tIns="0" bIns="0"/>
+          <a:lstStyle/>
+          <a:p>
+            <a:pPr algn="l"/>
+            <a:r>
+              <a:rPr sz="1800" b="0" i="0">
+                <a:solidFill>
+                  <a:srgbClr val="54595D"/>
+                </a:solidFill>
+                <a:latin typeface="Calibri"/>
+              </a:rPr>
+              <a:t>What does AO5 ask for?</a:t>
+            </a:r>
+          </a:p>
+          <a:p>
+            <a:r>
+              <a:rPr sz="1800" b="1">
+                <a:solidFill>
+                  <a:srgbClr val="03306E"/>
+                </a:solidFill>
+                <a:latin typeface="Calibri"/>
+              </a:rPr>
+              <a:t>Realising the outcome and reviewing how well it meets the brief.</a:t>
+            </a:r>
+          </a:p>
+        </p:txBody>
+      </p:sp>
+    </p:spTree>
+  </p:cSld>
+  <p:clrMapOvr>
+    <a:masterClrMapping/>
+  </p:clrMapOvr>
+</p:sld>
+</file>
+
+<file path=ppt/slides/slide12.xml><?xml version="1.0" encoding="utf-8"?>
+<p:sld xmlns:a="http://schemas.openxmlformats.org/drawingml/2006/main" xmlns:p="http://schemas.openxmlformats.org/presentationml/2006/main" xmlns:r="http://schemas.openxmlformats.org/officeDocument/2006/relationships">
+  <p:cSld>
+    <p:bg>
+      <p:bgPr>
+        <a:solidFill>
+          <a:srgbClr val="FFFFFF"/>
+        </a:solidFill>
+        <a:effectLst/>
+      </p:bgPr>
+    </p:bg>
+    <p:spTree>
+      <p:nvGrpSpPr>
+        <p:cNvPr id="1" name=""/>
+        <p:cNvGrpSpPr/>
+        <p:nvPr/>
+      </p:nvGrpSpPr>
+      <p:grpSpPr/>
+      <p:sp>
+        <p:nvSpPr>
+          <p:cNvPr id="2" name="TextBox 1"/>
+          <p:cNvSpPr txBox="1"/>
+          <p:nvPr/>
+        </p:nvSpPr>
+        <p:spPr>
+          <a:xfrm>
+            <a:off x="548640" y="320040"/>
+            <a:ext cx="11094415" cy="274320"/>
+          </a:xfrm>
+          <a:prstGeom prst="rect">
+            <a:avLst/>
+          </a:prstGeom>
+          <a:noFill/>
+        </p:spPr>
+        <p:txBody>
+          <a:bodyPr wrap="square" anchor="t" lIns="0" rIns="0" tIns="0" bIns="0"/>
+          <a:lstStyle/>
+          <a:p>
+            <a:pPr algn="l"/>
+            <a:r>
+              <a:rPr sz="1100" b="1" i="0">
+                <a:solidFill>
+                  <a:srgbClr val="54595D"/>
+                </a:solidFill>
+                <a:latin typeface="Calibri"/>
+              </a:rPr>
+              <a:t>ENGINEERING CORE  ·  Core Component</a:t>
+            </a:r>
+          </a:p>
+        </p:txBody>
+      </p:sp>
+      <p:sp>
+        <p:nvSpPr>
+          <p:cNvPr id="3" name="TextBox 2"/>
+          <p:cNvSpPr txBox="1"/>
+          <p:nvPr/>
+        </p:nvSpPr>
+        <p:spPr>
+          <a:xfrm>
+            <a:off x="548640" y="566928"/>
+            <a:ext cx="11094415" cy="822960"/>
+          </a:xfrm>
+          <a:prstGeom prst="rect">
+            <a:avLst/>
+          </a:prstGeom>
+          <a:noFill/>
+        </p:spPr>
+        <p:txBody>
+          <a:bodyPr wrap="square" anchor="ctr" lIns="0" rIns="0" tIns="0" bIns="0"/>
+          <a:lstStyle/>
+          <a:p>
+            <a:pPr algn="l"/>
+            <a:r>
+              <a:rPr sz="3200" b="1" i="0">
+                <a:solidFill>
+                  <a:srgbClr val="03306E"/>
+                </a:solidFill>
+                <a:latin typeface="Cambria"/>
+              </a:rPr>
+              <a:t>Activity: Mini brief</a:t>
+            </a:r>
+          </a:p>
+        </p:txBody>
+      </p:sp>
+      <p:sp>
+        <p:nvSpPr>
+          <p:cNvPr id="4" name="TextBox 3"/>
+          <p:cNvSpPr txBox="1"/>
+          <p:nvPr/>
+        </p:nvSpPr>
+        <p:spPr>
+          <a:xfrm>
+            <a:off x="548640" y="6446520"/>
+            <a:ext cx="8229600" cy="274320"/>
+          </a:xfrm>
+          <a:prstGeom prst="rect">
+            <a:avLst/>
+          </a:prstGeom>
+          <a:noFill/>
+        </p:spPr>
+        <p:txBody>
+          <a:bodyPr wrap="square" anchor="t" lIns="0" rIns="0" tIns="0" bIns="0"/>
+          <a:lstStyle/>
+          <a:p>
+            <a:pPr algn="l"/>
+            <a:r>
+              <a:rPr sz="1000" b="0" i="0">
+                <a:solidFill>
+                  <a:srgbClr val="54595D"/>
+                </a:solidFill>
+                <a:latin typeface="Calibri"/>
+              </a:rPr>
+              <a:t>Design and Development for Engineering and Manufacturing T Level  ·  The Employer-set Project</a:t>
+            </a:r>
+          </a:p>
+        </p:txBody>
+      </p:sp>
+      <p:sp>
+        <p:nvSpPr>
+          <p:cNvPr id="5" name="TextBox 4"/>
+          <p:cNvSpPr txBox="1"/>
+          <p:nvPr/>
+        </p:nvSpPr>
+        <p:spPr>
+          <a:xfrm>
+            <a:off x="10728655" y="6446520"/>
+            <a:ext cx="914400" cy="274320"/>
+          </a:xfrm>
+          <a:prstGeom prst="rect">
+            <a:avLst/>
+          </a:prstGeom>
+          <a:noFill/>
+        </p:spPr>
+        <p:txBody>
+          <a:bodyPr wrap="square" anchor="t" lIns="0" rIns="0" tIns="0" bIns="0"/>
+          <a:lstStyle/>
+          <a:p>
+            <a:pPr algn="r"/>
+            <a:r>
+              <a:rPr sz="1000" b="0" i="0">
+                <a:solidFill>
+                  <a:srgbClr val="54595D"/>
+                </a:solidFill>
+                <a:latin typeface="Calibri"/>
+              </a:rPr>
+              <a:t>12</a:t>
+            </a:r>
+          </a:p>
+        </p:txBody>
+      </p:sp>
+      <p:sp>
+        <p:nvSpPr>
+          <p:cNvPr id="6" name="Rounded Rectangle 5"/>
+          <p:cNvSpPr/>
+          <p:nvPr/>
+        </p:nvSpPr>
+        <p:spPr>
+          <a:xfrm>
+            <a:off x="548640" y="1508760"/>
+            <a:ext cx="2011680" cy="457200"/>
+          </a:xfrm>
+          <a:prstGeom prst="roundRect">
+            <a:avLst>
+              <a:gd name="adj" fmla="val 50000"/>
+            </a:avLst>
+          </a:prstGeom>
+          <a:solidFill>
+            <a:srgbClr val="F2B705"/>
+          </a:solidFill>
+          <a:ln>
+            <a:noFill/>
+          </a:ln>
+          <a:effectLst/>
+        </p:spPr>
+        <p:style>
+          <a:lnRef idx="1">
+            <a:schemeClr val="accent1"/>
+          </a:lnRef>
+          <a:fillRef idx="3">
+            <a:schemeClr val="accent1"/>
+          </a:fillRef>
+          <a:effectRef idx="2">
+            <a:schemeClr val="accent1"/>
+          </a:effectRef>
+          <a:fontRef idx="minor">
+            <a:schemeClr val="lt1"/>
+          </a:fontRef>
+        </p:style>
+        <p:txBody>
+          <a:bodyPr rtlCol="0" anchor="ctr"/>
+          <a:lstStyle/>
+          <a:p/>
+        </p:txBody>
+      </p:sp>
+      <p:sp>
+        <p:nvSpPr>
+          <p:cNvPr id="7" name="TextBox 6"/>
+          <p:cNvSpPr txBox="1"/>
+          <p:nvPr/>
+        </p:nvSpPr>
+        <p:spPr>
+          <a:xfrm>
+            <a:off x="548640" y="1508760"/>
+            <a:ext cx="2011680" cy="457200"/>
+          </a:xfrm>
+          <a:prstGeom prst="rect">
+            <a:avLst/>
+          </a:prstGeom>
+          <a:noFill/>
+        </p:spPr>
+        <p:txBody>
+          <a:bodyPr wrap="square" anchor="ctr" lIns="0" rIns="0" tIns="0" bIns="0"/>
+          <a:lstStyle/>
+          <a:p>
+            <a:pPr algn="ctr"/>
+            <a:r>
+              <a:rPr sz="1400" b="1" i="0">
+                <a:solidFill>
+                  <a:srgbClr val="202122"/>
+                </a:solidFill>
+                <a:latin typeface="Calibri"/>
+              </a:rPr>
+              <a:t>40 minutes</a:t>
+            </a:r>
+          </a:p>
+        </p:txBody>
+      </p:sp>
+      <p:sp>
+        <p:nvSpPr>
+          <p:cNvPr id="8" name="TextBox 7"/>
+          <p:cNvSpPr txBox="1"/>
+          <p:nvPr/>
+        </p:nvSpPr>
+        <p:spPr>
+          <a:xfrm>
+            <a:off x="2743200" y="1508760"/>
+            <a:ext cx="4754880" cy="457200"/>
+          </a:xfrm>
+          <a:prstGeom prst="rect">
+            <a:avLst/>
+          </a:prstGeom>
+          <a:noFill/>
+        </p:spPr>
+        <p:txBody>
+          <a:bodyPr wrap="square" anchor="ctr" lIns="0" rIns="0" tIns="0" bIns="0"/>
+          <a:lstStyle/>
+          <a:p>
+            <a:pPr algn="l"/>
+            <a:r>
+              <a:rPr sz="1400" b="0" i="1">
+                <a:solidFill>
+                  <a:srgbClr val="54595D"/>
+                </a:solidFill>
+                <a:latin typeface="Calibri"/>
+              </a:rPr>
+              <a:t>Small groups</a:t>
+            </a:r>
+          </a:p>
+        </p:txBody>
+      </p:sp>
+      <p:sp>
+        <p:nvSpPr>
+          <p:cNvPr id="9" name="Oval 8"/>
+          <p:cNvSpPr/>
+          <p:nvPr/>
+        </p:nvSpPr>
+        <p:spPr>
+          <a:xfrm>
+            <a:off x="548640" y="2482596"/>
+            <a:ext cx="384048" cy="384048"/>
+          </a:xfrm>
+          <a:prstGeom prst="ellipse">
+            <a:avLst/>
+          </a:prstGeom>
+          <a:solidFill>
+            <a:srgbClr val="0645AD"/>
+          </a:solidFill>
+          <a:ln>
+            <a:noFill/>
+          </a:ln>
+          <a:effectLst/>
+        </p:spPr>
+        <p:style>
+          <a:lnRef idx="1">
+            <a:schemeClr val="accent1"/>
+          </a:lnRef>
+          <a:fillRef idx="3">
+            <a:schemeClr val="accent1"/>
+          </a:fillRef>
+          <a:effectRef idx="2">
+            <a:schemeClr val="accent1"/>
+          </a:effectRef>
+          <a:fontRef idx="minor">
+            <a:schemeClr val="lt1"/>
+          </a:fontRef>
+        </p:style>
+        <p:txBody>
+          <a:bodyPr rtlCol="0" anchor="ctr" lIns="0" rIns="0" tIns="0" bIns="0"/>
+          <a:lstStyle/>
+          <a:p>
+            <a:pPr algn="ctr"/>
+            <a:r>
+              <a:rPr sz="1300" b="1">
+                <a:solidFill>
+                  <a:srgbClr val="FFFFFF"/>
+                </a:solidFill>
+                <a:latin typeface="Calibri"/>
+              </a:rPr>
+              <a:t>1</a:t>
+            </a:r>
+          </a:p>
+        </p:txBody>
+      </p:sp>
+      <p:sp>
+        <p:nvSpPr>
+          <p:cNvPr id="10" name="TextBox 9"/>
+          <p:cNvSpPr txBox="1"/>
+          <p:nvPr/>
+        </p:nvSpPr>
+        <p:spPr>
+          <a:xfrm>
+            <a:off x="1143000" y="2240280"/>
+            <a:ext cx="5943600" cy="868680"/>
+          </a:xfrm>
+          <a:prstGeom prst="rect">
+            <a:avLst/>
+          </a:prstGeom>
+          <a:noFill/>
+        </p:spPr>
+        <p:txBody>
+          <a:bodyPr wrap="square" anchor="ctr" lIns="0" rIns="0" tIns="0" bIns="0"/>
+          <a:lstStyle/>
+          <a:p>
+            <a:pPr algn="l"/>
+            <a:r>
+              <a:rPr sz="1700" b="0" i="0">
+                <a:solidFill>
+                  <a:srgbClr val="202122"/>
+                </a:solidFill>
+                <a:latin typeface="Calibri"/>
+              </a:rPr>
+              <a:t>Brief: design a wall bracket to hold a 15 kg shelf in a damp garage.</a:t>
+            </a:r>
+          </a:p>
+        </p:txBody>
+      </p:sp>
+      <p:sp>
+        <p:nvSpPr>
+          <p:cNvPr id="11" name="Oval 10"/>
+          <p:cNvSpPr/>
+          <p:nvPr/>
+        </p:nvSpPr>
+        <p:spPr>
+          <a:xfrm>
+            <a:off x="548640" y="3461004"/>
+            <a:ext cx="384048" cy="384048"/>
+          </a:xfrm>
+          <a:prstGeom prst="ellipse">
+            <a:avLst/>
+          </a:prstGeom>
+          <a:solidFill>
+            <a:srgbClr val="0645AD"/>
+          </a:solidFill>
+          <a:ln>
+            <a:noFill/>
+          </a:ln>
+          <a:effectLst/>
+        </p:spPr>
+        <p:style>
+          <a:lnRef idx="1">
+            <a:schemeClr val="accent1"/>
+          </a:lnRef>
+          <a:fillRef idx="3">
+            <a:schemeClr val="accent1"/>
+          </a:fillRef>
+          <a:effectRef idx="2">
+            <a:schemeClr val="accent1"/>
+          </a:effectRef>
+          <a:fontRef idx="minor">
+            <a:schemeClr val="lt1"/>
+          </a:fontRef>
+        </p:style>
+        <p:txBody>
+          <a:bodyPr rtlCol="0" anchor="ctr" lIns="0" rIns="0" tIns="0" bIns="0"/>
+          <a:lstStyle/>
+          <a:p>
+            <a:pPr algn="ctr"/>
+            <a:r>
+              <a:rPr sz="1300" b="1">
+                <a:solidFill>
+                  <a:srgbClr val="FFFFFF"/>
+                </a:solidFill>
+                <a:latin typeface="Calibri"/>
+              </a:rPr>
+              <a:t>2</a:t>
+            </a:r>
+          </a:p>
+        </p:txBody>
+      </p:sp>
+      <p:sp>
+        <p:nvSpPr>
+          <p:cNvPr id="12" name="TextBox 11"/>
+          <p:cNvSpPr txBox="1"/>
+          <p:nvPr/>
+        </p:nvSpPr>
+        <p:spPr>
+          <a:xfrm>
+            <a:off x="1143000" y="3218688"/>
+            <a:ext cx="5943600" cy="868680"/>
+          </a:xfrm>
+          <a:prstGeom prst="rect">
+            <a:avLst/>
+          </a:prstGeom>
+          <a:noFill/>
+        </p:spPr>
+        <p:txBody>
+          <a:bodyPr wrap="square" anchor="ctr" lIns="0" rIns="0" tIns="0" bIns="0"/>
+          <a:lstStyle/>
+          <a:p>
+            <a:pPr algn="l"/>
+            <a:r>
+              <a:rPr sz="1700" b="0" i="0">
+                <a:solidFill>
+                  <a:srgbClr val="202122"/>
+                </a:solidFill>
+                <a:latin typeface="Calibri"/>
+              </a:rPr>
+              <a:t>Research: list the core topics that apply.</a:t>
+            </a:r>
+          </a:p>
+        </p:txBody>
+      </p:sp>
+      <p:sp>
+        <p:nvSpPr>
+          <p:cNvPr id="13" name="Oval 12"/>
+          <p:cNvSpPr/>
+          <p:nvPr/>
+        </p:nvSpPr>
+        <p:spPr>
+          <a:xfrm>
+            <a:off x="548640" y="4439412"/>
+            <a:ext cx="384048" cy="384048"/>
+          </a:xfrm>
+          <a:prstGeom prst="ellipse">
+            <a:avLst/>
+          </a:prstGeom>
+          <a:solidFill>
+            <a:srgbClr val="0645AD"/>
+          </a:solidFill>
+          <a:ln>
+            <a:noFill/>
+          </a:ln>
+          <a:effectLst/>
+        </p:spPr>
+        <p:style>
+          <a:lnRef idx="1">
+            <a:schemeClr val="accent1"/>
+          </a:lnRef>
+          <a:fillRef idx="3">
+            <a:schemeClr val="accent1"/>
+          </a:fillRef>
+          <a:effectRef idx="2">
+            <a:schemeClr val="accent1"/>
+          </a:effectRef>
+          <a:fontRef idx="minor">
+            <a:schemeClr val="lt1"/>
+          </a:fontRef>
+        </p:style>
+        <p:txBody>
+          <a:bodyPr rtlCol="0" anchor="ctr" lIns="0" rIns="0" tIns="0" bIns="0"/>
+          <a:lstStyle/>
+          <a:p>
+            <a:pPr algn="ctr"/>
+            <a:r>
+              <a:rPr sz="1300" b="1">
+                <a:solidFill>
+                  <a:srgbClr val="FFFFFF"/>
+                </a:solidFill>
+                <a:latin typeface="Calibri"/>
+              </a:rPr>
+              <a:t>3</a:t>
+            </a:r>
+          </a:p>
+        </p:txBody>
+      </p:sp>
+      <p:sp>
+        <p:nvSpPr>
+          <p:cNvPr id="14" name="TextBox 13"/>
+          <p:cNvSpPr txBox="1"/>
+          <p:nvPr/>
+        </p:nvSpPr>
+        <p:spPr>
+          <a:xfrm>
+            <a:off x="1143000" y="4197096"/>
+            <a:ext cx="5943600" cy="868680"/>
+          </a:xfrm>
+          <a:prstGeom prst="rect">
+            <a:avLst/>
+          </a:prstGeom>
+          <a:noFill/>
+        </p:spPr>
+        <p:txBody>
+          <a:bodyPr wrap="square" anchor="ctr" lIns="0" rIns="0" tIns="0" bIns="0"/>
+          <a:lstStyle/>
+          <a:p>
+            <a:pPr algn="l"/>
+            <a:r>
+              <a:rPr sz="1700" b="0" i="0">
+                <a:solidFill>
+                  <a:srgbClr val="202122"/>
+                </a:solidFill>
+                <a:latin typeface="Calibri"/>
+              </a:rPr>
+              <a:t>Design: sketch a solution and choose a material.</a:t>
+            </a:r>
+          </a:p>
+        </p:txBody>
+      </p:sp>
+      <p:sp>
+        <p:nvSpPr>
+          <p:cNvPr id="15" name="Oval 14"/>
+          <p:cNvSpPr/>
+          <p:nvPr/>
+        </p:nvSpPr>
+        <p:spPr>
+          <a:xfrm>
+            <a:off x="548640" y="5417820"/>
+            <a:ext cx="384048" cy="384048"/>
+          </a:xfrm>
+          <a:prstGeom prst="ellipse">
+            <a:avLst/>
+          </a:prstGeom>
+          <a:solidFill>
+            <a:srgbClr val="0645AD"/>
+          </a:solidFill>
+          <a:ln>
+            <a:noFill/>
+          </a:ln>
+          <a:effectLst/>
+        </p:spPr>
+        <p:style>
+          <a:lnRef idx="1">
+            <a:schemeClr val="accent1"/>
+          </a:lnRef>
+          <a:fillRef idx="3">
+            <a:schemeClr val="accent1"/>
+          </a:fillRef>
+          <a:effectRef idx="2">
+            <a:schemeClr val="accent1"/>
+          </a:effectRef>
+          <a:fontRef idx="minor">
+            <a:schemeClr val="lt1"/>
+          </a:fontRef>
+        </p:style>
+        <p:txBody>
+          <a:bodyPr rtlCol="0" anchor="ctr" lIns="0" rIns="0" tIns="0" bIns="0"/>
+          <a:lstStyle/>
+          <a:p>
+            <a:pPr algn="ctr"/>
+            <a:r>
+              <a:rPr sz="1300" b="1">
+                <a:solidFill>
+                  <a:srgbClr val="FFFFFF"/>
+                </a:solidFill>
+                <a:latin typeface="Calibri"/>
+              </a:rPr>
+              <a:t>4</a:t>
+            </a:r>
+          </a:p>
+        </p:txBody>
+      </p:sp>
+      <p:sp>
+        <p:nvSpPr>
+          <p:cNvPr id="16" name="TextBox 15"/>
+          <p:cNvSpPr txBox="1"/>
+          <p:nvPr/>
+        </p:nvSpPr>
+        <p:spPr>
+          <a:xfrm>
+            <a:off x="1143000" y="5175504"/>
+            <a:ext cx="5943600" cy="868680"/>
+          </a:xfrm>
+          <a:prstGeom prst="rect">
+            <a:avLst/>
+          </a:prstGeom>
+          <a:noFill/>
+        </p:spPr>
+        <p:txBody>
+          <a:bodyPr wrap="square" anchor="ctr" lIns="0" rIns="0" tIns="0" bIns="0"/>
+          <a:lstStyle/>
+          <a:p>
+            <a:pPr algn="l"/>
+            <a:r>
+              <a:rPr sz="1700" b="0" i="0">
+                <a:solidFill>
+                  <a:srgbClr val="202122"/>
+                </a:solidFill>
+                <a:latin typeface="Calibri"/>
+              </a:rPr>
+              <a:t>Plan and present: outline manufacture and give a two-minute pitch.</a:t>
+            </a:r>
+          </a:p>
+        </p:txBody>
+      </p:sp>
+      <p:sp>
+        <p:nvSpPr>
+          <p:cNvPr id="17" name="Rounded Rectangle 16"/>
+          <p:cNvSpPr/>
+          <p:nvPr/>
+        </p:nvSpPr>
+        <p:spPr>
+          <a:xfrm>
+            <a:off x="7772400" y="1508760"/>
+            <a:ext cx="3867912" cy="4572000"/>
+          </a:xfrm>
+          <a:prstGeom prst="roundRect">
+            <a:avLst>
+              <a:gd name="adj" fmla="val 8000"/>
+            </a:avLst>
+          </a:prstGeom>
+          <a:solidFill>
+            <a:srgbClr val="EAF3FF"/>
+          </a:solidFill>
+          <a:ln>
+            <a:noFill/>
+          </a:ln>
+          <a:effectLst/>
+        </p:spPr>
+        <p:style>
+          <a:lnRef idx="1">
+            <a:schemeClr val="accent1"/>
+          </a:lnRef>
+          <a:fillRef idx="3">
+            <a:schemeClr val="accent1"/>
+          </a:fillRef>
+          <a:effectRef idx="2">
+            <a:schemeClr val="accent1"/>
+          </a:effectRef>
+          <a:fontRef idx="minor">
+            <a:schemeClr val="lt1"/>
+          </a:fontRef>
+        </p:style>
+        <p:txBody>
+          <a:bodyPr rtlCol="0" anchor="ctr"/>
+          <a:lstStyle/>
+          <a:p/>
+        </p:txBody>
+      </p:sp>
+      <p:sp>
+        <p:nvSpPr>
+          <p:cNvPr id="18" name="TextBox 17"/>
+          <p:cNvSpPr txBox="1"/>
+          <p:nvPr/>
+        </p:nvSpPr>
+        <p:spPr>
+          <a:xfrm>
+            <a:off x="8046720" y="1737360"/>
+            <a:ext cx="3291840" cy="365760"/>
+          </a:xfrm>
+          <a:prstGeom prst="rect">
+            <a:avLst/>
+          </a:prstGeom>
+          <a:noFill/>
+        </p:spPr>
+        <p:txBody>
+          <a:bodyPr wrap="square" anchor="t" lIns="0" rIns="0" tIns="0" bIns="0"/>
+          <a:lstStyle/>
+          <a:p>
+            <a:pPr algn="l"/>
+            <a:r>
+              <a:rPr sz="1300" b="1" i="0">
+                <a:solidFill>
+                  <a:srgbClr val="0645AD"/>
+                </a:solidFill>
+                <a:latin typeface="Calibri"/>
+              </a:rPr>
+              <a:t>SUCCESS CRITERIA</a:t>
+            </a:r>
+          </a:p>
+        </p:txBody>
+      </p:sp>
+      <p:sp>
+        <p:nvSpPr>
+          <p:cNvPr id="19" name="TextBox 18"/>
+          <p:cNvSpPr txBox="1"/>
+          <p:nvPr/>
+        </p:nvSpPr>
+        <p:spPr>
+          <a:xfrm>
+            <a:off x="8046720" y="2240280"/>
+            <a:ext cx="3337560" cy="3657600"/>
+          </a:xfrm>
+          <a:prstGeom prst="rect">
+            <a:avLst/>
+          </a:prstGeom>
+          <a:noFill/>
+        </p:spPr>
+        <p:txBody>
+          <a:bodyPr wrap="square" lIns="0" rIns="0" tIns="0" bIns="0">
+            <a:spAutoFit/>
+          </a:bodyPr>
+          <a:lstStyle/>
+          <a:p>
+            <a:pPr marL="274320" indent="-274320">
+              <a:spcAft>
+                <a:spcPts val="810"/>
+              </a:spcAft>
+              <a:buClr>
+                <a:srgbClr val="0645AD"/>
+              </a:buClr>
+              <a:buFont typeface="Arial"/>
+              <a:buChar char="•"/>
+            </a:pPr>
+            <a:r>
+              <a:rPr sz="1800" b="0">
+                <a:solidFill>
+                  <a:srgbClr val="202122"/>
+                </a:solidFill>
+                <a:latin typeface="Calibri"/>
+              </a:rPr>
+              <a:t>Links to at least four core topics</a:t>
+            </a:r>
+          </a:p>
+          <a:p>
+            <a:pPr marL="274320" indent="-274320">
+              <a:spcAft>
+                <a:spcPts val="810"/>
+              </a:spcAft>
+              <a:buClr>
+                <a:srgbClr val="0645AD"/>
+              </a:buClr>
+              <a:buFont typeface="Arial"/>
+              <a:buChar char="•"/>
+            </a:pPr>
+            <a:r>
+              <a:rPr sz="1800" b="0">
+                <a:solidFill>
+                  <a:srgbClr val="202122"/>
+                </a:solidFill>
+                <a:latin typeface="Calibri"/>
+              </a:rPr>
+              <a:t>Material justified for damp conditions</a:t>
+            </a:r>
+          </a:p>
+          <a:p>
+            <a:pPr marL="274320" indent="-274320">
+              <a:spcAft>
+                <a:spcPts val="810"/>
+              </a:spcAft>
+              <a:buClr>
+                <a:srgbClr val="0645AD"/>
+              </a:buClr>
+              <a:buFont typeface="Arial"/>
+              <a:buChar char="•"/>
+            </a:pPr>
+            <a:r>
+              <a:rPr sz="1800" b="0">
+                <a:solidFill>
+                  <a:srgbClr val="202122"/>
+                </a:solidFill>
+                <a:latin typeface="Calibri"/>
+              </a:rPr>
+              <a:t>Calculations and units used</a:t>
+            </a:r>
+          </a:p>
+        </p:txBody>
+      </p:sp>
+    </p:spTree>
+  </p:cSld>
+  <p:clrMapOvr>
+    <a:masterClrMapping/>
+  </p:clrMapOvr>
+</p:sld>
+</file>
+
+<file path=ppt/slides/slide13.xml><?xml version="1.0" encoding="utf-8"?>
+<p:sld xmlns:a="http://schemas.openxmlformats.org/drawingml/2006/main" xmlns:p="http://schemas.openxmlformats.org/presentationml/2006/main" xmlns:r="http://schemas.openxmlformats.org/officeDocument/2006/relationships">
+  <p:cSld>
+    <p:bg>
+      <p:bgPr>
+        <a:solidFill>
+          <a:srgbClr val="03306E"/>
+        </a:solidFill>
+        <a:effectLst/>
+      </p:bgPr>
+    </p:bg>
+    <p:spTree>
+      <p:nvGrpSpPr>
+        <p:cNvPr id="1" name=""/>
+        <p:cNvGrpSpPr/>
+        <p:nvPr/>
+      </p:nvGrpSpPr>
+      <p:grpSpPr/>
+      <p:sp>
+        <p:nvSpPr>
+          <p:cNvPr id="2" name="TextBox 1"/>
+          <p:cNvSpPr txBox="1"/>
+          <p:nvPr/>
+        </p:nvSpPr>
+        <p:spPr>
+          <a:xfrm>
+            <a:off x="548640" y="320040"/>
+            <a:ext cx="11094415" cy="274320"/>
+          </a:xfrm>
+          <a:prstGeom prst="rect">
+            <a:avLst/>
+          </a:prstGeom>
+          <a:noFill/>
+        </p:spPr>
+        <p:txBody>
+          <a:bodyPr wrap="square" anchor="t" lIns="0" rIns="0" tIns="0" bIns="0"/>
+          <a:lstStyle/>
+          <a:p>
+            <a:pPr algn="l"/>
+            <a:r>
+              <a:rPr sz="1100" b="1" i="0">
+                <a:solidFill>
+                  <a:srgbClr val="A9C8F0"/>
+                </a:solidFill>
+                <a:latin typeface="Calibri"/>
+              </a:rPr>
+              <a:t>ENGINEERING CORE  ·  Core Component</a:t>
+            </a:r>
+          </a:p>
+        </p:txBody>
+      </p:sp>
+      <p:sp>
+        <p:nvSpPr>
+          <p:cNvPr id="3" name="TextBox 2"/>
+          <p:cNvSpPr txBox="1"/>
+          <p:nvPr/>
+        </p:nvSpPr>
+        <p:spPr>
+          <a:xfrm>
+            <a:off x="548640" y="566928"/>
+            <a:ext cx="11094415" cy="822960"/>
+          </a:xfrm>
+          <a:prstGeom prst="rect">
+            <a:avLst/>
+          </a:prstGeom>
+          <a:noFill/>
+        </p:spPr>
+        <p:txBody>
+          <a:bodyPr wrap="square" anchor="ctr" lIns="0" rIns="0" tIns="0" bIns="0"/>
+          <a:lstStyle/>
+          <a:p>
+            <a:pPr algn="l"/>
+            <a:r>
+              <a:rPr sz="3200" b="1" i="0">
+                <a:solidFill>
+                  <a:srgbClr val="FFFFFF"/>
+                </a:solidFill>
+                <a:latin typeface="Cambria"/>
+              </a:rPr>
+              <a:t>Exit ticket</a:t>
+            </a:r>
+          </a:p>
+        </p:txBody>
+      </p:sp>
+      <p:sp>
+        <p:nvSpPr>
+          <p:cNvPr id="4" name="Oval 3"/>
+          <p:cNvSpPr/>
+          <p:nvPr/>
+        </p:nvSpPr>
+        <p:spPr>
+          <a:xfrm>
+            <a:off x="548640" y="1737360"/>
+            <a:ext cx="502920" cy="502920"/>
+          </a:xfrm>
+          <a:prstGeom prst="ellipse">
+            <a:avLst/>
+          </a:prstGeom>
+          <a:solidFill>
+            <a:srgbClr val="F2B705"/>
+          </a:solidFill>
+          <a:ln>
+            <a:noFill/>
+          </a:ln>
+          <a:effectLst/>
+        </p:spPr>
+        <p:style>
+          <a:lnRef idx="1">
+            <a:schemeClr val="accent1"/>
+          </a:lnRef>
+          <a:fillRef idx="3">
+            <a:schemeClr val="accent1"/>
+          </a:fillRef>
+          <a:effectRef idx="2">
+            <a:schemeClr val="accent1"/>
+          </a:effectRef>
+          <a:fontRef idx="minor">
+            <a:schemeClr val="lt1"/>
+          </a:fontRef>
+        </p:style>
+        <p:txBody>
+          <a:bodyPr rtlCol="0" anchor="ctr" lIns="0" rIns="0" tIns="0" bIns="0"/>
+          <a:lstStyle/>
+          <a:p>
+            <a:pPr algn="ctr"/>
+            <a:r>
+              <a:rPr sz="1700" b="1">
+                <a:solidFill>
+                  <a:srgbClr val="202122"/>
+                </a:solidFill>
+                <a:latin typeface="Calibri"/>
+              </a:rPr>
+              <a:t>1</a:t>
+            </a:r>
+          </a:p>
+        </p:txBody>
+      </p:sp>
+      <p:sp>
+        <p:nvSpPr>
+          <p:cNvPr id="5" name="TextBox 4"/>
+          <p:cNvSpPr txBox="1"/>
+          <p:nvPr/>
+        </p:nvSpPr>
+        <p:spPr>
+          <a:xfrm>
+            <a:off x="1325880" y="1645920"/>
+            <a:ext cx="6583680" cy="822960"/>
+          </a:xfrm>
+          <a:prstGeom prst="rect">
+            <a:avLst/>
+          </a:prstGeom>
+          <a:noFill/>
+        </p:spPr>
+        <p:txBody>
+          <a:bodyPr wrap="square" anchor="ctr" lIns="0" rIns="0" tIns="0" bIns="0"/>
+          <a:lstStyle/>
+          <a:p>
+            <a:pPr algn="l"/>
+            <a:r>
+              <a:rPr sz="2000" b="0" i="0">
+                <a:solidFill>
+                  <a:srgbClr val="FFFFFF"/>
+                </a:solidFill>
+                <a:latin typeface="Calibri"/>
+              </a:rPr>
+              <a:t>Which AO do you think you would score lowest on, and why?</a:t>
+            </a:r>
+          </a:p>
+        </p:txBody>
+      </p:sp>
+      <p:sp>
+        <p:nvSpPr>
+          <p:cNvPr id="6" name="Oval 5"/>
+          <p:cNvSpPr/>
+          <p:nvPr/>
+        </p:nvSpPr>
+        <p:spPr>
+          <a:xfrm>
+            <a:off x="548640" y="2697480"/>
+            <a:ext cx="502920" cy="502920"/>
+          </a:xfrm>
+          <a:prstGeom prst="ellipse">
+            <a:avLst/>
+          </a:prstGeom>
+          <a:solidFill>
+            <a:srgbClr val="F2B705"/>
+          </a:solidFill>
+          <a:ln>
+            <a:noFill/>
+          </a:ln>
+          <a:effectLst/>
+        </p:spPr>
+        <p:style>
+          <a:lnRef idx="1">
+            <a:schemeClr val="accent1"/>
+          </a:lnRef>
+          <a:fillRef idx="3">
+            <a:schemeClr val="accent1"/>
+          </a:fillRef>
+          <a:effectRef idx="2">
+            <a:schemeClr val="accent1"/>
+          </a:effectRef>
+          <a:fontRef idx="minor">
+            <a:schemeClr val="lt1"/>
+          </a:fontRef>
+        </p:style>
+        <p:txBody>
+          <a:bodyPr rtlCol="0" anchor="ctr" lIns="0" rIns="0" tIns="0" bIns="0"/>
+          <a:lstStyle/>
+          <a:p>
+            <a:pPr algn="ctr"/>
+            <a:r>
+              <a:rPr sz="1700" b="1">
+                <a:solidFill>
+                  <a:srgbClr val="202122"/>
+                </a:solidFill>
+                <a:latin typeface="Calibri"/>
+              </a:rPr>
+              <a:t>2</a:t>
+            </a:r>
+          </a:p>
+        </p:txBody>
+      </p:sp>
+      <p:sp>
+        <p:nvSpPr>
+          <p:cNvPr id="7" name="TextBox 6"/>
+          <p:cNvSpPr txBox="1"/>
+          <p:nvPr/>
+        </p:nvSpPr>
+        <p:spPr>
+          <a:xfrm>
+            <a:off x="1325880" y="2606040"/>
+            <a:ext cx="6583680" cy="822960"/>
+          </a:xfrm>
+          <a:prstGeom prst="rect">
+            <a:avLst/>
+          </a:prstGeom>
+          <a:noFill/>
+        </p:spPr>
+        <p:txBody>
+          <a:bodyPr wrap="square" anchor="ctr" lIns="0" rIns="0" tIns="0" bIns="0"/>
+          <a:lstStyle/>
+          <a:p>
+            <a:pPr algn="l"/>
+            <a:r>
+              <a:rPr sz="2000" b="0" i="0">
+                <a:solidFill>
+                  <a:srgbClr val="FFFFFF"/>
+                </a:solidFill>
+                <a:latin typeface="Calibri"/>
+              </a:rPr>
+              <a:t>How can you show iteration in your approach?</a:t>
+            </a:r>
+          </a:p>
+        </p:txBody>
+      </p:sp>
+      <p:sp>
+        <p:nvSpPr>
+          <p:cNvPr id="8" name="Oval 7"/>
+          <p:cNvSpPr/>
+          <p:nvPr/>
+        </p:nvSpPr>
+        <p:spPr>
+          <a:xfrm>
+            <a:off x="548640" y="3657600"/>
+            <a:ext cx="502920" cy="502920"/>
+          </a:xfrm>
+          <a:prstGeom prst="ellipse">
+            <a:avLst/>
+          </a:prstGeom>
+          <a:solidFill>
+            <a:srgbClr val="F2B705"/>
+          </a:solidFill>
+          <a:ln>
+            <a:noFill/>
+          </a:ln>
+          <a:effectLst/>
+        </p:spPr>
+        <p:style>
+          <a:lnRef idx="1">
+            <a:schemeClr val="accent1"/>
+          </a:lnRef>
+          <a:fillRef idx="3">
+            <a:schemeClr val="accent1"/>
+          </a:fillRef>
+          <a:effectRef idx="2">
+            <a:schemeClr val="accent1"/>
+          </a:effectRef>
+          <a:fontRef idx="minor">
+            <a:schemeClr val="lt1"/>
+          </a:fontRef>
+        </p:style>
+        <p:txBody>
+          <a:bodyPr rtlCol="0" anchor="ctr" lIns="0" rIns="0" tIns="0" bIns="0"/>
+          <a:lstStyle/>
+          <a:p>
+            <a:pPr algn="ctr"/>
+            <a:r>
+              <a:rPr sz="1700" b="1">
+                <a:solidFill>
+                  <a:srgbClr val="202122"/>
+                </a:solidFill>
+                <a:latin typeface="Calibri"/>
+              </a:rPr>
+              <a:t>3</a:t>
+            </a:r>
+          </a:p>
+        </p:txBody>
+      </p:sp>
+      <p:sp>
+        <p:nvSpPr>
+          <p:cNvPr id="9" name="TextBox 8"/>
+          <p:cNvSpPr txBox="1"/>
+          <p:nvPr/>
+        </p:nvSpPr>
+        <p:spPr>
+          <a:xfrm>
+            <a:off x="1325880" y="3566160"/>
+            <a:ext cx="6583680" cy="822960"/>
+          </a:xfrm>
+          <a:prstGeom prst="rect">
+            <a:avLst/>
+          </a:prstGeom>
+          <a:noFill/>
+        </p:spPr>
+        <p:txBody>
+          <a:bodyPr wrap="square" anchor="ctr" lIns="0" rIns="0" tIns="0" bIns="0"/>
+          <a:lstStyle/>
+          <a:p>
+            <a:pPr algn="l"/>
+            <a:r>
+              <a:rPr sz="2000" b="0" i="0">
+                <a:solidFill>
+                  <a:srgbClr val="FFFFFF"/>
+                </a:solidFill>
+                <a:latin typeface="Calibri"/>
+              </a:rPr>
+              <a:t>Why consider rejected options in your review?</a:t>
+            </a:r>
+          </a:p>
+        </p:txBody>
+      </p:sp>
+      <p:sp>
+        <p:nvSpPr>
+          <p:cNvPr id="10" name="Rounded Rectangle 9"/>
+          <p:cNvSpPr/>
+          <p:nvPr/>
+        </p:nvSpPr>
+        <p:spPr>
+          <a:xfrm>
+            <a:off x="8229600" y="1645920"/>
+            <a:ext cx="3410712" cy="2926080"/>
+          </a:xfrm>
+          <a:prstGeom prst="roundRect">
+            <a:avLst>
+              <a:gd name="adj" fmla="val 8000"/>
+            </a:avLst>
+          </a:prstGeom>
+          <a:solidFill>
+            <a:srgbClr val="0645AD"/>
+          </a:solidFill>
+          <a:ln>
+            <a:noFill/>
+          </a:ln>
+          <a:effectLst/>
+        </p:spPr>
+        <p:style>
+          <a:lnRef idx="1">
+            <a:schemeClr val="accent1"/>
+          </a:lnRef>
+          <a:fillRef idx="3">
+            <a:schemeClr val="accent1"/>
+          </a:fillRef>
+          <a:effectRef idx="2">
+            <a:schemeClr val="accent1"/>
+          </a:effectRef>
+          <a:fontRef idx="minor">
+            <a:schemeClr val="lt1"/>
+          </a:fontRef>
+        </p:style>
+        <p:txBody>
+          <a:bodyPr rtlCol="0" anchor="ctr"/>
+          <a:lstStyle/>
+          <a:p/>
+        </p:txBody>
+      </p:sp>
+      <p:sp>
+        <p:nvSpPr>
+          <p:cNvPr id="11" name="TextBox 10"/>
+          <p:cNvSpPr txBox="1"/>
+          <p:nvPr/>
+        </p:nvSpPr>
+        <p:spPr>
+          <a:xfrm>
+            <a:off x="8503920" y="1874519"/>
+            <a:ext cx="2926080" cy="365760"/>
+          </a:xfrm>
+          <a:prstGeom prst="rect">
+            <a:avLst/>
+          </a:prstGeom>
+          <a:noFill/>
+        </p:spPr>
+        <p:txBody>
+          <a:bodyPr wrap="square" anchor="t" lIns="0" rIns="0" tIns="0" bIns="0"/>
+          <a:lstStyle/>
+          <a:p>
+            <a:pPr algn="l"/>
+            <a:r>
+              <a:rPr sz="1300" b="1" i="0">
+                <a:solidFill>
+                  <a:srgbClr val="A9C8F0"/>
+                </a:solidFill>
+                <a:latin typeface="Calibri"/>
+              </a:rPr>
+              <a:t>REVISE THIS TOPIC</a:t>
+            </a:r>
+          </a:p>
+        </p:txBody>
+      </p:sp>
+      <p:sp>
+        <p:nvSpPr>
+          <p:cNvPr id="12" name="TextBox 11"/>
+          <p:cNvSpPr txBox="1"/>
+          <p:nvPr/>
+        </p:nvSpPr>
+        <p:spPr>
+          <a:xfrm>
+            <a:off x="8503920" y="2286000"/>
+            <a:ext cx="2926080" cy="548640"/>
+          </a:xfrm>
+          <a:prstGeom prst="rect">
+            <a:avLst/>
+          </a:prstGeom>
+          <a:noFill/>
+        </p:spPr>
+        <p:txBody>
+          <a:bodyPr wrap="square" anchor="t" lIns="0" rIns="0" tIns="0" bIns="0"/>
+          <a:lstStyle/>
+          <a:p>
+            <a:pPr algn="l"/>
+            <a:r>
+              <a:rPr sz="1400" b="0" i="0">
+                <a:solidFill>
+                  <a:srgbClr val="FFFFFF"/>
+                </a:solidFill>
+                <a:latin typeface="Calibri"/>
+              </a:rPr>
+              <a:t>Revision notes for this lesson are on the study wiki:</a:t>
+            </a:r>
+          </a:p>
+        </p:txBody>
+      </p:sp>
+      <p:sp>
+        <p:nvSpPr>
+          <p:cNvPr id="13" name="TextBox 12"/>
+          <p:cNvSpPr txBox="1"/>
+          <p:nvPr/>
+        </p:nvSpPr>
+        <p:spPr>
+          <a:xfrm>
+            <a:off x="8503920" y="2926080"/>
+            <a:ext cx="2926080" cy="1463040"/>
+          </a:xfrm>
+          <a:prstGeom prst="rect">
+            <a:avLst/>
+          </a:prstGeom>
+          <a:noFill/>
+        </p:spPr>
+        <p:txBody>
+          <a:bodyPr wrap="square" anchor="t" lIns="0" rIns="0" tIns="0" bIns="0"/>
+          <a:lstStyle/>
+          <a:p>
+            <a:pPr algn="l"/>
+            <a:r>
+              <a:rPr sz="2000" b="1" i="0">
+                <a:solidFill>
+                  <a:srgbClr val="FFFFFF"/>
+                </a:solidFill>
+                <a:latin typeface="Cambria"/>
+              </a:rPr>
+              <a:t>Employer-set Project</a:t>
+            </a:r>
+          </a:p>
+        </p:txBody>
+      </p:sp>
+      <p:sp>
+        <p:nvSpPr>
+          <p:cNvPr id="14" name="TextBox 13"/>
+          <p:cNvSpPr txBox="1"/>
+          <p:nvPr/>
+        </p:nvSpPr>
+        <p:spPr>
+          <a:xfrm>
+            <a:off x="548640" y="5669280"/>
+            <a:ext cx="11094415" cy="548640"/>
+          </a:xfrm>
+          <a:prstGeom prst="rect">
+            <a:avLst/>
+          </a:prstGeom>
+          <a:noFill/>
+        </p:spPr>
+        <p:txBody>
+          <a:bodyPr wrap="square" anchor="t" lIns="0" rIns="0" tIns="0" bIns="0"/>
+          <a:lstStyle/>
+          <a:p>
+            <a:pPr algn="l"/>
+            <a:r>
+              <a:rPr sz="1200" b="0" i="0">
+                <a:solidFill>
+                  <a:srgbClr val="A9C8F0"/>
+                </a:solidFill>
+                <a:latin typeface="Calibri"/>
+              </a:rPr>
+              <a:t>https://lana6478.github.io/T-level-Design-Development-Engineering-Manufacturing/#/01-core-component/03-employer-set-project.md</a:t>
+            </a:r>
+          </a:p>
+        </p:txBody>
+      </p:sp>
+    </p:spTree>
+  </p:cSld>
+  <p:clrMapOvr>
+    <a:masterClrMapping/>
+  </p:clrMapOvr>
+</p:sld>
+</file>
+
 <file path=ppt/slides/slide2.xml><?xml version="1.0" encoding="utf-8"?>
 <p:sld xmlns:a="http://schemas.openxmlformats.org/drawingml/2006/main" xmlns:p="http://schemas.openxmlformats.org/presentationml/2006/main" xmlns:r="http://schemas.openxmlformats.org/officeDocument/2006/relationships">
   <p:cSld>
@@ -4692,8 +7215,8 @@
         </p:nvSpPr>
         <p:spPr>
           <a:xfrm>
-            <a:off x="548640" y="1600200"/>
-            <a:ext cx="6675120" cy="4572000"/>
+            <a:off x="548640" y="1554480"/>
+            <a:ext cx="6720840" cy="4617720"/>
           </a:xfrm>
           <a:prstGeom prst="rect">
             <a:avLst/>
@@ -4706,15 +7229,10 @@
           </a:bodyPr>
           <a:lstStyle/>
           <a:p>
-            <a:pPr marL="274320" indent="-274320">
+            <a:pPr>
               <a:spcAft>
-                <a:spcPts val="990"/>
+                <a:spcPts val="1320"/>
               </a:spcAft>
-              <a:buClr>
-                <a:srgbClr val="0645AD"/>
-              </a:buClr>
-              <a:buFont typeface="Arial"/>
-              <a:buChar char="•"/>
             </a:pPr>
             <a:r>
               <a:rPr sz="2200" b="0">
@@ -4723,19 +7241,14 @@
                 </a:solidFill>
                 <a:latin typeface="Calibri"/>
               </a:rPr>
-              <a:t>30% of the core, with 18.5 hours of assessment time.</a:t>
-            </a:r>
-          </a:p>
-          <a:p>
-            <a:pPr marL="274320" indent="-274320">
+              <a:t>The Employer-set Project is worth 30% of the core and has 18.5 hours of assessment time. City &amp; Guilds sets and marks it.</a:t>
+            </a:r>
+          </a:p>
+          <a:p>
+            <a:pPr>
               <a:spcAft>
-                <a:spcPts val="990"/>
+                <a:spcPts val="1320"/>
               </a:spcAft>
-              <a:buClr>
-                <a:srgbClr val="0645AD"/>
-              </a:buClr>
-              <a:buFont typeface="Arial"/>
-              <a:buChar char="•"/>
             </a:pPr>
             <a:r>
               <a:rPr sz="2200" b="0">
@@ -4744,19 +7257,14 @@
                 </a:solidFill>
                 <a:latin typeface="Calibri"/>
               </a:rPr>
-              <a:t>Externally set and marked by City &amp; Guilds.</a:t>
-            </a:r>
-          </a:p>
-          <a:p>
-            <a:pPr marL="274320" indent="-274320">
+              <a:t>It's a realistic, complex industry brief developed with employers, and it draws on knowledge from across the whole engineering core, plus maths, English and digital skills. It's linked to four core skills: planning and preparation, communication, develop and manufacture, and evaluation.</a:t>
+            </a:r>
+          </a:p>
+          <a:p>
+            <a:pPr>
               <a:spcAft>
-                <a:spcPts val="990"/>
+                <a:spcPts val="1320"/>
               </a:spcAft>
-              <a:buClr>
-                <a:srgbClr val="0645AD"/>
-              </a:buClr>
-              <a:buFont typeface="Arial"/>
-              <a:buChar char="•"/>
             </a:pPr>
             <a:r>
               <a:rPr sz="2200" b="0">
@@ -4765,58 +7273,7 @@
                 </a:solidFill>
                 <a:latin typeface="Calibri"/>
               </a:rPr>
-              <a:t>A realistic industry brief developed with employers.</a:t>
-            </a:r>
-          </a:p>
-          <a:p>
-            <a:pPr marL="274320" indent="-274320">
-              <a:spcAft>
-                <a:spcPts val="990"/>
-              </a:spcAft>
-              <a:buClr>
-                <a:srgbClr val="0645AD"/>
-              </a:buClr>
-              <a:buFont typeface="Arial"/>
-              <a:buChar char="•"/>
-            </a:pPr>
-            <a:r>
-              <a:rPr sz="2200" b="0">
-                <a:solidFill>
-                  <a:srgbClr val="202122"/>
-                </a:solidFill>
-                <a:latin typeface="Calibri"/>
-              </a:rPr>
-              <a:t>Draws on knowledge from across the whole engineering core.</a:t>
-            </a:r>
-          </a:p>
-          <a:p>
-            <a:pPr marL="274320" indent="-274320">
-              <a:spcAft>
-                <a:spcPts val="990"/>
-              </a:spcAft>
-              <a:buClr>
-                <a:srgbClr val="0645AD"/>
-              </a:buClr>
-              <a:buFont typeface="Arial"/>
-              <a:buChar char="•"/>
-            </a:pPr>
-            <a:r>
-              <a:rPr sz="2200" b="1">
-                <a:solidFill>
-                  <a:srgbClr val="202122"/>
-                </a:solidFill>
-                <a:latin typeface="Calibri"/>
-              </a:rPr>
-              <a:t>Linked to four core skills:</a:t>
-            </a:r>
-            <a:r>
-              <a:rPr sz="2200" b="0">
-                <a:solidFill>
-                  <a:srgbClr val="202122"/>
-                </a:solidFill>
-                <a:latin typeface="Calibri"/>
-              </a:rPr>
-              <a:t> planning and preparation, communication, develop and manufacture, evaluation.</a:t>
+              <a:t>Specialism knowledge isn't assessed here; it's covered separately in the practical assignment.</a:t>
             </a:r>
           </a:p>
         </p:txBody>
@@ -4829,8 +7286,8 @@
         </p:nvSpPr>
         <p:spPr>
           <a:xfrm>
-            <a:off x="7772400" y="1600200"/>
-            <a:ext cx="3867912" cy="4434840"/>
+            <a:off x="7772400" y="1554480"/>
+            <a:ext cx="3867912" cy="4526280"/>
           </a:xfrm>
           <a:prstGeom prst="roundRect">
             <a:avLst>
@@ -4873,7 +7330,7 @@
         </p:nvSpPr>
         <p:spPr>
           <a:xfrm>
-            <a:off x="8046720" y="1874519"/>
+            <a:off x="8046720" y="1828800"/>
             <a:ext cx="548640" cy="548640"/>
           </a:xfrm>
           <a:prstGeom prst="ellipse">
@@ -4907,13 +7364,13 @@
           <a:p>
             <a:pPr algn="ctr"/>
             <a:r>
-              <a:rPr sz="2000" b="1">
+              <a:rPr sz="1300" b="1">
                 <a:solidFill>
                   <a:srgbClr val="202122"/>
                 </a:solidFill>
                 <a:latin typeface="Calibri"/>
               </a:rPr>
-              <a:t>!</a:t>
+              <a:t>e.g.</a:t>
             </a:r>
           </a:p>
         </p:txBody>
@@ -4926,7 +7383,7 @@
         </p:nvSpPr>
         <p:spPr>
           <a:xfrm>
-            <a:off x="8046720" y="2606040"/>
+            <a:off x="8046720" y="2560320"/>
             <a:ext cx="3291840" cy="365760"/>
           </a:xfrm>
           <a:prstGeom prst="rect">
@@ -4946,7 +7403,7 @@
                 </a:solidFill>
                 <a:latin typeface="Calibri"/>
               </a:rPr>
-              <a:t>KEY IDEA</a:t>
+              <a:t>EXAMPLE</a:t>
             </a:r>
           </a:p>
         </p:txBody>
@@ -4959,8 +7416,8 @@
         </p:nvSpPr>
         <p:spPr>
           <a:xfrm>
-            <a:off x="8046720" y="3017520"/>
-            <a:ext cx="3291840" cy="2926080"/>
+            <a:off x="8046720" y="2971800"/>
+            <a:ext cx="3291840" cy="2971800"/>
           </a:xfrm>
           <a:prstGeom prst="rect">
             <a:avLst/>
@@ -4973,13 +7430,13 @@
           <a:p>
             <a:pPr algn="l"/>
             <a:r>
-              <a:rPr sz="2200" b="0" i="0">
+              <a:rPr sz="1900" b="0" i="0">
                 <a:solidFill>
                   <a:srgbClr val="FFFFFF"/>
                 </a:solidFill>
                 <a:latin typeface="Cambria"/>
               </a:rPr>
-              <a:t>Specialism knowledge is assessed separately. The ESP is about applying the core.</a:t>
+              <a:t>A brief might ask for a solution to a real manufacturing problem, such as redesigning a component to cut cost while meeting safety standards.</a:t>
             </a:r>
           </a:p>
         </p:txBody>
@@ -5071,7 +7528,7 @@
                 </a:solidFill>
                 <a:latin typeface="Cambria"/>
               </a:rPr>
-              <a:t>The tasks</a:t>
+              <a:t>What is the ESP?</a:t>
             </a:r>
           </a:p>
         </p:txBody>
@@ -5144,20 +7601,159 @@
       </p:sp>
       <p:sp>
         <p:nvSpPr>
-          <p:cNvPr id="6" name="Rectangle 5"/>
+          <p:cNvPr id="6" name="TextBox 5"/>
+          <p:cNvSpPr txBox="1"/>
+          <p:nvPr/>
+        </p:nvSpPr>
+        <p:spPr>
+          <a:xfrm>
+            <a:off x="548640" y="1600200"/>
+            <a:ext cx="6675120" cy="4572000"/>
+          </a:xfrm>
+          <a:prstGeom prst="rect">
+            <a:avLst/>
+          </a:prstGeom>
+          <a:noFill/>
+        </p:spPr>
+        <p:txBody>
+          <a:bodyPr wrap="square" lIns="0" rIns="0" tIns="0" bIns="0">
+            <a:spAutoFit/>
+          </a:bodyPr>
+          <a:lstStyle/>
+          <a:p>
+            <a:pPr marL="274320" indent="-274320">
+              <a:spcAft>
+                <a:spcPts val="990"/>
+              </a:spcAft>
+              <a:buClr>
+                <a:srgbClr val="0645AD"/>
+              </a:buClr>
+              <a:buFont typeface="Arial"/>
+              <a:buChar char="•"/>
+            </a:pPr>
+            <a:r>
+              <a:rPr sz="2200" b="0">
+                <a:solidFill>
+                  <a:srgbClr val="202122"/>
+                </a:solidFill>
+                <a:latin typeface="Calibri"/>
+              </a:rPr>
+              <a:t>30% of the core, with 18.5 hours of assessment time.</a:t>
+            </a:r>
+          </a:p>
+          <a:p>
+            <a:pPr marL="274320" indent="-274320">
+              <a:spcAft>
+                <a:spcPts val="990"/>
+              </a:spcAft>
+              <a:buClr>
+                <a:srgbClr val="0645AD"/>
+              </a:buClr>
+              <a:buFont typeface="Arial"/>
+              <a:buChar char="•"/>
+            </a:pPr>
+            <a:r>
+              <a:rPr sz="2200" b="0">
+                <a:solidFill>
+                  <a:srgbClr val="202122"/>
+                </a:solidFill>
+                <a:latin typeface="Calibri"/>
+              </a:rPr>
+              <a:t>Externally set and marked by City &amp; Guilds.</a:t>
+            </a:r>
+          </a:p>
+          <a:p>
+            <a:pPr marL="274320" indent="-274320">
+              <a:spcAft>
+                <a:spcPts val="990"/>
+              </a:spcAft>
+              <a:buClr>
+                <a:srgbClr val="0645AD"/>
+              </a:buClr>
+              <a:buFont typeface="Arial"/>
+              <a:buChar char="•"/>
+            </a:pPr>
+            <a:r>
+              <a:rPr sz="2200" b="0">
+                <a:solidFill>
+                  <a:srgbClr val="202122"/>
+                </a:solidFill>
+                <a:latin typeface="Calibri"/>
+              </a:rPr>
+              <a:t>A realistic industry brief developed with employers.</a:t>
+            </a:r>
+          </a:p>
+          <a:p>
+            <a:pPr marL="274320" indent="-274320">
+              <a:spcAft>
+                <a:spcPts val="990"/>
+              </a:spcAft>
+              <a:buClr>
+                <a:srgbClr val="0645AD"/>
+              </a:buClr>
+              <a:buFont typeface="Arial"/>
+              <a:buChar char="•"/>
+            </a:pPr>
+            <a:r>
+              <a:rPr sz="2200" b="0">
+                <a:solidFill>
+                  <a:srgbClr val="202122"/>
+                </a:solidFill>
+                <a:latin typeface="Calibri"/>
+              </a:rPr>
+              <a:t>Draws on knowledge from across the whole engineering core.</a:t>
+            </a:r>
+          </a:p>
+          <a:p>
+            <a:pPr marL="274320" indent="-274320">
+              <a:spcAft>
+                <a:spcPts val="990"/>
+              </a:spcAft>
+              <a:buClr>
+                <a:srgbClr val="0645AD"/>
+              </a:buClr>
+              <a:buFont typeface="Arial"/>
+              <a:buChar char="•"/>
+            </a:pPr>
+            <a:r>
+              <a:rPr sz="2200" b="1">
+                <a:solidFill>
+                  <a:srgbClr val="202122"/>
+                </a:solidFill>
+                <a:latin typeface="Calibri"/>
+              </a:rPr>
+              <a:t>Linked to four core skills:</a:t>
+            </a:r>
+            <a:r>
+              <a:rPr sz="2200" b="0">
+                <a:solidFill>
+                  <a:srgbClr val="202122"/>
+                </a:solidFill>
+                <a:latin typeface="Calibri"/>
+              </a:rPr>
+              <a:t> planning and preparation, communication, develop and manufacture, evaluation.</a:t>
+            </a:r>
+          </a:p>
+        </p:txBody>
+      </p:sp>
+      <p:sp>
+        <p:nvSpPr>
+          <p:cNvPr id="7" name="Rounded Rectangle 6"/>
           <p:cNvSpPr/>
           <p:nvPr/>
         </p:nvSpPr>
         <p:spPr>
           <a:xfrm>
-            <a:off x="1884006" y="2930652"/>
-            <a:ext cx="8423681" cy="36576"/>
-          </a:xfrm>
-          <a:prstGeom prst="rect">
-            <a:avLst/>
+            <a:off x="7772400" y="1600200"/>
+            <a:ext cx="3867912" cy="4434840"/>
+          </a:xfrm>
+          <a:prstGeom prst="roundRect">
+            <a:avLst>
+              <a:gd name="adj" fmla="val 8000"/>
+            </a:avLst>
           </a:prstGeom>
           <a:solidFill>
-            <a:srgbClr val="A9C8F0"/>
+            <a:srgbClr val="03306E"/>
           </a:solidFill>
           <a:ln>
             <a:noFill/>
@@ -5186,14 +7782,14 @@
       </p:sp>
       <p:sp>
         <p:nvSpPr>
-          <p:cNvPr id="7" name="Oval 6"/>
+          <p:cNvPr id="8" name="Oval 7"/>
           <p:cNvSpPr/>
           <p:nvPr/>
         </p:nvSpPr>
         <p:spPr>
           <a:xfrm>
-            <a:off x="1563966" y="2628900"/>
-            <a:ext cx="640080" cy="640080"/>
+            <a:off x="8046720" y="1874519"/>
+            <a:ext cx="548640" cy="548640"/>
           </a:xfrm>
           <a:prstGeom prst="ellipse">
             <a:avLst/>
@@ -5232,21 +7828,21 @@
                 </a:solidFill>
                 <a:latin typeface="Calibri"/>
               </a:rPr>
-              <a:t>1</a:t>
-            </a:r>
-          </a:p>
-        </p:txBody>
-      </p:sp>
-      <p:sp>
-        <p:nvSpPr>
-          <p:cNvPr id="8" name="TextBox 7"/>
+              <a:t>!</a:t>
+            </a:r>
+          </a:p>
+        </p:txBody>
+      </p:sp>
+      <p:sp>
+        <p:nvSpPr>
+          <p:cNvPr id="9" name="TextBox 8"/>
           <p:cNvSpPr txBox="1"/>
           <p:nvPr/>
         </p:nvSpPr>
         <p:spPr>
           <a:xfrm>
-            <a:off x="548640" y="3406140"/>
-            <a:ext cx="2670733" cy="731520"/>
+            <a:off x="8046720" y="2606040"/>
+            <a:ext cx="3291840" cy="365760"/>
           </a:xfrm>
           <a:prstGeom prst="rect">
             <a:avLst/>
@@ -5257,61 +7853,17 @@
           <a:bodyPr wrap="square" anchor="t" lIns="0" rIns="0" tIns="0" bIns="0"/>
           <a:lstStyle/>
           <a:p>
-            <a:pPr algn="ctr"/>
-            <a:r>
-              <a:rPr sz="1700" b="1" i="0">
-                <a:solidFill>
-                  <a:srgbClr val="03306E"/>
-                </a:solidFill>
-                <a:latin typeface="Calibri"/>
-              </a:rPr>
-              <a:t>Research</a:t>
-            </a:r>
-          </a:p>
-        </p:txBody>
-      </p:sp>
-      <p:sp>
-        <p:nvSpPr>
-          <p:cNvPr id="9" name="Rounded Rectangle 8"/>
-          <p:cNvSpPr/>
-          <p:nvPr/>
-        </p:nvSpPr>
-        <p:spPr>
-          <a:xfrm>
-            <a:off x="548640" y="4183380"/>
-            <a:ext cx="2670733" cy="960120"/>
-          </a:xfrm>
-          <a:prstGeom prst="roundRect">
-            <a:avLst>
-              <a:gd name="adj" fmla="val 6000"/>
-            </a:avLst>
-          </a:prstGeom>
-          <a:solidFill>
-            <a:srgbClr val="EAF3FF"/>
-          </a:solidFill>
-          <a:ln>
-            <a:noFill/>
-          </a:ln>
-          <a:effectLst/>
-        </p:spPr>
-        <p:style>
-          <a:lnRef idx="1">
-            <a:schemeClr val="accent1"/>
-          </a:lnRef>
-          <a:fillRef idx="3">
-            <a:schemeClr val="accent1"/>
-          </a:fillRef>
-          <a:effectRef idx="2">
-            <a:schemeClr val="accent1"/>
-          </a:effectRef>
-          <a:fontRef idx="minor">
-            <a:schemeClr val="lt1"/>
-          </a:fontRef>
-        </p:style>
-        <p:txBody>
-          <a:bodyPr rtlCol="0" anchor="ctr"/>
-          <a:lstStyle/>
-          <a:p/>
+            <a:pPr algn="l"/>
+            <a:r>
+              <a:rPr sz="1300" b="1" i="0">
+                <a:solidFill>
+                  <a:srgbClr val="A9C8F0"/>
+                </a:solidFill>
+                <a:latin typeface="Calibri"/>
+              </a:rPr>
+              <a:t>KEY IDEA</a:t>
+            </a:r>
+          </a:p>
         </p:txBody>
       </p:sp>
       <p:sp>
@@ -5322,8 +7874,8 @@
         </p:nvSpPr>
         <p:spPr>
           <a:xfrm>
-            <a:off x="685800" y="4320540"/>
-            <a:ext cx="2396413" cy="685800"/>
+            <a:off x="8046720" y="3017520"/>
+            <a:ext cx="3291840" cy="2926080"/>
           </a:xfrm>
           <a:prstGeom prst="rect">
             <a:avLst/>
@@ -5336,502 +7888,13 @@
           <a:p>
             <a:pPr algn="l"/>
             <a:r>
-              <a:rPr sz="1800" b="0" i="0">
-                <a:solidFill>
-                  <a:srgbClr val="202122"/>
-                </a:solidFill>
-                <a:latin typeface="Calibri"/>
-              </a:rPr>
-              <a:t>Investigate the brief.</a:t>
-            </a:r>
-          </a:p>
-        </p:txBody>
-      </p:sp>
-      <p:sp>
-        <p:nvSpPr>
-          <p:cNvPr id="11" name="Oval 10"/>
-          <p:cNvSpPr/>
-          <p:nvPr/>
-        </p:nvSpPr>
-        <p:spPr>
-          <a:xfrm>
-            <a:off x="4371860" y="2628900"/>
-            <a:ext cx="640080" cy="640080"/>
-          </a:xfrm>
-          <a:prstGeom prst="ellipse">
-            <a:avLst/>
-          </a:prstGeom>
-          <a:solidFill>
-            <a:srgbClr val="F2B705"/>
-          </a:solidFill>
-          <a:ln>
-            <a:noFill/>
-          </a:ln>
-          <a:effectLst/>
-        </p:spPr>
-        <p:style>
-          <a:lnRef idx="1">
-            <a:schemeClr val="accent1"/>
-          </a:lnRef>
-          <a:fillRef idx="3">
-            <a:schemeClr val="accent1"/>
-          </a:fillRef>
-          <a:effectRef idx="2">
-            <a:schemeClr val="accent1"/>
-          </a:effectRef>
-          <a:fontRef idx="minor">
-            <a:schemeClr val="lt1"/>
-          </a:fontRef>
-        </p:style>
-        <p:txBody>
-          <a:bodyPr rtlCol="0" anchor="ctr" lIns="0" rIns="0" tIns="0" bIns="0"/>
-          <a:lstStyle/>
-          <a:p>
-            <a:pPr algn="ctr"/>
-            <a:r>
-              <a:rPr sz="2000" b="1">
-                <a:solidFill>
-                  <a:srgbClr val="202122"/>
-                </a:solidFill>
-                <a:latin typeface="Calibri"/>
-              </a:rPr>
-              <a:t>2</a:t>
-            </a:r>
-          </a:p>
-        </p:txBody>
-      </p:sp>
-      <p:sp>
-        <p:nvSpPr>
-          <p:cNvPr id="12" name="TextBox 11"/>
-          <p:cNvSpPr txBox="1"/>
-          <p:nvPr/>
-        </p:nvSpPr>
-        <p:spPr>
-          <a:xfrm>
-            <a:off x="3356533" y="3406140"/>
-            <a:ext cx="2670733" cy="731520"/>
-          </a:xfrm>
-          <a:prstGeom prst="rect">
-            <a:avLst/>
-          </a:prstGeom>
-          <a:noFill/>
-        </p:spPr>
-        <p:txBody>
-          <a:bodyPr wrap="square" anchor="t" lIns="0" rIns="0" tIns="0" bIns="0"/>
-          <a:lstStyle/>
-          <a:p>
-            <a:pPr algn="ctr"/>
-            <a:r>
-              <a:rPr sz="1700" b="1" i="0">
-                <a:solidFill>
-                  <a:srgbClr val="03306E"/>
-                </a:solidFill>
-                <a:latin typeface="Calibri"/>
-              </a:rPr>
-              <a:t>Design</a:t>
-            </a:r>
-          </a:p>
-        </p:txBody>
-      </p:sp>
-      <p:sp>
-        <p:nvSpPr>
-          <p:cNvPr id="13" name="Rounded Rectangle 12"/>
-          <p:cNvSpPr/>
-          <p:nvPr/>
-        </p:nvSpPr>
-        <p:spPr>
-          <a:xfrm>
-            <a:off x="3356533" y="4183380"/>
-            <a:ext cx="2670733" cy="960120"/>
-          </a:xfrm>
-          <a:prstGeom prst="roundRect">
-            <a:avLst>
-              <a:gd name="adj" fmla="val 6000"/>
-            </a:avLst>
-          </a:prstGeom>
-          <a:solidFill>
-            <a:srgbClr val="EAF3FF"/>
-          </a:solidFill>
-          <a:ln>
-            <a:noFill/>
-          </a:ln>
-          <a:effectLst/>
-        </p:spPr>
-        <p:style>
-          <a:lnRef idx="1">
-            <a:schemeClr val="accent1"/>
-          </a:lnRef>
-          <a:fillRef idx="3">
-            <a:schemeClr val="accent1"/>
-          </a:fillRef>
-          <a:effectRef idx="2">
-            <a:schemeClr val="accent1"/>
-          </a:effectRef>
-          <a:fontRef idx="minor">
-            <a:schemeClr val="lt1"/>
-          </a:fontRef>
-        </p:style>
-        <p:txBody>
-          <a:bodyPr rtlCol="0" anchor="ctr"/>
-          <a:lstStyle/>
-          <a:p/>
-        </p:txBody>
-      </p:sp>
-      <p:sp>
-        <p:nvSpPr>
-          <p:cNvPr id="14" name="TextBox 13"/>
-          <p:cNvSpPr txBox="1"/>
-          <p:nvPr/>
-        </p:nvSpPr>
-        <p:spPr>
-          <a:xfrm>
-            <a:off x="3493693" y="4320540"/>
-            <a:ext cx="2396413" cy="685800"/>
-          </a:xfrm>
-          <a:prstGeom prst="rect">
-            <a:avLst/>
-          </a:prstGeom>
-          <a:noFill/>
-        </p:spPr>
-        <p:txBody>
-          <a:bodyPr wrap="square" anchor="t" lIns="0" rIns="0" tIns="0" bIns="0"/>
-          <a:lstStyle/>
-          <a:p>
-            <a:pPr algn="l"/>
-            <a:r>
-              <a:rPr sz="1800" b="0" i="0">
-                <a:solidFill>
-                  <a:srgbClr val="202122"/>
-                </a:solidFill>
-                <a:latin typeface="Calibri"/>
-              </a:rPr>
-              <a:t>Develop a solution.</a:t>
-            </a:r>
-          </a:p>
-        </p:txBody>
-      </p:sp>
-      <p:sp>
-        <p:nvSpPr>
-          <p:cNvPr id="15" name="Oval 14"/>
-          <p:cNvSpPr/>
-          <p:nvPr/>
-        </p:nvSpPr>
-        <p:spPr>
-          <a:xfrm>
-            <a:off x="7179754" y="2628900"/>
-            <a:ext cx="640080" cy="640080"/>
-          </a:xfrm>
-          <a:prstGeom prst="ellipse">
-            <a:avLst/>
-          </a:prstGeom>
-          <a:solidFill>
-            <a:srgbClr val="F2B705"/>
-          </a:solidFill>
-          <a:ln>
-            <a:noFill/>
-          </a:ln>
-          <a:effectLst/>
-        </p:spPr>
-        <p:style>
-          <a:lnRef idx="1">
-            <a:schemeClr val="accent1"/>
-          </a:lnRef>
-          <a:fillRef idx="3">
-            <a:schemeClr val="accent1"/>
-          </a:fillRef>
-          <a:effectRef idx="2">
-            <a:schemeClr val="accent1"/>
-          </a:effectRef>
-          <a:fontRef idx="minor">
-            <a:schemeClr val="lt1"/>
-          </a:fontRef>
-        </p:style>
-        <p:txBody>
-          <a:bodyPr rtlCol="0" anchor="ctr" lIns="0" rIns="0" tIns="0" bIns="0"/>
-          <a:lstStyle/>
-          <a:p>
-            <a:pPr algn="ctr"/>
-            <a:r>
-              <a:rPr sz="2000" b="1">
-                <a:solidFill>
-                  <a:srgbClr val="202122"/>
-                </a:solidFill>
-                <a:latin typeface="Calibri"/>
-              </a:rPr>
-              <a:t>3</a:t>
-            </a:r>
-          </a:p>
-        </p:txBody>
-      </p:sp>
-      <p:sp>
-        <p:nvSpPr>
-          <p:cNvPr id="16" name="TextBox 15"/>
-          <p:cNvSpPr txBox="1"/>
-          <p:nvPr/>
-        </p:nvSpPr>
-        <p:spPr>
-          <a:xfrm>
-            <a:off x="6164427" y="3406140"/>
-            <a:ext cx="2670733" cy="731520"/>
-          </a:xfrm>
-          <a:prstGeom prst="rect">
-            <a:avLst/>
-          </a:prstGeom>
-          <a:noFill/>
-        </p:spPr>
-        <p:txBody>
-          <a:bodyPr wrap="square" anchor="t" lIns="0" rIns="0" tIns="0" bIns="0"/>
-          <a:lstStyle/>
-          <a:p>
-            <a:pPr algn="ctr"/>
-            <a:r>
-              <a:rPr sz="1700" b="1" i="0">
-                <a:solidFill>
-                  <a:srgbClr val="03306E"/>
-                </a:solidFill>
-                <a:latin typeface="Calibri"/>
-              </a:rPr>
-              <a:t>Plan</a:t>
-            </a:r>
-          </a:p>
-        </p:txBody>
-      </p:sp>
-      <p:sp>
-        <p:nvSpPr>
-          <p:cNvPr id="17" name="Rounded Rectangle 16"/>
-          <p:cNvSpPr/>
-          <p:nvPr/>
-        </p:nvSpPr>
-        <p:spPr>
-          <a:xfrm>
-            <a:off x="6164427" y="4183380"/>
-            <a:ext cx="2670733" cy="960120"/>
-          </a:xfrm>
-          <a:prstGeom prst="roundRect">
-            <a:avLst>
-              <a:gd name="adj" fmla="val 6000"/>
-            </a:avLst>
-          </a:prstGeom>
-          <a:solidFill>
-            <a:srgbClr val="EAF3FF"/>
-          </a:solidFill>
-          <a:ln>
-            <a:noFill/>
-          </a:ln>
-          <a:effectLst/>
-        </p:spPr>
-        <p:style>
-          <a:lnRef idx="1">
-            <a:schemeClr val="accent1"/>
-          </a:lnRef>
-          <a:fillRef idx="3">
-            <a:schemeClr val="accent1"/>
-          </a:fillRef>
-          <a:effectRef idx="2">
-            <a:schemeClr val="accent1"/>
-          </a:effectRef>
-          <a:fontRef idx="minor">
-            <a:schemeClr val="lt1"/>
-          </a:fontRef>
-        </p:style>
-        <p:txBody>
-          <a:bodyPr rtlCol="0" anchor="ctr"/>
-          <a:lstStyle/>
-          <a:p/>
-        </p:txBody>
-      </p:sp>
-      <p:sp>
-        <p:nvSpPr>
-          <p:cNvPr id="18" name="TextBox 17"/>
-          <p:cNvSpPr txBox="1"/>
-          <p:nvPr/>
-        </p:nvSpPr>
-        <p:spPr>
-          <a:xfrm>
-            <a:off x="6301587" y="4320540"/>
-            <a:ext cx="2396413" cy="685800"/>
-          </a:xfrm>
-          <a:prstGeom prst="rect">
-            <a:avLst/>
-          </a:prstGeom>
-          <a:noFill/>
-        </p:spPr>
-        <p:txBody>
-          <a:bodyPr wrap="square" anchor="t" lIns="0" rIns="0" tIns="0" bIns="0"/>
-          <a:lstStyle/>
-          <a:p>
-            <a:pPr algn="l"/>
-            <a:r>
-              <a:rPr sz="1800" b="0" i="0">
-                <a:solidFill>
-                  <a:srgbClr val="202122"/>
-                </a:solidFill>
-                <a:latin typeface="Calibri"/>
-              </a:rPr>
-              <a:t>Plan how it would be made.</a:t>
-            </a:r>
-          </a:p>
-        </p:txBody>
-      </p:sp>
-      <p:sp>
-        <p:nvSpPr>
-          <p:cNvPr id="19" name="Oval 18"/>
-          <p:cNvSpPr/>
-          <p:nvPr/>
-        </p:nvSpPr>
-        <p:spPr>
-          <a:xfrm>
-            <a:off x="9987648" y="2628900"/>
-            <a:ext cx="640080" cy="640080"/>
-          </a:xfrm>
-          <a:prstGeom prst="ellipse">
-            <a:avLst/>
-          </a:prstGeom>
-          <a:solidFill>
-            <a:srgbClr val="F2B705"/>
-          </a:solidFill>
-          <a:ln>
-            <a:noFill/>
-          </a:ln>
-          <a:effectLst/>
-        </p:spPr>
-        <p:style>
-          <a:lnRef idx="1">
-            <a:schemeClr val="accent1"/>
-          </a:lnRef>
-          <a:fillRef idx="3">
-            <a:schemeClr val="accent1"/>
-          </a:fillRef>
-          <a:effectRef idx="2">
-            <a:schemeClr val="accent1"/>
-          </a:effectRef>
-          <a:fontRef idx="minor">
-            <a:schemeClr val="lt1"/>
-          </a:fontRef>
-        </p:style>
-        <p:txBody>
-          <a:bodyPr rtlCol="0" anchor="ctr" lIns="0" rIns="0" tIns="0" bIns="0"/>
-          <a:lstStyle/>
-          <a:p>
-            <a:pPr algn="ctr"/>
-            <a:r>
-              <a:rPr sz="2000" b="1">
-                <a:solidFill>
-                  <a:srgbClr val="202122"/>
-                </a:solidFill>
-                <a:latin typeface="Calibri"/>
-              </a:rPr>
-              <a:t>4</a:t>
-            </a:r>
-          </a:p>
-        </p:txBody>
-      </p:sp>
-      <p:sp>
-        <p:nvSpPr>
-          <p:cNvPr id="20" name="TextBox 19"/>
-          <p:cNvSpPr txBox="1"/>
-          <p:nvPr/>
-        </p:nvSpPr>
-        <p:spPr>
-          <a:xfrm>
-            <a:off x="8972321" y="3406140"/>
-            <a:ext cx="2670733" cy="731520"/>
-          </a:xfrm>
-          <a:prstGeom prst="rect">
-            <a:avLst/>
-          </a:prstGeom>
-          <a:noFill/>
-        </p:spPr>
-        <p:txBody>
-          <a:bodyPr wrap="square" anchor="t" lIns="0" rIns="0" tIns="0" bIns="0"/>
-          <a:lstStyle/>
-          <a:p>
-            <a:pPr algn="ctr"/>
-            <a:r>
-              <a:rPr sz="1700" b="1" i="0">
-                <a:solidFill>
-                  <a:srgbClr val="03306E"/>
-                </a:solidFill>
-                <a:latin typeface="Calibri"/>
-              </a:rPr>
-              <a:t>Present</a:t>
-            </a:r>
-          </a:p>
-        </p:txBody>
-      </p:sp>
-      <p:sp>
-        <p:nvSpPr>
-          <p:cNvPr id="21" name="Rounded Rectangle 20"/>
-          <p:cNvSpPr/>
-          <p:nvPr/>
-        </p:nvSpPr>
-        <p:spPr>
-          <a:xfrm>
-            <a:off x="8972321" y="4183380"/>
-            <a:ext cx="2670733" cy="960120"/>
-          </a:xfrm>
-          <a:prstGeom prst="roundRect">
-            <a:avLst>
-              <a:gd name="adj" fmla="val 6000"/>
-            </a:avLst>
-          </a:prstGeom>
-          <a:solidFill>
-            <a:srgbClr val="EAF3FF"/>
-          </a:solidFill>
-          <a:ln>
-            <a:noFill/>
-          </a:ln>
-          <a:effectLst/>
-        </p:spPr>
-        <p:style>
-          <a:lnRef idx="1">
-            <a:schemeClr val="accent1"/>
-          </a:lnRef>
-          <a:fillRef idx="3">
-            <a:schemeClr val="accent1"/>
-          </a:fillRef>
-          <a:effectRef idx="2">
-            <a:schemeClr val="accent1"/>
-          </a:effectRef>
-          <a:fontRef idx="minor">
-            <a:schemeClr val="lt1"/>
-          </a:fontRef>
-        </p:style>
-        <p:txBody>
-          <a:bodyPr rtlCol="0" anchor="ctr"/>
-          <a:lstStyle/>
-          <a:p/>
-        </p:txBody>
-      </p:sp>
-      <p:sp>
-        <p:nvSpPr>
-          <p:cNvPr id="22" name="TextBox 21"/>
-          <p:cNvSpPr txBox="1"/>
-          <p:nvPr/>
-        </p:nvSpPr>
-        <p:spPr>
-          <a:xfrm>
-            <a:off x="9109481" y="4320540"/>
-            <a:ext cx="2396413" cy="685800"/>
-          </a:xfrm>
-          <a:prstGeom prst="rect">
-            <a:avLst/>
-          </a:prstGeom>
-          <a:noFill/>
-        </p:spPr>
-        <p:txBody>
-          <a:bodyPr wrap="square" anchor="t" lIns="0" rIns="0" tIns="0" bIns="0"/>
-          <a:lstStyle/>
-          <a:p>
-            <a:pPr algn="l"/>
-            <a:r>
-              <a:rPr sz="1800" b="0" i="0">
-                <a:solidFill>
-                  <a:srgbClr val="202122"/>
-                </a:solidFill>
-                <a:latin typeface="Calibri"/>
-              </a:rPr>
-              <a:t>Present your outcome.</a:t>
+              <a:rPr sz="2200" b="0" i="0">
+                <a:solidFill>
+                  <a:srgbClr val="FFFFFF"/>
+                </a:solidFill>
+                <a:latin typeface="Cambria"/>
+              </a:rPr>
+              <a:t>Specialism knowledge is assessed separately. The ESP is about applying the core.</a:t>
             </a:r>
           </a:p>
         </p:txBody>
@@ -5923,7 +7986,7 @@
                 </a:solidFill>
                 <a:latin typeface="Cambria"/>
               </a:rPr>
-              <a:t>Assessment objectives</a:t>
+              <a:t>Quick check: What is the ESP?</a:t>
             </a:r>
           </a:p>
         </p:txBody>
@@ -5990,6 +8053,1708 @@
                 <a:latin typeface="Calibri"/>
               </a:rPr>
               <a:t>5</a:t>
+            </a:r>
+          </a:p>
+        </p:txBody>
+      </p:sp>
+      <p:sp>
+        <p:nvSpPr>
+          <p:cNvPr id="6" name="Oval 5"/>
+          <p:cNvSpPr/>
+          <p:nvPr/>
+        </p:nvSpPr>
+        <p:spPr>
+          <a:xfrm>
+            <a:off x="548640" y="1691640"/>
+            <a:ext cx="502920" cy="502920"/>
+          </a:xfrm>
+          <a:prstGeom prst="ellipse">
+            <a:avLst/>
+          </a:prstGeom>
+          <a:solidFill>
+            <a:srgbClr val="F2B705"/>
+          </a:solidFill>
+          <a:ln>
+            <a:noFill/>
+          </a:ln>
+          <a:effectLst/>
+        </p:spPr>
+        <p:style>
+          <a:lnRef idx="1">
+            <a:schemeClr val="accent1"/>
+          </a:lnRef>
+          <a:fillRef idx="3">
+            <a:schemeClr val="accent1"/>
+          </a:fillRef>
+          <a:effectRef idx="2">
+            <a:schemeClr val="accent1"/>
+          </a:effectRef>
+          <a:fontRef idx="minor">
+            <a:schemeClr val="lt1"/>
+          </a:fontRef>
+        </p:style>
+        <p:txBody>
+          <a:bodyPr rtlCol="0" anchor="ctr" lIns="0" rIns="0" tIns="0" bIns="0"/>
+          <a:lstStyle/>
+          <a:p>
+            <a:pPr algn="ctr"/>
+            <a:r>
+              <a:rPr sz="1600" b="1">
+                <a:solidFill>
+                  <a:srgbClr val="202122"/>
+                </a:solidFill>
+                <a:latin typeface="Calibri"/>
+              </a:rPr>
+              <a:t>1</a:t>
+            </a:r>
+          </a:p>
+        </p:txBody>
+      </p:sp>
+      <p:sp>
+        <p:nvSpPr>
+          <p:cNvPr id="7" name="TextBox 6"/>
+          <p:cNvSpPr txBox="1"/>
+          <p:nvPr/>
+        </p:nvSpPr>
+        <p:spPr>
+          <a:xfrm>
+            <a:off x="1371600" y="1645920"/>
+            <a:ext cx="10271455" cy="1188720"/>
+          </a:xfrm>
+          <a:prstGeom prst="rect">
+            <a:avLst/>
+          </a:prstGeom>
+          <a:noFill/>
+        </p:spPr>
+        <p:txBody>
+          <a:bodyPr wrap="square" anchor="t" lIns="0" rIns="0" tIns="0" bIns="0"/>
+          <a:lstStyle/>
+          <a:p>
+            <a:pPr algn="l"/>
+            <a:r>
+              <a:rPr sz="2400" b="0" i="0">
+                <a:solidFill>
+                  <a:srgbClr val="202122"/>
+                </a:solidFill>
+                <a:latin typeface="Calibri"/>
+              </a:rPr>
+              <a:t>What percentage of the core is the ESP?</a:t>
+            </a:r>
+          </a:p>
+        </p:txBody>
+      </p:sp>
+      <p:sp>
+        <p:nvSpPr>
+          <p:cNvPr id="8" name="Oval 7"/>
+          <p:cNvSpPr/>
+          <p:nvPr/>
+        </p:nvSpPr>
+        <p:spPr>
+          <a:xfrm>
+            <a:off x="548640" y="3108960"/>
+            <a:ext cx="502920" cy="502920"/>
+          </a:xfrm>
+          <a:prstGeom prst="ellipse">
+            <a:avLst/>
+          </a:prstGeom>
+          <a:solidFill>
+            <a:srgbClr val="F2B705"/>
+          </a:solidFill>
+          <a:ln>
+            <a:noFill/>
+          </a:ln>
+          <a:effectLst/>
+        </p:spPr>
+        <p:style>
+          <a:lnRef idx="1">
+            <a:schemeClr val="accent1"/>
+          </a:lnRef>
+          <a:fillRef idx="3">
+            <a:schemeClr val="accent1"/>
+          </a:fillRef>
+          <a:effectRef idx="2">
+            <a:schemeClr val="accent1"/>
+          </a:effectRef>
+          <a:fontRef idx="minor">
+            <a:schemeClr val="lt1"/>
+          </a:fontRef>
+        </p:style>
+        <p:txBody>
+          <a:bodyPr rtlCol="0" anchor="ctr" lIns="0" rIns="0" tIns="0" bIns="0"/>
+          <a:lstStyle/>
+          <a:p>
+            <a:pPr algn="ctr"/>
+            <a:r>
+              <a:rPr sz="1600" b="1">
+                <a:solidFill>
+                  <a:srgbClr val="202122"/>
+                </a:solidFill>
+                <a:latin typeface="Calibri"/>
+              </a:rPr>
+              <a:t>2</a:t>
+            </a:r>
+          </a:p>
+        </p:txBody>
+      </p:sp>
+      <p:sp>
+        <p:nvSpPr>
+          <p:cNvPr id="9" name="TextBox 8"/>
+          <p:cNvSpPr txBox="1"/>
+          <p:nvPr/>
+        </p:nvSpPr>
+        <p:spPr>
+          <a:xfrm>
+            <a:off x="1371600" y="3063240"/>
+            <a:ext cx="10271455" cy="1188720"/>
+          </a:xfrm>
+          <a:prstGeom prst="rect">
+            <a:avLst/>
+          </a:prstGeom>
+          <a:noFill/>
+        </p:spPr>
+        <p:txBody>
+          <a:bodyPr wrap="square" anchor="t" lIns="0" rIns="0" tIns="0" bIns="0"/>
+          <a:lstStyle/>
+          <a:p>
+            <a:pPr algn="l"/>
+            <a:r>
+              <a:rPr sz="2400" b="0" i="0">
+                <a:solidFill>
+                  <a:srgbClr val="202122"/>
+                </a:solidFill>
+                <a:latin typeface="Calibri"/>
+              </a:rPr>
+              <a:t>Who sets and marks the ESP?</a:t>
+            </a:r>
+          </a:p>
+        </p:txBody>
+      </p:sp>
+      <p:sp>
+        <p:nvSpPr>
+          <p:cNvPr id="10" name="Oval 9"/>
+          <p:cNvSpPr/>
+          <p:nvPr/>
+        </p:nvSpPr>
+        <p:spPr>
+          <a:xfrm>
+            <a:off x="548640" y="4526280"/>
+            <a:ext cx="502920" cy="502920"/>
+          </a:xfrm>
+          <a:prstGeom prst="ellipse">
+            <a:avLst/>
+          </a:prstGeom>
+          <a:solidFill>
+            <a:srgbClr val="F2B705"/>
+          </a:solidFill>
+          <a:ln>
+            <a:noFill/>
+          </a:ln>
+          <a:effectLst/>
+        </p:spPr>
+        <p:style>
+          <a:lnRef idx="1">
+            <a:schemeClr val="accent1"/>
+          </a:lnRef>
+          <a:fillRef idx="3">
+            <a:schemeClr val="accent1"/>
+          </a:fillRef>
+          <a:effectRef idx="2">
+            <a:schemeClr val="accent1"/>
+          </a:effectRef>
+          <a:fontRef idx="minor">
+            <a:schemeClr val="lt1"/>
+          </a:fontRef>
+        </p:style>
+        <p:txBody>
+          <a:bodyPr rtlCol="0" anchor="ctr" lIns="0" rIns="0" tIns="0" bIns="0"/>
+          <a:lstStyle/>
+          <a:p>
+            <a:pPr algn="ctr"/>
+            <a:r>
+              <a:rPr sz="1600" b="1">
+                <a:solidFill>
+                  <a:srgbClr val="202122"/>
+                </a:solidFill>
+                <a:latin typeface="Calibri"/>
+              </a:rPr>
+              <a:t>3</a:t>
+            </a:r>
+          </a:p>
+        </p:txBody>
+      </p:sp>
+      <p:sp>
+        <p:nvSpPr>
+          <p:cNvPr id="11" name="TextBox 10"/>
+          <p:cNvSpPr txBox="1"/>
+          <p:nvPr/>
+        </p:nvSpPr>
+        <p:spPr>
+          <a:xfrm>
+            <a:off x="1371600" y="4480560"/>
+            <a:ext cx="10271455" cy="1188720"/>
+          </a:xfrm>
+          <a:prstGeom prst="rect">
+            <a:avLst/>
+          </a:prstGeom>
+          <a:noFill/>
+        </p:spPr>
+        <p:txBody>
+          <a:bodyPr wrap="square" anchor="t" lIns="0" rIns="0" tIns="0" bIns="0"/>
+          <a:lstStyle/>
+          <a:p>
+            <a:pPr algn="l"/>
+            <a:r>
+              <a:rPr sz="2400" b="0" i="0">
+                <a:solidFill>
+                  <a:srgbClr val="202122"/>
+                </a:solidFill>
+                <a:latin typeface="Calibri"/>
+              </a:rPr>
+              <a:t>Name two of the four core skills.</a:t>
+            </a:r>
+          </a:p>
+        </p:txBody>
+      </p:sp>
+      <p:sp>
+        <p:nvSpPr>
+          <p:cNvPr id="12" name="TextBox 11"/>
+          <p:cNvSpPr txBox="1"/>
+          <p:nvPr/>
+        </p:nvSpPr>
+        <p:spPr>
+          <a:xfrm>
+            <a:off x="548640" y="5852160"/>
+            <a:ext cx="11094415" cy="365760"/>
+          </a:xfrm>
+          <a:prstGeom prst="rect">
+            <a:avLst/>
+          </a:prstGeom>
+          <a:noFill/>
+        </p:spPr>
+        <p:txBody>
+          <a:bodyPr wrap="square" anchor="t" lIns="0" rIns="0" tIns="0" bIns="0"/>
+          <a:lstStyle/>
+          <a:p>
+            <a:pPr algn="l"/>
+            <a:r>
+              <a:rPr sz="1300" b="0" i="1">
+                <a:solidFill>
+                  <a:srgbClr val="54595D"/>
+                </a:solidFill>
+                <a:latin typeface="Calibri"/>
+              </a:rPr>
+              <a:t>Answer on mini whiteboards or in your book. Answers are in the speaker notes.</a:t>
+            </a:r>
+          </a:p>
+        </p:txBody>
+      </p:sp>
+    </p:spTree>
+  </p:cSld>
+  <p:clrMapOvr>
+    <a:masterClrMapping/>
+  </p:clrMapOvr>
+</p:sld>
+</file>
+
+<file path=ppt/slides/slide6.xml><?xml version="1.0" encoding="utf-8"?>
+<p:sld xmlns:a="http://schemas.openxmlformats.org/drawingml/2006/main" xmlns:p="http://schemas.openxmlformats.org/presentationml/2006/main" xmlns:r="http://schemas.openxmlformats.org/officeDocument/2006/relationships">
+  <p:cSld>
+    <p:bg>
+      <p:bgPr>
+        <a:solidFill>
+          <a:srgbClr val="FFFFFF"/>
+        </a:solidFill>
+        <a:effectLst/>
+      </p:bgPr>
+    </p:bg>
+    <p:spTree>
+      <p:nvGrpSpPr>
+        <p:cNvPr id="1" name=""/>
+        <p:cNvGrpSpPr/>
+        <p:nvPr/>
+      </p:nvGrpSpPr>
+      <p:grpSpPr/>
+      <p:sp>
+        <p:nvSpPr>
+          <p:cNvPr id="2" name="TextBox 1"/>
+          <p:cNvSpPr txBox="1"/>
+          <p:nvPr/>
+        </p:nvSpPr>
+        <p:spPr>
+          <a:xfrm>
+            <a:off x="548640" y="320040"/>
+            <a:ext cx="11094415" cy="274320"/>
+          </a:xfrm>
+          <a:prstGeom prst="rect">
+            <a:avLst/>
+          </a:prstGeom>
+          <a:noFill/>
+        </p:spPr>
+        <p:txBody>
+          <a:bodyPr wrap="square" anchor="t" lIns="0" rIns="0" tIns="0" bIns="0"/>
+          <a:lstStyle/>
+          <a:p>
+            <a:pPr algn="l"/>
+            <a:r>
+              <a:rPr sz="1100" b="1" i="0">
+                <a:solidFill>
+                  <a:srgbClr val="54595D"/>
+                </a:solidFill>
+                <a:latin typeface="Calibri"/>
+              </a:rPr>
+              <a:t>ENGINEERING CORE  ·  Core Component</a:t>
+            </a:r>
+          </a:p>
+        </p:txBody>
+      </p:sp>
+      <p:sp>
+        <p:nvSpPr>
+          <p:cNvPr id="3" name="TextBox 2"/>
+          <p:cNvSpPr txBox="1"/>
+          <p:nvPr/>
+        </p:nvSpPr>
+        <p:spPr>
+          <a:xfrm>
+            <a:off x="548640" y="566928"/>
+            <a:ext cx="11094415" cy="822960"/>
+          </a:xfrm>
+          <a:prstGeom prst="rect">
+            <a:avLst/>
+          </a:prstGeom>
+          <a:noFill/>
+        </p:spPr>
+        <p:txBody>
+          <a:bodyPr wrap="square" anchor="ctr" lIns="0" rIns="0" tIns="0" bIns="0"/>
+          <a:lstStyle/>
+          <a:p>
+            <a:pPr algn="l"/>
+            <a:r>
+              <a:rPr sz="3200" b="1" i="0">
+                <a:solidFill>
+                  <a:srgbClr val="03306E"/>
+                </a:solidFill>
+                <a:latin typeface="Cambria"/>
+              </a:rPr>
+              <a:t>The tasks</a:t>
+            </a:r>
+          </a:p>
+        </p:txBody>
+      </p:sp>
+      <p:sp>
+        <p:nvSpPr>
+          <p:cNvPr id="4" name="TextBox 3"/>
+          <p:cNvSpPr txBox="1"/>
+          <p:nvPr/>
+        </p:nvSpPr>
+        <p:spPr>
+          <a:xfrm>
+            <a:off x="548640" y="6446520"/>
+            <a:ext cx="8229600" cy="274320"/>
+          </a:xfrm>
+          <a:prstGeom prst="rect">
+            <a:avLst/>
+          </a:prstGeom>
+          <a:noFill/>
+        </p:spPr>
+        <p:txBody>
+          <a:bodyPr wrap="square" anchor="t" lIns="0" rIns="0" tIns="0" bIns="0"/>
+          <a:lstStyle/>
+          <a:p>
+            <a:pPr algn="l"/>
+            <a:r>
+              <a:rPr sz="1000" b="0" i="0">
+                <a:solidFill>
+                  <a:srgbClr val="54595D"/>
+                </a:solidFill>
+                <a:latin typeface="Calibri"/>
+              </a:rPr>
+              <a:t>Design and Development for Engineering and Manufacturing T Level  ·  The Employer-set Project</a:t>
+            </a:r>
+          </a:p>
+        </p:txBody>
+      </p:sp>
+      <p:sp>
+        <p:nvSpPr>
+          <p:cNvPr id="5" name="TextBox 4"/>
+          <p:cNvSpPr txBox="1"/>
+          <p:nvPr/>
+        </p:nvSpPr>
+        <p:spPr>
+          <a:xfrm>
+            <a:off x="10728655" y="6446520"/>
+            <a:ext cx="914400" cy="274320"/>
+          </a:xfrm>
+          <a:prstGeom prst="rect">
+            <a:avLst/>
+          </a:prstGeom>
+          <a:noFill/>
+        </p:spPr>
+        <p:txBody>
+          <a:bodyPr wrap="square" anchor="t" lIns="0" rIns="0" tIns="0" bIns="0"/>
+          <a:lstStyle/>
+          <a:p>
+            <a:pPr algn="r"/>
+            <a:r>
+              <a:rPr sz="1000" b="0" i="0">
+                <a:solidFill>
+                  <a:srgbClr val="54595D"/>
+                </a:solidFill>
+                <a:latin typeface="Calibri"/>
+              </a:rPr>
+              <a:t>6</a:t>
+            </a:r>
+          </a:p>
+        </p:txBody>
+      </p:sp>
+      <p:sp>
+        <p:nvSpPr>
+          <p:cNvPr id="6" name="Rectangle 5"/>
+          <p:cNvSpPr/>
+          <p:nvPr/>
+        </p:nvSpPr>
+        <p:spPr>
+          <a:xfrm>
+            <a:off x="1884006" y="2930652"/>
+            <a:ext cx="8423681" cy="36576"/>
+          </a:xfrm>
+          <a:prstGeom prst="rect">
+            <a:avLst/>
+          </a:prstGeom>
+          <a:solidFill>
+            <a:srgbClr val="A9C8F0"/>
+          </a:solidFill>
+          <a:ln>
+            <a:noFill/>
+          </a:ln>
+          <a:effectLst/>
+        </p:spPr>
+        <p:style>
+          <a:lnRef idx="1">
+            <a:schemeClr val="accent1"/>
+          </a:lnRef>
+          <a:fillRef idx="3">
+            <a:schemeClr val="accent1"/>
+          </a:fillRef>
+          <a:effectRef idx="2">
+            <a:schemeClr val="accent1"/>
+          </a:effectRef>
+          <a:fontRef idx="minor">
+            <a:schemeClr val="lt1"/>
+          </a:fontRef>
+        </p:style>
+        <p:txBody>
+          <a:bodyPr rtlCol="0" anchor="ctr"/>
+          <a:lstStyle/>
+          <a:p/>
+        </p:txBody>
+      </p:sp>
+      <p:sp>
+        <p:nvSpPr>
+          <p:cNvPr id="7" name="Oval 6"/>
+          <p:cNvSpPr/>
+          <p:nvPr/>
+        </p:nvSpPr>
+        <p:spPr>
+          <a:xfrm>
+            <a:off x="1563966" y="2628900"/>
+            <a:ext cx="640080" cy="640080"/>
+          </a:xfrm>
+          <a:prstGeom prst="ellipse">
+            <a:avLst/>
+          </a:prstGeom>
+          <a:solidFill>
+            <a:srgbClr val="F2B705"/>
+          </a:solidFill>
+          <a:ln>
+            <a:noFill/>
+          </a:ln>
+          <a:effectLst/>
+        </p:spPr>
+        <p:style>
+          <a:lnRef idx="1">
+            <a:schemeClr val="accent1"/>
+          </a:lnRef>
+          <a:fillRef idx="3">
+            <a:schemeClr val="accent1"/>
+          </a:fillRef>
+          <a:effectRef idx="2">
+            <a:schemeClr val="accent1"/>
+          </a:effectRef>
+          <a:fontRef idx="minor">
+            <a:schemeClr val="lt1"/>
+          </a:fontRef>
+        </p:style>
+        <p:txBody>
+          <a:bodyPr rtlCol="0" anchor="ctr" lIns="0" rIns="0" tIns="0" bIns="0"/>
+          <a:lstStyle/>
+          <a:p>
+            <a:pPr algn="ctr"/>
+            <a:r>
+              <a:rPr sz="2000" b="1">
+                <a:solidFill>
+                  <a:srgbClr val="202122"/>
+                </a:solidFill>
+                <a:latin typeface="Calibri"/>
+              </a:rPr>
+              <a:t>1</a:t>
+            </a:r>
+          </a:p>
+        </p:txBody>
+      </p:sp>
+      <p:sp>
+        <p:nvSpPr>
+          <p:cNvPr id="8" name="TextBox 7"/>
+          <p:cNvSpPr txBox="1"/>
+          <p:nvPr/>
+        </p:nvSpPr>
+        <p:spPr>
+          <a:xfrm>
+            <a:off x="548640" y="3406140"/>
+            <a:ext cx="2670733" cy="731520"/>
+          </a:xfrm>
+          <a:prstGeom prst="rect">
+            <a:avLst/>
+          </a:prstGeom>
+          <a:noFill/>
+        </p:spPr>
+        <p:txBody>
+          <a:bodyPr wrap="square" anchor="t" lIns="0" rIns="0" tIns="0" bIns="0"/>
+          <a:lstStyle/>
+          <a:p>
+            <a:pPr algn="ctr"/>
+            <a:r>
+              <a:rPr sz="1700" b="1" i="0">
+                <a:solidFill>
+                  <a:srgbClr val="03306E"/>
+                </a:solidFill>
+                <a:latin typeface="Calibri"/>
+              </a:rPr>
+              <a:t>Research</a:t>
+            </a:r>
+          </a:p>
+        </p:txBody>
+      </p:sp>
+      <p:sp>
+        <p:nvSpPr>
+          <p:cNvPr id="9" name="Rounded Rectangle 8"/>
+          <p:cNvSpPr/>
+          <p:nvPr/>
+        </p:nvSpPr>
+        <p:spPr>
+          <a:xfrm>
+            <a:off x="548640" y="4183380"/>
+            <a:ext cx="2670733" cy="960120"/>
+          </a:xfrm>
+          <a:prstGeom prst="roundRect">
+            <a:avLst>
+              <a:gd name="adj" fmla="val 6000"/>
+            </a:avLst>
+          </a:prstGeom>
+          <a:solidFill>
+            <a:srgbClr val="EAF3FF"/>
+          </a:solidFill>
+          <a:ln>
+            <a:noFill/>
+          </a:ln>
+          <a:effectLst/>
+        </p:spPr>
+        <p:style>
+          <a:lnRef idx="1">
+            <a:schemeClr val="accent1"/>
+          </a:lnRef>
+          <a:fillRef idx="3">
+            <a:schemeClr val="accent1"/>
+          </a:fillRef>
+          <a:effectRef idx="2">
+            <a:schemeClr val="accent1"/>
+          </a:effectRef>
+          <a:fontRef idx="minor">
+            <a:schemeClr val="lt1"/>
+          </a:fontRef>
+        </p:style>
+        <p:txBody>
+          <a:bodyPr rtlCol="0" anchor="ctr"/>
+          <a:lstStyle/>
+          <a:p/>
+        </p:txBody>
+      </p:sp>
+      <p:sp>
+        <p:nvSpPr>
+          <p:cNvPr id="10" name="TextBox 9"/>
+          <p:cNvSpPr txBox="1"/>
+          <p:nvPr/>
+        </p:nvSpPr>
+        <p:spPr>
+          <a:xfrm>
+            <a:off x="685800" y="4320540"/>
+            <a:ext cx="2396413" cy="685800"/>
+          </a:xfrm>
+          <a:prstGeom prst="rect">
+            <a:avLst/>
+          </a:prstGeom>
+          <a:noFill/>
+        </p:spPr>
+        <p:txBody>
+          <a:bodyPr wrap="square" anchor="t" lIns="0" rIns="0" tIns="0" bIns="0"/>
+          <a:lstStyle/>
+          <a:p>
+            <a:pPr algn="l"/>
+            <a:r>
+              <a:rPr sz="1800" b="0" i="0">
+                <a:solidFill>
+                  <a:srgbClr val="202122"/>
+                </a:solidFill>
+                <a:latin typeface="Calibri"/>
+              </a:rPr>
+              <a:t>Investigate the brief.</a:t>
+            </a:r>
+          </a:p>
+        </p:txBody>
+      </p:sp>
+      <p:sp>
+        <p:nvSpPr>
+          <p:cNvPr id="11" name="Oval 10"/>
+          <p:cNvSpPr/>
+          <p:nvPr/>
+        </p:nvSpPr>
+        <p:spPr>
+          <a:xfrm>
+            <a:off x="4371860" y="2628900"/>
+            <a:ext cx="640080" cy="640080"/>
+          </a:xfrm>
+          <a:prstGeom prst="ellipse">
+            <a:avLst/>
+          </a:prstGeom>
+          <a:solidFill>
+            <a:srgbClr val="F2B705"/>
+          </a:solidFill>
+          <a:ln>
+            <a:noFill/>
+          </a:ln>
+          <a:effectLst/>
+        </p:spPr>
+        <p:style>
+          <a:lnRef idx="1">
+            <a:schemeClr val="accent1"/>
+          </a:lnRef>
+          <a:fillRef idx="3">
+            <a:schemeClr val="accent1"/>
+          </a:fillRef>
+          <a:effectRef idx="2">
+            <a:schemeClr val="accent1"/>
+          </a:effectRef>
+          <a:fontRef idx="minor">
+            <a:schemeClr val="lt1"/>
+          </a:fontRef>
+        </p:style>
+        <p:txBody>
+          <a:bodyPr rtlCol="0" anchor="ctr" lIns="0" rIns="0" tIns="0" bIns="0"/>
+          <a:lstStyle/>
+          <a:p>
+            <a:pPr algn="ctr"/>
+            <a:r>
+              <a:rPr sz="2000" b="1">
+                <a:solidFill>
+                  <a:srgbClr val="202122"/>
+                </a:solidFill>
+                <a:latin typeface="Calibri"/>
+              </a:rPr>
+              <a:t>2</a:t>
+            </a:r>
+          </a:p>
+        </p:txBody>
+      </p:sp>
+      <p:sp>
+        <p:nvSpPr>
+          <p:cNvPr id="12" name="TextBox 11"/>
+          <p:cNvSpPr txBox="1"/>
+          <p:nvPr/>
+        </p:nvSpPr>
+        <p:spPr>
+          <a:xfrm>
+            <a:off x="3356533" y="3406140"/>
+            <a:ext cx="2670733" cy="731520"/>
+          </a:xfrm>
+          <a:prstGeom prst="rect">
+            <a:avLst/>
+          </a:prstGeom>
+          <a:noFill/>
+        </p:spPr>
+        <p:txBody>
+          <a:bodyPr wrap="square" anchor="t" lIns="0" rIns="0" tIns="0" bIns="0"/>
+          <a:lstStyle/>
+          <a:p>
+            <a:pPr algn="ctr"/>
+            <a:r>
+              <a:rPr sz="1700" b="1" i="0">
+                <a:solidFill>
+                  <a:srgbClr val="03306E"/>
+                </a:solidFill>
+                <a:latin typeface="Calibri"/>
+              </a:rPr>
+              <a:t>Design</a:t>
+            </a:r>
+          </a:p>
+        </p:txBody>
+      </p:sp>
+      <p:sp>
+        <p:nvSpPr>
+          <p:cNvPr id="13" name="Rounded Rectangle 12"/>
+          <p:cNvSpPr/>
+          <p:nvPr/>
+        </p:nvSpPr>
+        <p:spPr>
+          <a:xfrm>
+            <a:off x="3356533" y="4183380"/>
+            <a:ext cx="2670733" cy="960120"/>
+          </a:xfrm>
+          <a:prstGeom prst="roundRect">
+            <a:avLst>
+              <a:gd name="adj" fmla="val 6000"/>
+            </a:avLst>
+          </a:prstGeom>
+          <a:solidFill>
+            <a:srgbClr val="EAF3FF"/>
+          </a:solidFill>
+          <a:ln>
+            <a:noFill/>
+          </a:ln>
+          <a:effectLst/>
+        </p:spPr>
+        <p:style>
+          <a:lnRef idx="1">
+            <a:schemeClr val="accent1"/>
+          </a:lnRef>
+          <a:fillRef idx="3">
+            <a:schemeClr val="accent1"/>
+          </a:fillRef>
+          <a:effectRef idx="2">
+            <a:schemeClr val="accent1"/>
+          </a:effectRef>
+          <a:fontRef idx="minor">
+            <a:schemeClr val="lt1"/>
+          </a:fontRef>
+        </p:style>
+        <p:txBody>
+          <a:bodyPr rtlCol="0" anchor="ctr"/>
+          <a:lstStyle/>
+          <a:p/>
+        </p:txBody>
+      </p:sp>
+      <p:sp>
+        <p:nvSpPr>
+          <p:cNvPr id="14" name="TextBox 13"/>
+          <p:cNvSpPr txBox="1"/>
+          <p:nvPr/>
+        </p:nvSpPr>
+        <p:spPr>
+          <a:xfrm>
+            <a:off x="3493693" y="4320540"/>
+            <a:ext cx="2396413" cy="685800"/>
+          </a:xfrm>
+          <a:prstGeom prst="rect">
+            <a:avLst/>
+          </a:prstGeom>
+          <a:noFill/>
+        </p:spPr>
+        <p:txBody>
+          <a:bodyPr wrap="square" anchor="t" lIns="0" rIns="0" tIns="0" bIns="0"/>
+          <a:lstStyle/>
+          <a:p>
+            <a:pPr algn="l"/>
+            <a:r>
+              <a:rPr sz="1800" b="0" i="0">
+                <a:solidFill>
+                  <a:srgbClr val="202122"/>
+                </a:solidFill>
+                <a:latin typeface="Calibri"/>
+              </a:rPr>
+              <a:t>Develop a solution.</a:t>
+            </a:r>
+          </a:p>
+        </p:txBody>
+      </p:sp>
+      <p:sp>
+        <p:nvSpPr>
+          <p:cNvPr id="15" name="Oval 14"/>
+          <p:cNvSpPr/>
+          <p:nvPr/>
+        </p:nvSpPr>
+        <p:spPr>
+          <a:xfrm>
+            <a:off x="7179754" y="2628900"/>
+            <a:ext cx="640080" cy="640080"/>
+          </a:xfrm>
+          <a:prstGeom prst="ellipse">
+            <a:avLst/>
+          </a:prstGeom>
+          <a:solidFill>
+            <a:srgbClr val="F2B705"/>
+          </a:solidFill>
+          <a:ln>
+            <a:noFill/>
+          </a:ln>
+          <a:effectLst/>
+        </p:spPr>
+        <p:style>
+          <a:lnRef idx="1">
+            <a:schemeClr val="accent1"/>
+          </a:lnRef>
+          <a:fillRef idx="3">
+            <a:schemeClr val="accent1"/>
+          </a:fillRef>
+          <a:effectRef idx="2">
+            <a:schemeClr val="accent1"/>
+          </a:effectRef>
+          <a:fontRef idx="minor">
+            <a:schemeClr val="lt1"/>
+          </a:fontRef>
+        </p:style>
+        <p:txBody>
+          <a:bodyPr rtlCol="0" anchor="ctr" lIns="0" rIns="0" tIns="0" bIns="0"/>
+          <a:lstStyle/>
+          <a:p>
+            <a:pPr algn="ctr"/>
+            <a:r>
+              <a:rPr sz="2000" b="1">
+                <a:solidFill>
+                  <a:srgbClr val="202122"/>
+                </a:solidFill>
+                <a:latin typeface="Calibri"/>
+              </a:rPr>
+              <a:t>3</a:t>
+            </a:r>
+          </a:p>
+        </p:txBody>
+      </p:sp>
+      <p:sp>
+        <p:nvSpPr>
+          <p:cNvPr id="16" name="TextBox 15"/>
+          <p:cNvSpPr txBox="1"/>
+          <p:nvPr/>
+        </p:nvSpPr>
+        <p:spPr>
+          <a:xfrm>
+            <a:off x="6164427" y="3406140"/>
+            <a:ext cx="2670733" cy="731520"/>
+          </a:xfrm>
+          <a:prstGeom prst="rect">
+            <a:avLst/>
+          </a:prstGeom>
+          <a:noFill/>
+        </p:spPr>
+        <p:txBody>
+          <a:bodyPr wrap="square" anchor="t" lIns="0" rIns="0" tIns="0" bIns="0"/>
+          <a:lstStyle/>
+          <a:p>
+            <a:pPr algn="ctr"/>
+            <a:r>
+              <a:rPr sz="1700" b="1" i="0">
+                <a:solidFill>
+                  <a:srgbClr val="03306E"/>
+                </a:solidFill>
+                <a:latin typeface="Calibri"/>
+              </a:rPr>
+              <a:t>Plan</a:t>
+            </a:r>
+          </a:p>
+        </p:txBody>
+      </p:sp>
+      <p:sp>
+        <p:nvSpPr>
+          <p:cNvPr id="17" name="Rounded Rectangle 16"/>
+          <p:cNvSpPr/>
+          <p:nvPr/>
+        </p:nvSpPr>
+        <p:spPr>
+          <a:xfrm>
+            <a:off x="6164427" y="4183380"/>
+            <a:ext cx="2670733" cy="960120"/>
+          </a:xfrm>
+          <a:prstGeom prst="roundRect">
+            <a:avLst>
+              <a:gd name="adj" fmla="val 6000"/>
+            </a:avLst>
+          </a:prstGeom>
+          <a:solidFill>
+            <a:srgbClr val="EAF3FF"/>
+          </a:solidFill>
+          <a:ln>
+            <a:noFill/>
+          </a:ln>
+          <a:effectLst/>
+        </p:spPr>
+        <p:style>
+          <a:lnRef idx="1">
+            <a:schemeClr val="accent1"/>
+          </a:lnRef>
+          <a:fillRef idx="3">
+            <a:schemeClr val="accent1"/>
+          </a:fillRef>
+          <a:effectRef idx="2">
+            <a:schemeClr val="accent1"/>
+          </a:effectRef>
+          <a:fontRef idx="minor">
+            <a:schemeClr val="lt1"/>
+          </a:fontRef>
+        </p:style>
+        <p:txBody>
+          <a:bodyPr rtlCol="0" anchor="ctr"/>
+          <a:lstStyle/>
+          <a:p/>
+        </p:txBody>
+      </p:sp>
+      <p:sp>
+        <p:nvSpPr>
+          <p:cNvPr id="18" name="TextBox 17"/>
+          <p:cNvSpPr txBox="1"/>
+          <p:nvPr/>
+        </p:nvSpPr>
+        <p:spPr>
+          <a:xfrm>
+            <a:off x="6301587" y="4320540"/>
+            <a:ext cx="2396413" cy="685800"/>
+          </a:xfrm>
+          <a:prstGeom prst="rect">
+            <a:avLst/>
+          </a:prstGeom>
+          <a:noFill/>
+        </p:spPr>
+        <p:txBody>
+          <a:bodyPr wrap="square" anchor="t" lIns="0" rIns="0" tIns="0" bIns="0"/>
+          <a:lstStyle/>
+          <a:p>
+            <a:pPr algn="l"/>
+            <a:r>
+              <a:rPr sz="1800" b="0" i="0">
+                <a:solidFill>
+                  <a:srgbClr val="202122"/>
+                </a:solidFill>
+                <a:latin typeface="Calibri"/>
+              </a:rPr>
+              <a:t>Plan how it would be made.</a:t>
+            </a:r>
+          </a:p>
+        </p:txBody>
+      </p:sp>
+      <p:sp>
+        <p:nvSpPr>
+          <p:cNvPr id="19" name="Oval 18"/>
+          <p:cNvSpPr/>
+          <p:nvPr/>
+        </p:nvSpPr>
+        <p:spPr>
+          <a:xfrm>
+            <a:off x="9987648" y="2628900"/>
+            <a:ext cx="640080" cy="640080"/>
+          </a:xfrm>
+          <a:prstGeom prst="ellipse">
+            <a:avLst/>
+          </a:prstGeom>
+          <a:solidFill>
+            <a:srgbClr val="F2B705"/>
+          </a:solidFill>
+          <a:ln>
+            <a:noFill/>
+          </a:ln>
+          <a:effectLst/>
+        </p:spPr>
+        <p:style>
+          <a:lnRef idx="1">
+            <a:schemeClr val="accent1"/>
+          </a:lnRef>
+          <a:fillRef idx="3">
+            <a:schemeClr val="accent1"/>
+          </a:fillRef>
+          <a:effectRef idx="2">
+            <a:schemeClr val="accent1"/>
+          </a:effectRef>
+          <a:fontRef idx="minor">
+            <a:schemeClr val="lt1"/>
+          </a:fontRef>
+        </p:style>
+        <p:txBody>
+          <a:bodyPr rtlCol="0" anchor="ctr" lIns="0" rIns="0" tIns="0" bIns="0"/>
+          <a:lstStyle/>
+          <a:p>
+            <a:pPr algn="ctr"/>
+            <a:r>
+              <a:rPr sz="2000" b="1">
+                <a:solidFill>
+                  <a:srgbClr val="202122"/>
+                </a:solidFill>
+                <a:latin typeface="Calibri"/>
+              </a:rPr>
+              <a:t>4</a:t>
+            </a:r>
+          </a:p>
+        </p:txBody>
+      </p:sp>
+      <p:sp>
+        <p:nvSpPr>
+          <p:cNvPr id="20" name="TextBox 19"/>
+          <p:cNvSpPr txBox="1"/>
+          <p:nvPr/>
+        </p:nvSpPr>
+        <p:spPr>
+          <a:xfrm>
+            <a:off x="8972321" y="3406140"/>
+            <a:ext cx="2670733" cy="731520"/>
+          </a:xfrm>
+          <a:prstGeom prst="rect">
+            <a:avLst/>
+          </a:prstGeom>
+          <a:noFill/>
+        </p:spPr>
+        <p:txBody>
+          <a:bodyPr wrap="square" anchor="t" lIns="0" rIns="0" tIns="0" bIns="0"/>
+          <a:lstStyle/>
+          <a:p>
+            <a:pPr algn="ctr"/>
+            <a:r>
+              <a:rPr sz="1700" b="1" i="0">
+                <a:solidFill>
+                  <a:srgbClr val="03306E"/>
+                </a:solidFill>
+                <a:latin typeface="Calibri"/>
+              </a:rPr>
+              <a:t>Present</a:t>
+            </a:r>
+          </a:p>
+        </p:txBody>
+      </p:sp>
+      <p:sp>
+        <p:nvSpPr>
+          <p:cNvPr id="21" name="Rounded Rectangle 20"/>
+          <p:cNvSpPr/>
+          <p:nvPr/>
+        </p:nvSpPr>
+        <p:spPr>
+          <a:xfrm>
+            <a:off x="8972321" y="4183380"/>
+            <a:ext cx="2670733" cy="960120"/>
+          </a:xfrm>
+          <a:prstGeom prst="roundRect">
+            <a:avLst>
+              <a:gd name="adj" fmla="val 6000"/>
+            </a:avLst>
+          </a:prstGeom>
+          <a:solidFill>
+            <a:srgbClr val="EAF3FF"/>
+          </a:solidFill>
+          <a:ln>
+            <a:noFill/>
+          </a:ln>
+          <a:effectLst/>
+        </p:spPr>
+        <p:style>
+          <a:lnRef idx="1">
+            <a:schemeClr val="accent1"/>
+          </a:lnRef>
+          <a:fillRef idx="3">
+            <a:schemeClr val="accent1"/>
+          </a:fillRef>
+          <a:effectRef idx="2">
+            <a:schemeClr val="accent1"/>
+          </a:effectRef>
+          <a:fontRef idx="minor">
+            <a:schemeClr val="lt1"/>
+          </a:fontRef>
+        </p:style>
+        <p:txBody>
+          <a:bodyPr rtlCol="0" anchor="ctr"/>
+          <a:lstStyle/>
+          <a:p/>
+        </p:txBody>
+      </p:sp>
+      <p:sp>
+        <p:nvSpPr>
+          <p:cNvPr id="22" name="TextBox 21"/>
+          <p:cNvSpPr txBox="1"/>
+          <p:nvPr/>
+        </p:nvSpPr>
+        <p:spPr>
+          <a:xfrm>
+            <a:off x="9109481" y="4320540"/>
+            <a:ext cx="2396413" cy="685800"/>
+          </a:xfrm>
+          <a:prstGeom prst="rect">
+            <a:avLst/>
+          </a:prstGeom>
+          <a:noFill/>
+        </p:spPr>
+        <p:txBody>
+          <a:bodyPr wrap="square" anchor="t" lIns="0" rIns="0" tIns="0" bIns="0"/>
+          <a:lstStyle/>
+          <a:p>
+            <a:pPr algn="l"/>
+            <a:r>
+              <a:rPr sz="1800" b="0" i="0">
+                <a:solidFill>
+                  <a:srgbClr val="202122"/>
+                </a:solidFill>
+                <a:latin typeface="Calibri"/>
+              </a:rPr>
+              <a:t>Present your outcome.</a:t>
+            </a:r>
+          </a:p>
+        </p:txBody>
+      </p:sp>
+    </p:spTree>
+  </p:cSld>
+  <p:clrMapOvr>
+    <a:masterClrMapping/>
+  </p:clrMapOvr>
+</p:sld>
+</file>
+
+<file path=ppt/slides/slide7.xml><?xml version="1.0" encoding="utf-8"?>
+<p:sld xmlns:a="http://schemas.openxmlformats.org/drawingml/2006/main" xmlns:p="http://schemas.openxmlformats.org/presentationml/2006/main" xmlns:r="http://schemas.openxmlformats.org/officeDocument/2006/relationships">
+  <p:cSld>
+    <p:bg>
+      <p:bgPr>
+        <a:solidFill>
+          <a:srgbClr val="FFFFFF"/>
+        </a:solidFill>
+        <a:effectLst/>
+      </p:bgPr>
+    </p:bg>
+    <p:spTree>
+      <p:nvGrpSpPr>
+        <p:cNvPr id="1" name=""/>
+        <p:cNvGrpSpPr/>
+        <p:nvPr/>
+      </p:nvGrpSpPr>
+      <p:grpSpPr/>
+      <p:sp>
+        <p:nvSpPr>
+          <p:cNvPr id="2" name="TextBox 1"/>
+          <p:cNvSpPr txBox="1"/>
+          <p:nvPr/>
+        </p:nvSpPr>
+        <p:spPr>
+          <a:xfrm>
+            <a:off x="548640" y="320040"/>
+            <a:ext cx="11094415" cy="274320"/>
+          </a:xfrm>
+          <a:prstGeom prst="rect">
+            <a:avLst/>
+          </a:prstGeom>
+          <a:noFill/>
+        </p:spPr>
+        <p:txBody>
+          <a:bodyPr wrap="square" anchor="t" lIns="0" rIns="0" tIns="0" bIns="0"/>
+          <a:lstStyle/>
+          <a:p>
+            <a:pPr algn="l"/>
+            <a:r>
+              <a:rPr sz="1100" b="1" i="0">
+                <a:solidFill>
+                  <a:srgbClr val="54595D"/>
+                </a:solidFill>
+                <a:latin typeface="Calibri"/>
+              </a:rPr>
+              <a:t>ENGINEERING CORE  ·  Core Component</a:t>
+            </a:r>
+          </a:p>
+        </p:txBody>
+      </p:sp>
+      <p:sp>
+        <p:nvSpPr>
+          <p:cNvPr id="3" name="TextBox 2"/>
+          <p:cNvSpPr txBox="1"/>
+          <p:nvPr/>
+        </p:nvSpPr>
+        <p:spPr>
+          <a:xfrm>
+            <a:off x="548640" y="566928"/>
+            <a:ext cx="11094415" cy="822960"/>
+          </a:xfrm>
+          <a:prstGeom prst="rect">
+            <a:avLst/>
+          </a:prstGeom>
+          <a:noFill/>
+        </p:spPr>
+        <p:txBody>
+          <a:bodyPr wrap="square" anchor="ctr" lIns="0" rIns="0" tIns="0" bIns="0"/>
+          <a:lstStyle/>
+          <a:p>
+            <a:pPr algn="l"/>
+            <a:r>
+              <a:rPr sz="3200" b="1" i="0">
+                <a:solidFill>
+                  <a:srgbClr val="03306E"/>
+                </a:solidFill>
+                <a:latin typeface="Cambria"/>
+              </a:rPr>
+              <a:t>Assessment objectives</a:t>
+            </a:r>
+          </a:p>
+        </p:txBody>
+      </p:sp>
+      <p:sp>
+        <p:nvSpPr>
+          <p:cNvPr id="4" name="TextBox 3"/>
+          <p:cNvSpPr txBox="1"/>
+          <p:nvPr/>
+        </p:nvSpPr>
+        <p:spPr>
+          <a:xfrm>
+            <a:off x="548640" y="6446520"/>
+            <a:ext cx="8229600" cy="274320"/>
+          </a:xfrm>
+          <a:prstGeom prst="rect">
+            <a:avLst/>
+          </a:prstGeom>
+          <a:noFill/>
+        </p:spPr>
+        <p:txBody>
+          <a:bodyPr wrap="square" anchor="t" lIns="0" rIns="0" tIns="0" bIns="0"/>
+          <a:lstStyle/>
+          <a:p>
+            <a:pPr algn="l"/>
+            <a:r>
+              <a:rPr sz="1000" b="0" i="0">
+                <a:solidFill>
+                  <a:srgbClr val="54595D"/>
+                </a:solidFill>
+                <a:latin typeface="Calibri"/>
+              </a:rPr>
+              <a:t>Design and Development for Engineering and Manufacturing T Level  ·  The Employer-set Project</a:t>
+            </a:r>
+          </a:p>
+        </p:txBody>
+      </p:sp>
+      <p:sp>
+        <p:nvSpPr>
+          <p:cNvPr id="5" name="TextBox 4"/>
+          <p:cNvSpPr txBox="1"/>
+          <p:nvPr/>
+        </p:nvSpPr>
+        <p:spPr>
+          <a:xfrm>
+            <a:off x="10728655" y="6446520"/>
+            <a:ext cx="914400" cy="274320"/>
+          </a:xfrm>
+          <a:prstGeom prst="rect">
+            <a:avLst/>
+          </a:prstGeom>
+          <a:noFill/>
+        </p:spPr>
+        <p:txBody>
+          <a:bodyPr wrap="square" anchor="t" lIns="0" rIns="0" tIns="0" bIns="0"/>
+          <a:lstStyle/>
+          <a:p>
+            <a:pPr algn="r"/>
+            <a:r>
+              <a:rPr sz="1000" b="0" i="0">
+                <a:solidFill>
+                  <a:srgbClr val="54595D"/>
+                </a:solidFill>
+                <a:latin typeface="Calibri"/>
+              </a:rPr>
+              <a:t>7</a:t>
+            </a:r>
+          </a:p>
+        </p:txBody>
+      </p:sp>
+      <p:sp>
+        <p:nvSpPr>
+          <p:cNvPr id="6" name="TextBox 5"/>
+          <p:cNvSpPr txBox="1"/>
+          <p:nvPr/>
+        </p:nvSpPr>
+        <p:spPr>
+          <a:xfrm>
+            <a:off x="548640" y="1554480"/>
+            <a:ext cx="6720840" cy="4617720"/>
+          </a:xfrm>
+          <a:prstGeom prst="rect">
+            <a:avLst/>
+          </a:prstGeom>
+          <a:noFill/>
+        </p:spPr>
+        <p:txBody>
+          <a:bodyPr wrap="square" lIns="0" rIns="0" tIns="0" bIns="0">
+            <a:spAutoFit/>
+          </a:bodyPr>
+          <a:lstStyle/>
+          <a:p>
+            <a:pPr>
+              <a:spcAft>
+                <a:spcPts val="1260"/>
+              </a:spcAft>
+            </a:pPr>
+            <a:r>
+              <a:rPr sz="2100" b="0">
+                <a:solidFill>
+                  <a:srgbClr val="202122"/>
+                </a:solidFill>
+                <a:latin typeface="Calibri"/>
+              </a:rPr>
+              <a:t>The ESP is marked against five assessment objectives.</a:t>
+            </a:r>
+          </a:p>
+          <a:p>
+            <a:pPr>
+              <a:spcAft>
+                <a:spcPts val="1260"/>
+              </a:spcAft>
+            </a:pPr>
+            <a:r>
+              <a:rPr sz="2100" b="1">
+                <a:solidFill>
+                  <a:srgbClr val="202122"/>
+                </a:solidFill>
+                <a:latin typeface="Calibri"/>
+              </a:rPr>
+              <a:t>AO1 (13%):</a:t>
+            </a:r>
+            <a:r>
+              <a:rPr sz="2100" b="0">
+                <a:solidFill>
+                  <a:srgbClr val="202122"/>
+                </a:solidFill>
+                <a:latin typeface="Calibri"/>
+              </a:rPr>
+              <a:t> plan your approach, showing it is planned, sequenced, prioritised and iterative. AO2 (50%): apply core knowledge and skills to the brief. AO3 (13%): select and use relevant techniques and resources accurately. AO4 (10%): use maths, English and digital skills correctly, with the right terms, units and calculations. AO5 (13%): realise the outcome and review how well it meets the brief, including why other options were rejected.</a:t>
+            </a:r>
+          </a:p>
+          <a:p>
+            <a:pPr>
+              <a:spcAft>
+                <a:spcPts val="1260"/>
+              </a:spcAft>
+            </a:pPr>
+            <a:r>
+              <a:rPr sz="2100" b="0">
+                <a:solidFill>
+                  <a:srgbClr val="202122"/>
+                </a:solidFill>
+                <a:latin typeface="Calibri"/>
+              </a:rPr>
+              <a:t>Half the marks come from AO2, so link your knowledge explicitly to the brief.</a:t>
+            </a:r>
+          </a:p>
+        </p:txBody>
+      </p:sp>
+      <p:sp>
+        <p:nvSpPr>
+          <p:cNvPr id="7" name="Rounded Rectangle 6"/>
+          <p:cNvSpPr/>
+          <p:nvPr/>
+        </p:nvSpPr>
+        <p:spPr>
+          <a:xfrm>
+            <a:off x="7772400" y="1554480"/>
+            <a:ext cx="3867912" cy="4526280"/>
+          </a:xfrm>
+          <a:prstGeom prst="roundRect">
+            <a:avLst>
+              <a:gd name="adj" fmla="val 8000"/>
+            </a:avLst>
+          </a:prstGeom>
+          <a:solidFill>
+            <a:srgbClr val="03306E"/>
+          </a:solidFill>
+          <a:ln>
+            <a:noFill/>
+          </a:ln>
+          <a:effectLst/>
+        </p:spPr>
+        <p:style>
+          <a:lnRef idx="1">
+            <a:schemeClr val="accent1"/>
+          </a:lnRef>
+          <a:fillRef idx="3">
+            <a:schemeClr val="accent1"/>
+          </a:fillRef>
+          <a:effectRef idx="2">
+            <a:schemeClr val="accent1"/>
+          </a:effectRef>
+          <a:fontRef idx="minor">
+            <a:schemeClr val="lt1"/>
+          </a:fontRef>
+        </p:style>
+        <p:txBody>
+          <a:bodyPr rtlCol="0" anchor="ctr"/>
+          <a:lstStyle/>
+          <a:p/>
+        </p:txBody>
+      </p:sp>
+      <p:sp>
+        <p:nvSpPr>
+          <p:cNvPr id="8" name="Oval 7"/>
+          <p:cNvSpPr/>
+          <p:nvPr/>
+        </p:nvSpPr>
+        <p:spPr>
+          <a:xfrm>
+            <a:off x="8046720" y="1828800"/>
+            <a:ext cx="548640" cy="548640"/>
+          </a:xfrm>
+          <a:prstGeom prst="ellipse">
+            <a:avLst/>
+          </a:prstGeom>
+          <a:solidFill>
+            <a:srgbClr val="F2B705"/>
+          </a:solidFill>
+          <a:ln>
+            <a:noFill/>
+          </a:ln>
+          <a:effectLst/>
+        </p:spPr>
+        <p:style>
+          <a:lnRef idx="1">
+            <a:schemeClr val="accent1"/>
+          </a:lnRef>
+          <a:fillRef idx="3">
+            <a:schemeClr val="accent1"/>
+          </a:fillRef>
+          <a:effectRef idx="2">
+            <a:schemeClr val="accent1"/>
+          </a:effectRef>
+          <a:fontRef idx="minor">
+            <a:schemeClr val="lt1"/>
+          </a:fontRef>
+        </p:style>
+        <p:txBody>
+          <a:bodyPr rtlCol="0" anchor="ctr" lIns="0" rIns="0" tIns="0" bIns="0"/>
+          <a:lstStyle/>
+          <a:p>
+            <a:pPr algn="ctr"/>
+            <a:r>
+              <a:rPr sz="1300" b="1">
+                <a:solidFill>
+                  <a:srgbClr val="202122"/>
+                </a:solidFill>
+                <a:latin typeface="Calibri"/>
+              </a:rPr>
+              <a:t>e.g.</a:t>
+            </a:r>
+          </a:p>
+        </p:txBody>
+      </p:sp>
+      <p:sp>
+        <p:nvSpPr>
+          <p:cNvPr id="9" name="TextBox 8"/>
+          <p:cNvSpPr txBox="1"/>
+          <p:nvPr/>
+        </p:nvSpPr>
+        <p:spPr>
+          <a:xfrm>
+            <a:off x="8046720" y="2560320"/>
+            <a:ext cx="3291840" cy="365760"/>
+          </a:xfrm>
+          <a:prstGeom prst="rect">
+            <a:avLst/>
+          </a:prstGeom>
+          <a:noFill/>
+        </p:spPr>
+        <p:txBody>
+          <a:bodyPr wrap="square" anchor="t" lIns="0" rIns="0" tIns="0" bIns="0"/>
+          <a:lstStyle/>
+          <a:p>
+            <a:pPr algn="l"/>
+            <a:r>
+              <a:rPr sz="1300" b="1" i="0">
+                <a:solidFill>
+                  <a:srgbClr val="A9C8F0"/>
+                </a:solidFill>
+                <a:latin typeface="Calibri"/>
+              </a:rPr>
+              <a:t>EXAMPLE</a:t>
+            </a:r>
+          </a:p>
+        </p:txBody>
+      </p:sp>
+      <p:sp>
+        <p:nvSpPr>
+          <p:cNvPr id="10" name="TextBox 9"/>
+          <p:cNvSpPr txBox="1"/>
+          <p:nvPr/>
+        </p:nvSpPr>
+        <p:spPr>
+          <a:xfrm>
+            <a:off x="8046720" y="2971800"/>
+            <a:ext cx="3291840" cy="2971800"/>
+          </a:xfrm>
+          <a:prstGeom prst="rect">
+            <a:avLst/>
+          </a:prstGeom>
+          <a:noFill/>
+        </p:spPr>
+        <p:txBody>
+          <a:bodyPr wrap="square" anchor="t" lIns="0" rIns="0" tIns="0" bIns="0"/>
+          <a:lstStyle/>
+          <a:p>
+            <a:pPr algn="l"/>
+            <a:r>
+              <a:rPr sz="1900" b="0" i="0">
+                <a:solidFill>
+                  <a:srgbClr val="FFFFFF"/>
+                </a:solidFill>
+                <a:latin typeface="Cambria"/>
+              </a:rPr>
+              <a:t>Instead of 'I chose aluminium', write 'I chose aluminium because its density (2,700 kg per cubic metre) keeps weight low and it resists corrosion in damp conditions'.</a:t>
+            </a:r>
+          </a:p>
+        </p:txBody>
+      </p:sp>
+    </p:spTree>
+  </p:cSld>
+  <p:clrMapOvr>
+    <a:masterClrMapping/>
+  </p:clrMapOvr>
+</p:sld>
+</file>
+
+<file path=ppt/slides/slide8.xml><?xml version="1.0" encoding="utf-8"?>
+<p:sld xmlns:a="http://schemas.openxmlformats.org/drawingml/2006/main" xmlns:p="http://schemas.openxmlformats.org/presentationml/2006/main" xmlns:r="http://schemas.openxmlformats.org/officeDocument/2006/relationships">
+  <p:cSld>
+    <p:bg>
+      <p:bgPr>
+        <a:solidFill>
+          <a:srgbClr val="FFFFFF"/>
+        </a:solidFill>
+        <a:effectLst/>
+      </p:bgPr>
+    </p:bg>
+    <p:spTree>
+      <p:nvGrpSpPr>
+        <p:cNvPr id="1" name=""/>
+        <p:cNvGrpSpPr/>
+        <p:nvPr/>
+      </p:nvGrpSpPr>
+      <p:grpSpPr/>
+      <p:sp>
+        <p:nvSpPr>
+          <p:cNvPr id="2" name="TextBox 1"/>
+          <p:cNvSpPr txBox="1"/>
+          <p:nvPr/>
+        </p:nvSpPr>
+        <p:spPr>
+          <a:xfrm>
+            <a:off x="548640" y="320040"/>
+            <a:ext cx="11094415" cy="274320"/>
+          </a:xfrm>
+          <a:prstGeom prst="rect">
+            <a:avLst/>
+          </a:prstGeom>
+          <a:noFill/>
+        </p:spPr>
+        <p:txBody>
+          <a:bodyPr wrap="square" anchor="t" lIns="0" rIns="0" tIns="0" bIns="0"/>
+          <a:lstStyle/>
+          <a:p>
+            <a:pPr algn="l"/>
+            <a:r>
+              <a:rPr sz="1100" b="1" i="0">
+                <a:solidFill>
+                  <a:srgbClr val="54595D"/>
+                </a:solidFill>
+                <a:latin typeface="Calibri"/>
+              </a:rPr>
+              <a:t>ENGINEERING CORE  ·  Core Component</a:t>
+            </a:r>
+          </a:p>
+        </p:txBody>
+      </p:sp>
+      <p:sp>
+        <p:nvSpPr>
+          <p:cNvPr id="3" name="TextBox 2"/>
+          <p:cNvSpPr txBox="1"/>
+          <p:nvPr/>
+        </p:nvSpPr>
+        <p:spPr>
+          <a:xfrm>
+            <a:off x="548640" y="566928"/>
+            <a:ext cx="11094415" cy="822960"/>
+          </a:xfrm>
+          <a:prstGeom prst="rect">
+            <a:avLst/>
+          </a:prstGeom>
+          <a:noFill/>
+        </p:spPr>
+        <p:txBody>
+          <a:bodyPr wrap="square" anchor="ctr" lIns="0" rIns="0" tIns="0" bIns="0"/>
+          <a:lstStyle/>
+          <a:p>
+            <a:pPr algn="l"/>
+            <a:r>
+              <a:rPr sz="3200" b="1" i="0">
+                <a:solidFill>
+                  <a:srgbClr val="03306E"/>
+                </a:solidFill>
+                <a:latin typeface="Cambria"/>
+              </a:rPr>
+              <a:t>Assessment objectives</a:t>
+            </a:r>
+          </a:p>
+        </p:txBody>
+      </p:sp>
+      <p:sp>
+        <p:nvSpPr>
+          <p:cNvPr id="4" name="TextBox 3"/>
+          <p:cNvSpPr txBox="1"/>
+          <p:nvPr/>
+        </p:nvSpPr>
+        <p:spPr>
+          <a:xfrm>
+            <a:off x="548640" y="6446520"/>
+            <a:ext cx="8229600" cy="274320"/>
+          </a:xfrm>
+          <a:prstGeom prst="rect">
+            <a:avLst/>
+          </a:prstGeom>
+          <a:noFill/>
+        </p:spPr>
+        <p:txBody>
+          <a:bodyPr wrap="square" anchor="t" lIns="0" rIns="0" tIns="0" bIns="0"/>
+          <a:lstStyle/>
+          <a:p>
+            <a:pPr algn="l"/>
+            <a:r>
+              <a:rPr sz="1000" b="0" i="0">
+                <a:solidFill>
+                  <a:srgbClr val="54595D"/>
+                </a:solidFill>
+                <a:latin typeface="Calibri"/>
+              </a:rPr>
+              <a:t>Design and Development for Engineering and Manufacturing T Level  ·  The Employer-set Project</a:t>
+            </a:r>
+          </a:p>
+        </p:txBody>
+      </p:sp>
+      <p:sp>
+        <p:nvSpPr>
+          <p:cNvPr id="5" name="TextBox 4"/>
+          <p:cNvSpPr txBox="1"/>
+          <p:nvPr/>
+        </p:nvSpPr>
+        <p:spPr>
+          <a:xfrm>
+            <a:off x="10728655" y="6446520"/>
+            <a:ext cx="914400" cy="274320"/>
+          </a:xfrm>
+          <a:prstGeom prst="rect">
+            <a:avLst/>
+          </a:prstGeom>
+          <a:noFill/>
+        </p:spPr>
+        <p:txBody>
+          <a:bodyPr wrap="square" anchor="t" lIns="0" rIns="0" tIns="0" bIns="0"/>
+          <a:lstStyle/>
+          <a:p>
+            <a:pPr algn="r"/>
+            <a:r>
+              <a:rPr sz="1000" b="0" i="0">
+                <a:solidFill>
+                  <a:srgbClr val="54595D"/>
+                </a:solidFill>
+                <a:latin typeface="Calibri"/>
+              </a:rPr>
+              <a:t>8</a:t>
             </a:r>
           </a:p>
         </p:txBody>
@@ -6470,7 +10235,7 @@
 </p:sld>
 </file>
 
-<file path=ppt/slides/slide6.xml><?xml version="1.0" encoding="utf-8"?>
+<file path=ppt/slides/slide9.xml><?xml version="1.0" encoding="utf-8"?>
 <p:sld xmlns:a="http://schemas.openxmlformats.org/drawingml/2006/main" xmlns:p="http://schemas.openxmlformats.org/presentationml/2006/main" xmlns:r="http://schemas.openxmlformats.org/officeDocument/2006/relationships">
   <p:cSld>
     <p:bg>
@@ -6549,7 +10314,7 @@
                 </a:solidFill>
                 <a:latin typeface="Cambria"/>
               </a:rPr>
-              <a:t>Check your understanding</a:t>
+              <a:t>Quick check: Assessment objectives</a:t>
             </a:r>
           </a:p>
         </p:txBody>
@@ -6615,7 +10380,7 @@
                 </a:solidFill>
                 <a:latin typeface="Calibri"/>
               </a:rPr>
-              <a:t>6</a:t>
+              <a:t>9</a:t>
             </a:r>
           </a:p>
         </p:txBody>
@@ -6628,8 +10393,8 @@
         </p:nvSpPr>
         <p:spPr>
           <a:xfrm>
-            <a:off x="548640" y="1618488"/>
-            <a:ext cx="411480" cy="411480"/>
+            <a:off x="548640" y="1691640"/>
+            <a:ext cx="502920" cy="502920"/>
           </a:xfrm>
           <a:prstGeom prst="ellipse">
             <a:avLst/>
@@ -6662,7 +10427,7 @@
           <a:p>
             <a:pPr algn="ctr"/>
             <a:r>
-              <a:rPr sz="1400" b="1">
+              <a:rPr sz="1600" b="1">
                 <a:solidFill>
                   <a:srgbClr val="202122"/>
                 </a:solidFill>
@@ -6681,8 +10446,8 @@
         </p:nvSpPr>
         <p:spPr>
           <a:xfrm>
-            <a:off x="1234440" y="1600200"/>
-            <a:ext cx="10408615" cy="1030986"/>
+            <a:off x="1371600" y="1645920"/>
+            <a:ext cx="10271455" cy="1188720"/>
           </a:xfrm>
           <a:prstGeom prst="rect">
             <a:avLst/>
@@ -6695,13 +10460,13 @@
           <a:p>
             <a:pPr algn="l"/>
             <a:r>
-              <a:rPr sz="2200" b="0" i="0">
+              <a:rPr sz="2400" b="0" i="0">
                 <a:solidFill>
                   <a:srgbClr val="202122"/>
                 </a:solidFill>
                 <a:latin typeface="Calibri"/>
               </a:rPr>
-              <a:t>What percentage of the core is the ESP?</a:t>
+              <a:t>Which AO carries half the marks?</a:t>
             </a:r>
           </a:p>
         </p:txBody>
@@ -6714,8 +10479,8 @@
         </p:nvSpPr>
         <p:spPr>
           <a:xfrm>
-            <a:off x="548640" y="2814066"/>
-            <a:ext cx="411480" cy="411480"/>
+            <a:off x="548640" y="3108960"/>
+            <a:ext cx="502920" cy="502920"/>
           </a:xfrm>
           <a:prstGeom prst="ellipse">
             <a:avLst/>
@@ -6748,7 +10513,7 @@
           <a:p>
             <a:pPr algn="ctr"/>
             <a:r>
-              <a:rPr sz="1400" b="1">
+              <a:rPr sz="1600" b="1">
                 <a:solidFill>
                   <a:srgbClr val="202122"/>
                 </a:solidFill>
@@ -6767,8 +10532,8 @@
         </p:nvSpPr>
         <p:spPr>
           <a:xfrm>
-            <a:off x="1234440" y="2795778"/>
-            <a:ext cx="10408615" cy="1030986"/>
+            <a:off x="1371600" y="3063240"/>
+            <a:ext cx="10271455" cy="1188720"/>
           </a:xfrm>
           <a:prstGeom prst="rect">
             <a:avLst/>
@@ -6781,13 +10546,13 @@
           <a:p>
             <a:pPr algn="l"/>
             <a:r>
-              <a:rPr sz="2200" b="0" i="0">
+              <a:rPr sz="2400" b="0" i="0">
                 <a:solidFill>
                   <a:srgbClr val="202122"/>
                 </a:solidFill>
                 <a:latin typeface="Calibri"/>
               </a:rPr>
-              <a:t>Which AO carries the most marks?</a:t>
+              <a:t>What does AO4 assess?</a:t>
             </a:r>
           </a:p>
         </p:txBody>
@@ -6800,8 +10565,8 @@
         </p:nvSpPr>
         <p:spPr>
           <a:xfrm>
-            <a:off x="548640" y="4009644"/>
-            <a:ext cx="411480" cy="411480"/>
+            <a:off x="548640" y="4526280"/>
+            <a:ext cx="502920" cy="502920"/>
           </a:xfrm>
           <a:prstGeom prst="ellipse">
             <a:avLst/>
@@ -6834,7 +10599,7 @@
           <a:p>
             <a:pPr algn="ctr"/>
             <a:r>
-              <a:rPr sz="1400" b="1">
+              <a:rPr sz="1600" b="1">
                 <a:solidFill>
                   <a:srgbClr val="202122"/>
                 </a:solidFill>
@@ -6853,8 +10618,8 @@
         </p:nvSpPr>
         <p:spPr>
           <a:xfrm>
-            <a:off x="1234440" y="3991356"/>
-            <a:ext cx="10408615" cy="1030986"/>
+            <a:off x="1371600" y="4480560"/>
+            <a:ext cx="10271455" cy="1188720"/>
           </a:xfrm>
           <a:prstGeom prst="rect">
             <a:avLst/>
@@ -6867,1052 +10632,13 @@
           <a:p>
             <a:pPr algn="l"/>
             <a:r>
-              <a:rPr sz="2200" b="0" i="0">
+              <a:rPr sz="2400" b="0" i="0">
                 <a:solidFill>
                   <a:srgbClr val="202122"/>
                 </a:solidFill>
                 <a:latin typeface="Calibri"/>
               </a:rPr>
-              <a:t>Name the four task areas.</a:t>
-            </a:r>
-          </a:p>
-        </p:txBody>
-      </p:sp>
-      <p:sp>
-        <p:nvSpPr>
-          <p:cNvPr id="12" name="Oval 11"/>
-          <p:cNvSpPr/>
-          <p:nvPr/>
-        </p:nvSpPr>
-        <p:spPr>
-          <a:xfrm>
-            <a:off x="548640" y="5205221"/>
-            <a:ext cx="411480" cy="411480"/>
-          </a:xfrm>
-          <a:prstGeom prst="ellipse">
-            <a:avLst/>
-          </a:prstGeom>
-          <a:solidFill>
-            <a:srgbClr val="F2B705"/>
-          </a:solidFill>
-          <a:ln>
-            <a:noFill/>
-          </a:ln>
-          <a:effectLst/>
-        </p:spPr>
-        <p:style>
-          <a:lnRef idx="1">
-            <a:schemeClr val="accent1"/>
-          </a:lnRef>
-          <a:fillRef idx="3">
-            <a:schemeClr val="accent1"/>
-          </a:fillRef>
-          <a:effectRef idx="2">
-            <a:schemeClr val="accent1"/>
-          </a:effectRef>
-          <a:fontRef idx="minor">
-            <a:schemeClr val="lt1"/>
-          </a:fontRef>
-        </p:style>
-        <p:txBody>
-          <a:bodyPr rtlCol="0" anchor="ctr" lIns="0" rIns="0" tIns="0" bIns="0"/>
-          <a:lstStyle/>
-          <a:p>
-            <a:pPr algn="ctr"/>
-            <a:r>
-              <a:rPr sz="1400" b="1">
-                <a:solidFill>
-                  <a:srgbClr val="202122"/>
-                </a:solidFill>
-                <a:latin typeface="Calibri"/>
-              </a:rPr>
-              <a:t>4</a:t>
-            </a:r>
-          </a:p>
-        </p:txBody>
-      </p:sp>
-      <p:sp>
-        <p:nvSpPr>
-          <p:cNvPr id="13" name="TextBox 12"/>
-          <p:cNvSpPr txBox="1"/>
-          <p:nvPr/>
-        </p:nvSpPr>
-        <p:spPr>
-          <a:xfrm>
-            <a:off x="1234440" y="5186933"/>
-            <a:ext cx="10408615" cy="1030986"/>
-          </a:xfrm>
-          <a:prstGeom prst="rect">
-            <a:avLst/>
-          </a:prstGeom>
-          <a:noFill/>
-        </p:spPr>
-        <p:txBody>
-          <a:bodyPr wrap="square" anchor="t" lIns="0" rIns="0" tIns="0" bIns="0"/>
-          <a:lstStyle/>
-          <a:p>
-            <a:pPr algn="l"/>
-            <a:r>
-              <a:rPr sz="2200" b="0" i="0">
-                <a:solidFill>
-                  <a:srgbClr val="202122"/>
-                </a:solidFill>
-                <a:latin typeface="Calibri"/>
-              </a:rPr>
-              <a:t>What does AO5 ask for?</a:t>
-            </a:r>
-          </a:p>
-        </p:txBody>
-      </p:sp>
-    </p:spTree>
-  </p:cSld>
-  <p:clrMapOvr>
-    <a:masterClrMapping/>
-  </p:clrMapOvr>
-</p:sld>
-</file>
-
-<file path=ppt/slides/slide7.xml><?xml version="1.0" encoding="utf-8"?>
-<p:sld xmlns:a="http://schemas.openxmlformats.org/drawingml/2006/main" xmlns:p="http://schemas.openxmlformats.org/presentationml/2006/main" xmlns:r="http://schemas.openxmlformats.org/officeDocument/2006/relationships">
-  <p:cSld>
-    <p:bg>
-      <p:bgPr>
-        <a:solidFill>
-          <a:srgbClr val="FFFFFF"/>
-        </a:solidFill>
-        <a:effectLst/>
-      </p:bgPr>
-    </p:bg>
-    <p:spTree>
-      <p:nvGrpSpPr>
-        <p:cNvPr id="1" name=""/>
-        <p:cNvGrpSpPr/>
-        <p:nvPr/>
-      </p:nvGrpSpPr>
-      <p:grpSpPr/>
-      <p:sp>
-        <p:nvSpPr>
-          <p:cNvPr id="2" name="TextBox 1"/>
-          <p:cNvSpPr txBox="1"/>
-          <p:nvPr/>
-        </p:nvSpPr>
-        <p:spPr>
-          <a:xfrm>
-            <a:off x="548640" y="320040"/>
-            <a:ext cx="11094415" cy="274320"/>
-          </a:xfrm>
-          <a:prstGeom prst="rect">
-            <a:avLst/>
-          </a:prstGeom>
-          <a:noFill/>
-        </p:spPr>
-        <p:txBody>
-          <a:bodyPr wrap="square" anchor="t" lIns="0" rIns="0" tIns="0" bIns="0"/>
-          <a:lstStyle/>
-          <a:p>
-            <a:pPr algn="l"/>
-            <a:r>
-              <a:rPr sz="1100" b="1" i="0">
-                <a:solidFill>
-                  <a:srgbClr val="54595D"/>
-                </a:solidFill>
-                <a:latin typeface="Calibri"/>
-              </a:rPr>
-              <a:t>ENGINEERING CORE  ·  Core Component</a:t>
-            </a:r>
-          </a:p>
-        </p:txBody>
-      </p:sp>
-      <p:sp>
-        <p:nvSpPr>
-          <p:cNvPr id="3" name="TextBox 2"/>
-          <p:cNvSpPr txBox="1"/>
-          <p:nvPr/>
-        </p:nvSpPr>
-        <p:spPr>
-          <a:xfrm>
-            <a:off x="548640" y="566928"/>
-            <a:ext cx="11094415" cy="822960"/>
-          </a:xfrm>
-          <a:prstGeom prst="rect">
-            <a:avLst/>
-          </a:prstGeom>
-          <a:noFill/>
-        </p:spPr>
-        <p:txBody>
-          <a:bodyPr wrap="square" anchor="ctr" lIns="0" rIns="0" tIns="0" bIns="0"/>
-          <a:lstStyle/>
-          <a:p>
-            <a:pPr algn="l"/>
-            <a:r>
-              <a:rPr sz="3200" b="1" i="0">
-                <a:solidFill>
-                  <a:srgbClr val="03306E"/>
-                </a:solidFill>
-                <a:latin typeface="Cambria"/>
-              </a:rPr>
-              <a:t>Answers</a:t>
-            </a:r>
-          </a:p>
-        </p:txBody>
-      </p:sp>
-      <p:sp>
-        <p:nvSpPr>
-          <p:cNvPr id="4" name="TextBox 3"/>
-          <p:cNvSpPr txBox="1"/>
-          <p:nvPr/>
-        </p:nvSpPr>
-        <p:spPr>
-          <a:xfrm>
-            <a:off x="548640" y="6446520"/>
-            <a:ext cx="8229600" cy="274320"/>
-          </a:xfrm>
-          <a:prstGeom prst="rect">
-            <a:avLst/>
-          </a:prstGeom>
-          <a:noFill/>
-        </p:spPr>
-        <p:txBody>
-          <a:bodyPr wrap="square" anchor="t" lIns="0" rIns="0" tIns="0" bIns="0"/>
-          <a:lstStyle/>
-          <a:p>
-            <a:pPr algn="l"/>
-            <a:r>
-              <a:rPr sz="1000" b="0" i="0">
-                <a:solidFill>
-                  <a:srgbClr val="54595D"/>
-                </a:solidFill>
-                <a:latin typeface="Calibri"/>
-              </a:rPr>
-              <a:t>Design and Development for Engineering and Manufacturing T Level  ·  The Employer-set Project</a:t>
-            </a:r>
-          </a:p>
-        </p:txBody>
-      </p:sp>
-      <p:sp>
-        <p:nvSpPr>
-          <p:cNvPr id="5" name="TextBox 4"/>
-          <p:cNvSpPr txBox="1"/>
-          <p:nvPr/>
-        </p:nvSpPr>
-        <p:spPr>
-          <a:xfrm>
-            <a:off x="10728655" y="6446520"/>
-            <a:ext cx="914400" cy="274320"/>
-          </a:xfrm>
-          <a:prstGeom prst="rect">
-            <a:avLst/>
-          </a:prstGeom>
-          <a:noFill/>
-        </p:spPr>
-        <p:txBody>
-          <a:bodyPr wrap="square" anchor="t" lIns="0" rIns="0" tIns="0" bIns="0"/>
-          <a:lstStyle/>
-          <a:p>
-            <a:pPr algn="r"/>
-            <a:r>
-              <a:rPr sz="1000" b="0" i="0">
-                <a:solidFill>
-                  <a:srgbClr val="54595D"/>
-                </a:solidFill>
-                <a:latin typeface="Calibri"/>
-              </a:rPr>
-              <a:t>7</a:t>
-            </a:r>
-          </a:p>
-        </p:txBody>
-      </p:sp>
-      <p:sp>
-        <p:nvSpPr>
-          <p:cNvPr id="6" name="Oval 5"/>
-          <p:cNvSpPr/>
-          <p:nvPr/>
-        </p:nvSpPr>
-        <p:spPr>
-          <a:xfrm>
-            <a:off x="548640" y="1618488"/>
-            <a:ext cx="411480" cy="411480"/>
-          </a:xfrm>
-          <a:prstGeom prst="ellipse">
-            <a:avLst/>
-          </a:prstGeom>
-          <a:solidFill>
-            <a:srgbClr val="F2B705"/>
-          </a:solidFill>
-          <a:ln>
-            <a:noFill/>
-          </a:ln>
-          <a:effectLst/>
-        </p:spPr>
-        <p:style>
-          <a:lnRef idx="1">
-            <a:schemeClr val="accent1"/>
-          </a:lnRef>
-          <a:fillRef idx="3">
-            <a:schemeClr val="accent1"/>
-          </a:fillRef>
-          <a:effectRef idx="2">
-            <a:schemeClr val="accent1"/>
-          </a:effectRef>
-          <a:fontRef idx="minor">
-            <a:schemeClr val="lt1"/>
-          </a:fontRef>
-        </p:style>
-        <p:txBody>
-          <a:bodyPr rtlCol="0" anchor="ctr" lIns="0" rIns="0" tIns="0" bIns="0"/>
-          <a:lstStyle/>
-          <a:p>
-            <a:pPr algn="ctr"/>
-            <a:r>
-              <a:rPr sz="1400" b="1">
-                <a:solidFill>
-                  <a:srgbClr val="202122"/>
-                </a:solidFill>
-                <a:latin typeface="Calibri"/>
-              </a:rPr>
-              <a:t>1</a:t>
-            </a:r>
-          </a:p>
-        </p:txBody>
-      </p:sp>
-      <p:sp>
-        <p:nvSpPr>
-          <p:cNvPr id="7" name="TextBox 6"/>
-          <p:cNvSpPr txBox="1"/>
-          <p:nvPr/>
-        </p:nvSpPr>
-        <p:spPr>
-          <a:xfrm>
-            <a:off x="1234440" y="1600200"/>
-            <a:ext cx="10408615" cy="1030986"/>
-          </a:xfrm>
-          <a:prstGeom prst="rect">
-            <a:avLst/>
-          </a:prstGeom>
-          <a:noFill/>
-        </p:spPr>
-        <p:txBody>
-          <a:bodyPr wrap="square" anchor="t" lIns="0" rIns="0" tIns="0" bIns="0"/>
-          <a:lstStyle/>
-          <a:p>
-            <a:pPr algn="l"/>
-            <a:r>
-              <a:rPr sz="1800" b="0" i="0">
-                <a:solidFill>
-                  <a:srgbClr val="54595D"/>
-                </a:solidFill>
-                <a:latin typeface="Calibri"/>
-              </a:rPr>
-              <a:t>What percentage of the core is the ESP?</a:t>
-            </a:r>
-          </a:p>
-          <a:p>
-            <a:r>
-              <a:rPr sz="1800" b="1">
-                <a:solidFill>
-                  <a:srgbClr val="03306E"/>
-                </a:solidFill>
-                <a:latin typeface="Calibri"/>
-              </a:rPr>
-              <a:t>30%.</a:t>
-            </a:r>
-          </a:p>
-        </p:txBody>
-      </p:sp>
-      <p:sp>
-        <p:nvSpPr>
-          <p:cNvPr id="8" name="Oval 7"/>
-          <p:cNvSpPr/>
-          <p:nvPr/>
-        </p:nvSpPr>
-        <p:spPr>
-          <a:xfrm>
-            <a:off x="548640" y="2814066"/>
-            <a:ext cx="411480" cy="411480"/>
-          </a:xfrm>
-          <a:prstGeom prst="ellipse">
-            <a:avLst/>
-          </a:prstGeom>
-          <a:solidFill>
-            <a:srgbClr val="F2B705"/>
-          </a:solidFill>
-          <a:ln>
-            <a:noFill/>
-          </a:ln>
-          <a:effectLst/>
-        </p:spPr>
-        <p:style>
-          <a:lnRef idx="1">
-            <a:schemeClr val="accent1"/>
-          </a:lnRef>
-          <a:fillRef idx="3">
-            <a:schemeClr val="accent1"/>
-          </a:fillRef>
-          <a:effectRef idx="2">
-            <a:schemeClr val="accent1"/>
-          </a:effectRef>
-          <a:fontRef idx="minor">
-            <a:schemeClr val="lt1"/>
-          </a:fontRef>
-        </p:style>
-        <p:txBody>
-          <a:bodyPr rtlCol="0" anchor="ctr" lIns="0" rIns="0" tIns="0" bIns="0"/>
-          <a:lstStyle/>
-          <a:p>
-            <a:pPr algn="ctr"/>
-            <a:r>
-              <a:rPr sz="1400" b="1">
-                <a:solidFill>
-                  <a:srgbClr val="202122"/>
-                </a:solidFill>
-                <a:latin typeface="Calibri"/>
-              </a:rPr>
-              <a:t>2</a:t>
-            </a:r>
-          </a:p>
-        </p:txBody>
-      </p:sp>
-      <p:sp>
-        <p:nvSpPr>
-          <p:cNvPr id="9" name="TextBox 8"/>
-          <p:cNvSpPr txBox="1"/>
-          <p:nvPr/>
-        </p:nvSpPr>
-        <p:spPr>
-          <a:xfrm>
-            <a:off x="1234440" y="2795778"/>
-            <a:ext cx="10408615" cy="1030986"/>
-          </a:xfrm>
-          <a:prstGeom prst="rect">
-            <a:avLst/>
-          </a:prstGeom>
-          <a:noFill/>
-        </p:spPr>
-        <p:txBody>
-          <a:bodyPr wrap="square" anchor="t" lIns="0" rIns="0" tIns="0" bIns="0"/>
-          <a:lstStyle/>
-          <a:p>
-            <a:pPr algn="l"/>
-            <a:r>
-              <a:rPr sz="1800" b="0" i="0">
-                <a:solidFill>
-                  <a:srgbClr val="54595D"/>
-                </a:solidFill>
-                <a:latin typeface="Calibri"/>
-              </a:rPr>
-              <a:t>Which AO carries the most marks?</a:t>
-            </a:r>
-          </a:p>
-          <a:p>
-            <a:r>
-              <a:rPr sz="1800" b="1">
-                <a:solidFill>
-                  <a:srgbClr val="03306E"/>
-                </a:solidFill>
-                <a:latin typeface="Calibri"/>
-              </a:rPr>
-              <a:t>AO2, applying core knowledge and skills (50%).</a:t>
-            </a:r>
-          </a:p>
-        </p:txBody>
-      </p:sp>
-      <p:sp>
-        <p:nvSpPr>
-          <p:cNvPr id="10" name="Oval 9"/>
-          <p:cNvSpPr/>
-          <p:nvPr/>
-        </p:nvSpPr>
-        <p:spPr>
-          <a:xfrm>
-            <a:off x="548640" y="4009644"/>
-            <a:ext cx="411480" cy="411480"/>
-          </a:xfrm>
-          <a:prstGeom prst="ellipse">
-            <a:avLst/>
-          </a:prstGeom>
-          <a:solidFill>
-            <a:srgbClr val="F2B705"/>
-          </a:solidFill>
-          <a:ln>
-            <a:noFill/>
-          </a:ln>
-          <a:effectLst/>
-        </p:spPr>
-        <p:style>
-          <a:lnRef idx="1">
-            <a:schemeClr val="accent1"/>
-          </a:lnRef>
-          <a:fillRef idx="3">
-            <a:schemeClr val="accent1"/>
-          </a:fillRef>
-          <a:effectRef idx="2">
-            <a:schemeClr val="accent1"/>
-          </a:effectRef>
-          <a:fontRef idx="minor">
-            <a:schemeClr val="lt1"/>
-          </a:fontRef>
-        </p:style>
-        <p:txBody>
-          <a:bodyPr rtlCol="0" anchor="ctr" lIns="0" rIns="0" tIns="0" bIns="0"/>
-          <a:lstStyle/>
-          <a:p>
-            <a:pPr algn="ctr"/>
-            <a:r>
-              <a:rPr sz="1400" b="1">
-                <a:solidFill>
-                  <a:srgbClr val="202122"/>
-                </a:solidFill>
-                <a:latin typeface="Calibri"/>
-              </a:rPr>
-              <a:t>3</a:t>
-            </a:r>
-          </a:p>
-        </p:txBody>
-      </p:sp>
-      <p:sp>
-        <p:nvSpPr>
-          <p:cNvPr id="11" name="TextBox 10"/>
-          <p:cNvSpPr txBox="1"/>
-          <p:nvPr/>
-        </p:nvSpPr>
-        <p:spPr>
-          <a:xfrm>
-            <a:off x="1234440" y="3991356"/>
-            <a:ext cx="10408615" cy="1030986"/>
-          </a:xfrm>
-          <a:prstGeom prst="rect">
-            <a:avLst/>
-          </a:prstGeom>
-          <a:noFill/>
-        </p:spPr>
-        <p:txBody>
-          <a:bodyPr wrap="square" anchor="t" lIns="0" rIns="0" tIns="0" bIns="0"/>
-          <a:lstStyle/>
-          <a:p>
-            <a:pPr algn="l"/>
-            <a:r>
-              <a:rPr sz="1800" b="0" i="0">
-                <a:solidFill>
-                  <a:srgbClr val="54595D"/>
-                </a:solidFill>
-                <a:latin typeface="Calibri"/>
-              </a:rPr>
-              <a:t>Name the four task areas.</a:t>
-            </a:r>
-          </a:p>
-          <a:p>
-            <a:r>
-              <a:rPr sz="1800" b="1">
-                <a:solidFill>
-                  <a:srgbClr val="03306E"/>
-                </a:solidFill>
-                <a:latin typeface="Calibri"/>
-              </a:rPr>
-              <a:t>Research, design, plan, present.</a:t>
-            </a:r>
-          </a:p>
-        </p:txBody>
-      </p:sp>
-      <p:sp>
-        <p:nvSpPr>
-          <p:cNvPr id="12" name="Oval 11"/>
-          <p:cNvSpPr/>
-          <p:nvPr/>
-        </p:nvSpPr>
-        <p:spPr>
-          <a:xfrm>
-            <a:off x="548640" y="5205221"/>
-            <a:ext cx="411480" cy="411480"/>
-          </a:xfrm>
-          <a:prstGeom prst="ellipse">
-            <a:avLst/>
-          </a:prstGeom>
-          <a:solidFill>
-            <a:srgbClr val="F2B705"/>
-          </a:solidFill>
-          <a:ln>
-            <a:noFill/>
-          </a:ln>
-          <a:effectLst/>
-        </p:spPr>
-        <p:style>
-          <a:lnRef idx="1">
-            <a:schemeClr val="accent1"/>
-          </a:lnRef>
-          <a:fillRef idx="3">
-            <a:schemeClr val="accent1"/>
-          </a:fillRef>
-          <a:effectRef idx="2">
-            <a:schemeClr val="accent1"/>
-          </a:effectRef>
-          <a:fontRef idx="minor">
-            <a:schemeClr val="lt1"/>
-          </a:fontRef>
-        </p:style>
-        <p:txBody>
-          <a:bodyPr rtlCol="0" anchor="ctr" lIns="0" rIns="0" tIns="0" bIns="0"/>
-          <a:lstStyle/>
-          <a:p>
-            <a:pPr algn="ctr"/>
-            <a:r>
-              <a:rPr sz="1400" b="1">
-                <a:solidFill>
-                  <a:srgbClr val="202122"/>
-                </a:solidFill>
-                <a:latin typeface="Calibri"/>
-              </a:rPr>
-              <a:t>4</a:t>
-            </a:r>
-          </a:p>
-        </p:txBody>
-      </p:sp>
-      <p:sp>
-        <p:nvSpPr>
-          <p:cNvPr id="13" name="TextBox 12"/>
-          <p:cNvSpPr txBox="1"/>
-          <p:nvPr/>
-        </p:nvSpPr>
-        <p:spPr>
-          <a:xfrm>
-            <a:off x="1234440" y="5186933"/>
-            <a:ext cx="10408615" cy="1030986"/>
-          </a:xfrm>
-          <a:prstGeom prst="rect">
-            <a:avLst/>
-          </a:prstGeom>
-          <a:noFill/>
-        </p:spPr>
-        <p:txBody>
-          <a:bodyPr wrap="square" anchor="t" lIns="0" rIns="0" tIns="0" bIns="0"/>
-          <a:lstStyle/>
-          <a:p>
-            <a:pPr algn="l"/>
-            <a:r>
-              <a:rPr sz="1800" b="0" i="0">
-                <a:solidFill>
-                  <a:srgbClr val="54595D"/>
-                </a:solidFill>
-                <a:latin typeface="Calibri"/>
-              </a:rPr>
-              <a:t>What does AO5 ask for?</a:t>
-            </a:r>
-          </a:p>
-          <a:p>
-            <a:r>
-              <a:rPr sz="1800" b="1">
-                <a:solidFill>
-                  <a:srgbClr val="03306E"/>
-                </a:solidFill>
-                <a:latin typeface="Calibri"/>
-              </a:rPr>
-              <a:t>Realising the outcome and reviewing how well it meets the brief.</a:t>
-            </a:r>
-          </a:p>
-        </p:txBody>
-      </p:sp>
-    </p:spTree>
-  </p:cSld>
-  <p:clrMapOvr>
-    <a:masterClrMapping/>
-  </p:clrMapOvr>
-</p:sld>
-</file>
-
-<file path=ppt/slides/slide8.xml><?xml version="1.0" encoding="utf-8"?>
-<p:sld xmlns:a="http://schemas.openxmlformats.org/drawingml/2006/main" xmlns:p="http://schemas.openxmlformats.org/presentationml/2006/main" xmlns:r="http://schemas.openxmlformats.org/officeDocument/2006/relationships">
-  <p:cSld>
-    <p:bg>
-      <p:bgPr>
-        <a:solidFill>
-          <a:srgbClr val="FFFFFF"/>
-        </a:solidFill>
-        <a:effectLst/>
-      </p:bgPr>
-    </p:bg>
-    <p:spTree>
-      <p:nvGrpSpPr>
-        <p:cNvPr id="1" name=""/>
-        <p:cNvGrpSpPr/>
-        <p:nvPr/>
-      </p:nvGrpSpPr>
-      <p:grpSpPr/>
-      <p:sp>
-        <p:nvSpPr>
-          <p:cNvPr id="2" name="TextBox 1"/>
-          <p:cNvSpPr txBox="1"/>
-          <p:nvPr/>
-        </p:nvSpPr>
-        <p:spPr>
-          <a:xfrm>
-            <a:off x="548640" y="320040"/>
-            <a:ext cx="11094415" cy="274320"/>
-          </a:xfrm>
-          <a:prstGeom prst="rect">
-            <a:avLst/>
-          </a:prstGeom>
-          <a:noFill/>
-        </p:spPr>
-        <p:txBody>
-          <a:bodyPr wrap="square" anchor="t" lIns="0" rIns="0" tIns="0" bIns="0"/>
-          <a:lstStyle/>
-          <a:p>
-            <a:pPr algn="l"/>
-            <a:r>
-              <a:rPr sz="1100" b="1" i="0">
-                <a:solidFill>
-                  <a:srgbClr val="54595D"/>
-                </a:solidFill>
-                <a:latin typeface="Calibri"/>
-              </a:rPr>
-              <a:t>ENGINEERING CORE  ·  Core Component</a:t>
-            </a:r>
-          </a:p>
-        </p:txBody>
-      </p:sp>
-      <p:sp>
-        <p:nvSpPr>
-          <p:cNvPr id="3" name="TextBox 2"/>
-          <p:cNvSpPr txBox="1"/>
-          <p:nvPr/>
-        </p:nvSpPr>
-        <p:spPr>
-          <a:xfrm>
-            <a:off x="548640" y="566928"/>
-            <a:ext cx="11094415" cy="822960"/>
-          </a:xfrm>
-          <a:prstGeom prst="rect">
-            <a:avLst/>
-          </a:prstGeom>
-          <a:noFill/>
-        </p:spPr>
-        <p:txBody>
-          <a:bodyPr wrap="square" anchor="ctr" lIns="0" rIns="0" tIns="0" bIns="0"/>
-          <a:lstStyle/>
-          <a:p>
-            <a:pPr algn="l"/>
-            <a:r>
-              <a:rPr sz="3200" b="1" i="0">
-                <a:solidFill>
-                  <a:srgbClr val="03306E"/>
-                </a:solidFill>
-                <a:latin typeface="Cambria"/>
-              </a:rPr>
-              <a:t>Activity: Mini brief</a:t>
-            </a:r>
-          </a:p>
-        </p:txBody>
-      </p:sp>
-      <p:sp>
-        <p:nvSpPr>
-          <p:cNvPr id="4" name="TextBox 3"/>
-          <p:cNvSpPr txBox="1"/>
-          <p:nvPr/>
-        </p:nvSpPr>
-        <p:spPr>
-          <a:xfrm>
-            <a:off x="548640" y="6446520"/>
-            <a:ext cx="8229600" cy="274320"/>
-          </a:xfrm>
-          <a:prstGeom prst="rect">
-            <a:avLst/>
-          </a:prstGeom>
-          <a:noFill/>
-        </p:spPr>
-        <p:txBody>
-          <a:bodyPr wrap="square" anchor="t" lIns="0" rIns="0" tIns="0" bIns="0"/>
-          <a:lstStyle/>
-          <a:p>
-            <a:pPr algn="l"/>
-            <a:r>
-              <a:rPr sz="1000" b="0" i="0">
-                <a:solidFill>
-                  <a:srgbClr val="54595D"/>
-                </a:solidFill>
-                <a:latin typeface="Calibri"/>
-              </a:rPr>
-              <a:t>Design and Development for Engineering and Manufacturing T Level  ·  The Employer-set Project</a:t>
-            </a:r>
-          </a:p>
-        </p:txBody>
-      </p:sp>
-      <p:sp>
-        <p:nvSpPr>
-          <p:cNvPr id="5" name="TextBox 4"/>
-          <p:cNvSpPr txBox="1"/>
-          <p:nvPr/>
-        </p:nvSpPr>
-        <p:spPr>
-          <a:xfrm>
-            <a:off x="10728655" y="6446520"/>
-            <a:ext cx="914400" cy="274320"/>
-          </a:xfrm>
-          <a:prstGeom prst="rect">
-            <a:avLst/>
-          </a:prstGeom>
-          <a:noFill/>
-        </p:spPr>
-        <p:txBody>
-          <a:bodyPr wrap="square" anchor="t" lIns="0" rIns="0" tIns="0" bIns="0"/>
-          <a:lstStyle/>
-          <a:p>
-            <a:pPr algn="r"/>
-            <a:r>
-              <a:rPr sz="1000" b="0" i="0">
-                <a:solidFill>
-                  <a:srgbClr val="54595D"/>
-                </a:solidFill>
-                <a:latin typeface="Calibri"/>
-              </a:rPr>
-              <a:t>8</a:t>
-            </a:r>
-          </a:p>
-        </p:txBody>
-      </p:sp>
-      <p:sp>
-        <p:nvSpPr>
-          <p:cNvPr id="6" name="Rounded Rectangle 5"/>
-          <p:cNvSpPr/>
-          <p:nvPr/>
-        </p:nvSpPr>
-        <p:spPr>
-          <a:xfrm>
-            <a:off x="548640" y="1508760"/>
-            <a:ext cx="2011680" cy="457200"/>
-          </a:xfrm>
-          <a:prstGeom prst="roundRect">
-            <a:avLst>
-              <a:gd name="adj" fmla="val 50000"/>
-            </a:avLst>
-          </a:prstGeom>
-          <a:solidFill>
-            <a:srgbClr val="F2B705"/>
-          </a:solidFill>
-          <a:ln>
-            <a:noFill/>
-          </a:ln>
-          <a:effectLst/>
-        </p:spPr>
-        <p:style>
-          <a:lnRef idx="1">
-            <a:schemeClr val="accent1"/>
-          </a:lnRef>
-          <a:fillRef idx="3">
-            <a:schemeClr val="accent1"/>
-          </a:fillRef>
-          <a:effectRef idx="2">
-            <a:schemeClr val="accent1"/>
-          </a:effectRef>
-          <a:fontRef idx="minor">
-            <a:schemeClr val="lt1"/>
-          </a:fontRef>
-        </p:style>
-        <p:txBody>
-          <a:bodyPr rtlCol="0" anchor="ctr"/>
-          <a:lstStyle/>
-          <a:p/>
-        </p:txBody>
-      </p:sp>
-      <p:sp>
-        <p:nvSpPr>
-          <p:cNvPr id="7" name="TextBox 6"/>
-          <p:cNvSpPr txBox="1"/>
-          <p:nvPr/>
-        </p:nvSpPr>
-        <p:spPr>
-          <a:xfrm>
-            <a:off x="548640" y="1508760"/>
-            <a:ext cx="2011680" cy="457200"/>
-          </a:xfrm>
-          <a:prstGeom prst="rect">
-            <a:avLst/>
-          </a:prstGeom>
-          <a:noFill/>
-        </p:spPr>
-        <p:txBody>
-          <a:bodyPr wrap="square" anchor="ctr" lIns="0" rIns="0" tIns="0" bIns="0"/>
-          <a:lstStyle/>
-          <a:p>
-            <a:pPr algn="ctr"/>
-            <a:r>
-              <a:rPr sz="1400" b="1" i="0">
-                <a:solidFill>
-                  <a:srgbClr val="202122"/>
-                </a:solidFill>
-                <a:latin typeface="Calibri"/>
-              </a:rPr>
-              <a:t>40 minutes</a:t>
-            </a:r>
-          </a:p>
-        </p:txBody>
-      </p:sp>
-      <p:sp>
-        <p:nvSpPr>
-          <p:cNvPr id="8" name="TextBox 7"/>
-          <p:cNvSpPr txBox="1"/>
-          <p:nvPr/>
-        </p:nvSpPr>
-        <p:spPr>
-          <a:xfrm>
-            <a:off x="2743200" y="1508760"/>
-            <a:ext cx="4754880" cy="457200"/>
-          </a:xfrm>
-          <a:prstGeom prst="rect">
-            <a:avLst/>
-          </a:prstGeom>
-          <a:noFill/>
-        </p:spPr>
-        <p:txBody>
-          <a:bodyPr wrap="square" anchor="ctr" lIns="0" rIns="0" tIns="0" bIns="0"/>
-          <a:lstStyle/>
-          <a:p>
-            <a:pPr algn="l"/>
-            <a:r>
-              <a:rPr sz="1400" b="0" i="1">
-                <a:solidFill>
-                  <a:srgbClr val="54595D"/>
-                </a:solidFill>
-                <a:latin typeface="Calibri"/>
-              </a:rPr>
-              <a:t>Small groups</a:t>
-            </a:r>
-          </a:p>
-        </p:txBody>
-      </p:sp>
-      <p:sp>
-        <p:nvSpPr>
-          <p:cNvPr id="9" name="Oval 8"/>
-          <p:cNvSpPr/>
-          <p:nvPr/>
-        </p:nvSpPr>
-        <p:spPr>
-          <a:xfrm>
-            <a:off x="548640" y="2482596"/>
-            <a:ext cx="384048" cy="384048"/>
-          </a:xfrm>
-          <a:prstGeom prst="ellipse">
-            <a:avLst/>
-          </a:prstGeom>
-          <a:solidFill>
-            <a:srgbClr val="0645AD"/>
-          </a:solidFill>
-          <a:ln>
-            <a:noFill/>
-          </a:ln>
-          <a:effectLst/>
-        </p:spPr>
-        <p:style>
-          <a:lnRef idx="1">
-            <a:schemeClr val="accent1"/>
-          </a:lnRef>
-          <a:fillRef idx="3">
-            <a:schemeClr val="accent1"/>
-          </a:fillRef>
-          <a:effectRef idx="2">
-            <a:schemeClr val="accent1"/>
-          </a:effectRef>
-          <a:fontRef idx="minor">
-            <a:schemeClr val="lt1"/>
-          </a:fontRef>
-        </p:style>
-        <p:txBody>
-          <a:bodyPr rtlCol="0" anchor="ctr" lIns="0" rIns="0" tIns="0" bIns="0"/>
-          <a:lstStyle/>
-          <a:p>
-            <a:pPr algn="ctr"/>
-            <a:r>
-              <a:rPr sz="1300" b="1">
-                <a:solidFill>
-                  <a:srgbClr val="FFFFFF"/>
-                </a:solidFill>
-                <a:latin typeface="Calibri"/>
-              </a:rPr>
-              <a:t>1</a:t>
-            </a:r>
-          </a:p>
-        </p:txBody>
-      </p:sp>
-      <p:sp>
-        <p:nvSpPr>
-          <p:cNvPr id="10" name="TextBox 9"/>
-          <p:cNvSpPr txBox="1"/>
-          <p:nvPr/>
-        </p:nvSpPr>
-        <p:spPr>
-          <a:xfrm>
-            <a:off x="1143000" y="2240280"/>
-            <a:ext cx="5943600" cy="868680"/>
-          </a:xfrm>
-          <a:prstGeom prst="rect">
-            <a:avLst/>
-          </a:prstGeom>
-          <a:noFill/>
-        </p:spPr>
-        <p:txBody>
-          <a:bodyPr wrap="square" anchor="ctr" lIns="0" rIns="0" tIns="0" bIns="0"/>
-          <a:lstStyle/>
-          <a:p>
-            <a:pPr algn="l"/>
-            <a:r>
-              <a:rPr sz="1700" b="0" i="0">
-                <a:solidFill>
-                  <a:srgbClr val="202122"/>
-                </a:solidFill>
-                <a:latin typeface="Calibri"/>
-              </a:rPr>
-              <a:t>Brief: design a wall bracket to hold a 15 kg shelf in a damp garage.</a:t>
-            </a:r>
-          </a:p>
-        </p:txBody>
-      </p:sp>
-      <p:sp>
-        <p:nvSpPr>
-          <p:cNvPr id="11" name="Oval 10"/>
-          <p:cNvSpPr/>
-          <p:nvPr/>
-        </p:nvSpPr>
-        <p:spPr>
-          <a:xfrm>
-            <a:off x="548640" y="3461004"/>
-            <a:ext cx="384048" cy="384048"/>
-          </a:xfrm>
-          <a:prstGeom prst="ellipse">
-            <a:avLst/>
-          </a:prstGeom>
-          <a:solidFill>
-            <a:srgbClr val="0645AD"/>
-          </a:solidFill>
-          <a:ln>
-            <a:noFill/>
-          </a:ln>
-          <a:effectLst/>
-        </p:spPr>
-        <p:style>
-          <a:lnRef idx="1">
-            <a:schemeClr val="accent1"/>
-          </a:lnRef>
-          <a:fillRef idx="3">
-            <a:schemeClr val="accent1"/>
-          </a:fillRef>
-          <a:effectRef idx="2">
-            <a:schemeClr val="accent1"/>
-          </a:effectRef>
-          <a:fontRef idx="minor">
-            <a:schemeClr val="lt1"/>
-          </a:fontRef>
-        </p:style>
-        <p:txBody>
-          <a:bodyPr rtlCol="0" anchor="ctr" lIns="0" rIns="0" tIns="0" bIns="0"/>
-          <a:lstStyle/>
-          <a:p>
-            <a:pPr algn="ctr"/>
-            <a:r>
-              <a:rPr sz="1300" b="1">
-                <a:solidFill>
-                  <a:srgbClr val="FFFFFF"/>
-                </a:solidFill>
-                <a:latin typeface="Calibri"/>
-              </a:rPr>
-              <a:t>2</a:t>
+              <a:t>Why explain rejected options?</a:t>
             </a:r>
           </a:p>
         </p:txBody>
@@ -7925,8 +10651,8 @@
         </p:nvSpPr>
         <p:spPr>
           <a:xfrm>
-            <a:off x="1143000" y="3218688"/>
-            <a:ext cx="5943600" cy="868680"/>
+            <a:off x="548640" y="5852160"/>
+            <a:ext cx="11094415" cy="365760"/>
           </a:xfrm>
           <a:prstGeom prst="rect">
             <a:avLst/>
@@ -7934,879 +10660,18 @@
           <a:noFill/>
         </p:spPr>
         <p:txBody>
-          <a:bodyPr wrap="square" anchor="ctr" lIns="0" rIns="0" tIns="0" bIns="0"/>
+          <a:bodyPr wrap="square" anchor="t" lIns="0" rIns="0" tIns="0" bIns="0"/>
           <a:lstStyle/>
           <a:p>
             <a:pPr algn="l"/>
             <a:r>
-              <a:rPr sz="1700" b="0" i="0">
-                <a:solidFill>
-                  <a:srgbClr val="202122"/>
-                </a:solidFill>
-                <a:latin typeface="Calibri"/>
-              </a:rPr>
-              <a:t>Research: list the core topics that apply.</a:t>
-            </a:r>
-          </a:p>
-        </p:txBody>
-      </p:sp>
-      <p:sp>
-        <p:nvSpPr>
-          <p:cNvPr id="13" name="Oval 12"/>
-          <p:cNvSpPr/>
-          <p:nvPr/>
-        </p:nvSpPr>
-        <p:spPr>
-          <a:xfrm>
-            <a:off x="548640" y="4439412"/>
-            <a:ext cx="384048" cy="384048"/>
-          </a:xfrm>
-          <a:prstGeom prst="ellipse">
-            <a:avLst/>
-          </a:prstGeom>
-          <a:solidFill>
-            <a:srgbClr val="0645AD"/>
-          </a:solidFill>
-          <a:ln>
-            <a:noFill/>
-          </a:ln>
-          <a:effectLst/>
-        </p:spPr>
-        <p:style>
-          <a:lnRef idx="1">
-            <a:schemeClr val="accent1"/>
-          </a:lnRef>
-          <a:fillRef idx="3">
-            <a:schemeClr val="accent1"/>
-          </a:fillRef>
-          <a:effectRef idx="2">
-            <a:schemeClr val="accent1"/>
-          </a:effectRef>
-          <a:fontRef idx="minor">
-            <a:schemeClr val="lt1"/>
-          </a:fontRef>
-        </p:style>
-        <p:txBody>
-          <a:bodyPr rtlCol="0" anchor="ctr" lIns="0" rIns="0" tIns="0" bIns="0"/>
-          <a:lstStyle/>
-          <a:p>
-            <a:pPr algn="ctr"/>
-            <a:r>
-              <a:rPr sz="1300" b="1">
-                <a:solidFill>
-                  <a:srgbClr val="FFFFFF"/>
-                </a:solidFill>
-                <a:latin typeface="Calibri"/>
-              </a:rPr>
-              <a:t>3</a:t>
-            </a:r>
-          </a:p>
-        </p:txBody>
-      </p:sp>
-      <p:sp>
-        <p:nvSpPr>
-          <p:cNvPr id="14" name="TextBox 13"/>
-          <p:cNvSpPr txBox="1"/>
-          <p:nvPr/>
-        </p:nvSpPr>
-        <p:spPr>
-          <a:xfrm>
-            <a:off x="1143000" y="4197096"/>
-            <a:ext cx="5943600" cy="868680"/>
-          </a:xfrm>
-          <a:prstGeom prst="rect">
-            <a:avLst/>
-          </a:prstGeom>
-          <a:noFill/>
-        </p:spPr>
-        <p:txBody>
-          <a:bodyPr wrap="square" anchor="ctr" lIns="0" rIns="0" tIns="0" bIns="0"/>
-          <a:lstStyle/>
-          <a:p>
-            <a:pPr algn="l"/>
-            <a:r>
-              <a:rPr sz="1700" b="0" i="0">
-                <a:solidFill>
-                  <a:srgbClr val="202122"/>
-                </a:solidFill>
-                <a:latin typeface="Calibri"/>
-              </a:rPr>
-              <a:t>Design: sketch a solution and choose a material.</a:t>
-            </a:r>
-          </a:p>
-        </p:txBody>
-      </p:sp>
-      <p:sp>
-        <p:nvSpPr>
-          <p:cNvPr id="15" name="Oval 14"/>
-          <p:cNvSpPr/>
-          <p:nvPr/>
-        </p:nvSpPr>
-        <p:spPr>
-          <a:xfrm>
-            <a:off x="548640" y="5417820"/>
-            <a:ext cx="384048" cy="384048"/>
-          </a:xfrm>
-          <a:prstGeom prst="ellipse">
-            <a:avLst/>
-          </a:prstGeom>
-          <a:solidFill>
-            <a:srgbClr val="0645AD"/>
-          </a:solidFill>
-          <a:ln>
-            <a:noFill/>
-          </a:ln>
-          <a:effectLst/>
-        </p:spPr>
-        <p:style>
-          <a:lnRef idx="1">
-            <a:schemeClr val="accent1"/>
-          </a:lnRef>
-          <a:fillRef idx="3">
-            <a:schemeClr val="accent1"/>
-          </a:fillRef>
-          <a:effectRef idx="2">
-            <a:schemeClr val="accent1"/>
-          </a:effectRef>
-          <a:fontRef idx="minor">
-            <a:schemeClr val="lt1"/>
-          </a:fontRef>
-        </p:style>
-        <p:txBody>
-          <a:bodyPr rtlCol="0" anchor="ctr" lIns="0" rIns="0" tIns="0" bIns="0"/>
-          <a:lstStyle/>
-          <a:p>
-            <a:pPr algn="ctr"/>
-            <a:r>
-              <a:rPr sz="1300" b="1">
-                <a:solidFill>
-                  <a:srgbClr val="FFFFFF"/>
-                </a:solidFill>
-                <a:latin typeface="Calibri"/>
-              </a:rPr>
-              <a:t>4</a:t>
-            </a:r>
-          </a:p>
-        </p:txBody>
-      </p:sp>
-      <p:sp>
-        <p:nvSpPr>
-          <p:cNvPr id="16" name="TextBox 15"/>
-          <p:cNvSpPr txBox="1"/>
-          <p:nvPr/>
-        </p:nvSpPr>
-        <p:spPr>
-          <a:xfrm>
-            <a:off x="1143000" y="5175504"/>
-            <a:ext cx="5943600" cy="868680"/>
-          </a:xfrm>
-          <a:prstGeom prst="rect">
-            <a:avLst/>
-          </a:prstGeom>
-          <a:noFill/>
-        </p:spPr>
-        <p:txBody>
-          <a:bodyPr wrap="square" anchor="ctr" lIns="0" rIns="0" tIns="0" bIns="0"/>
-          <a:lstStyle/>
-          <a:p>
-            <a:pPr algn="l"/>
-            <a:r>
-              <a:rPr sz="1700" b="0" i="0">
-                <a:solidFill>
-                  <a:srgbClr val="202122"/>
-                </a:solidFill>
-                <a:latin typeface="Calibri"/>
-              </a:rPr>
-              <a:t>Plan and present: outline manufacture and give a two-minute pitch.</a:t>
-            </a:r>
-          </a:p>
-        </p:txBody>
-      </p:sp>
-      <p:sp>
-        <p:nvSpPr>
-          <p:cNvPr id="17" name="Rounded Rectangle 16"/>
-          <p:cNvSpPr/>
-          <p:nvPr/>
-        </p:nvSpPr>
-        <p:spPr>
-          <a:xfrm>
-            <a:off x="7772400" y="1508760"/>
-            <a:ext cx="3867912" cy="4572000"/>
-          </a:xfrm>
-          <a:prstGeom prst="roundRect">
-            <a:avLst>
-              <a:gd name="adj" fmla="val 8000"/>
-            </a:avLst>
-          </a:prstGeom>
-          <a:solidFill>
-            <a:srgbClr val="EAF3FF"/>
-          </a:solidFill>
-          <a:ln>
-            <a:noFill/>
-          </a:ln>
-          <a:effectLst/>
-        </p:spPr>
-        <p:style>
-          <a:lnRef idx="1">
-            <a:schemeClr val="accent1"/>
-          </a:lnRef>
-          <a:fillRef idx="3">
-            <a:schemeClr val="accent1"/>
-          </a:fillRef>
-          <a:effectRef idx="2">
-            <a:schemeClr val="accent1"/>
-          </a:effectRef>
-          <a:fontRef idx="minor">
-            <a:schemeClr val="lt1"/>
-          </a:fontRef>
-        </p:style>
-        <p:txBody>
-          <a:bodyPr rtlCol="0" anchor="ctr"/>
-          <a:lstStyle/>
-          <a:p/>
-        </p:txBody>
-      </p:sp>
-      <p:sp>
-        <p:nvSpPr>
-          <p:cNvPr id="18" name="TextBox 17"/>
-          <p:cNvSpPr txBox="1"/>
-          <p:nvPr/>
-        </p:nvSpPr>
-        <p:spPr>
-          <a:xfrm>
-            <a:off x="8046720" y="1737360"/>
-            <a:ext cx="3291840" cy="365760"/>
-          </a:xfrm>
-          <a:prstGeom prst="rect">
-            <a:avLst/>
-          </a:prstGeom>
-          <a:noFill/>
-        </p:spPr>
-        <p:txBody>
-          <a:bodyPr wrap="square" anchor="t" lIns="0" rIns="0" tIns="0" bIns="0"/>
-          <a:lstStyle/>
-          <a:p>
-            <a:pPr algn="l"/>
-            <a:r>
-              <a:rPr sz="1300" b="1" i="0">
-                <a:solidFill>
-                  <a:srgbClr val="0645AD"/>
-                </a:solidFill>
-                <a:latin typeface="Calibri"/>
-              </a:rPr>
-              <a:t>SUCCESS CRITERIA</a:t>
-            </a:r>
-          </a:p>
-        </p:txBody>
-      </p:sp>
-      <p:sp>
-        <p:nvSpPr>
-          <p:cNvPr id="19" name="TextBox 18"/>
-          <p:cNvSpPr txBox="1"/>
-          <p:nvPr/>
-        </p:nvSpPr>
-        <p:spPr>
-          <a:xfrm>
-            <a:off x="8046720" y="2240280"/>
-            <a:ext cx="3337560" cy="3657600"/>
-          </a:xfrm>
-          <a:prstGeom prst="rect">
-            <a:avLst/>
-          </a:prstGeom>
-          <a:noFill/>
-        </p:spPr>
-        <p:txBody>
-          <a:bodyPr wrap="square" lIns="0" rIns="0" tIns="0" bIns="0">
-            <a:spAutoFit/>
-          </a:bodyPr>
-          <a:lstStyle/>
-          <a:p>
-            <a:pPr marL="274320" indent="-274320">
-              <a:spcAft>
-                <a:spcPts val="810"/>
-              </a:spcAft>
-              <a:buClr>
-                <a:srgbClr val="0645AD"/>
-              </a:buClr>
-              <a:buFont typeface="Arial"/>
-              <a:buChar char="•"/>
-            </a:pPr>
-            <a:r>
-              <a:rPr sz="1800" b="0">
-                <a:solidFill>
-                  <a:srgbClr val="202122"/>
-                </a:solidFill>
-                <a:latin typeface="Calibri"/>
-              </a:rPr>
-              <a:t>Links to at least four core topics</a:t>
-            </a:r>
-          </a:p>
-          <a:p>
-            <a:pPr marL="274320" indent="-274320">
-              <a:spcAft>
-                <a:spcPts val="810"/>
-              </a:spcAft>
-              <a:buClr>
-                <a:srgbClr val="0645AD"/>
-              </a:buClr>
-              <a:buFont typeface="Arial"/>
-              <a:buChar char="•"/>
-            </a:pPr>
-            <a:r>
-              <a:rPr sz="1800" b="0">
-                <a:solidFill>
-                  <a:srgbClr val="202122"/>
-                </a:solidFill>
-                <a:latin typeface="Calibri"/>
-              </a:rPr>
-              <a:t>Material justified for damp conditions</a:t>
-            </a:r>
-          </a:p>
-          <a:p>
-            <a:pPr marL="274320" indent="-274320">
-              <a:spcAft>
-                <a:spcPts val="810"/>
-              </a:spcAft>
-              <a:buClr>
-                <a:srgbClr val="0645AD"/>
-              </a:buClr>
-              <a:buFont typeface="Arial"/>
-              <a:buChar char="•"/>
-            </a:pPr>
-            <a:r>
-              <a:rPr sz="1800" b="0">
-                <a:solidFill>
-                  <a:srgbClr val="202122"/>
-                </a:solidFill>
-                <a:latin typeface="Calibri"/>
-              </a:rPr>
-              <a:t>Calculations and units used</a:t>
-            </a:r>
-          </a:p>
-        </p:txBody>
-      </p:sp>
-    </p:spTree>
-  </p:cSld>
-  <p:clrMapOvr>
-    <a:masterClrMapping/>
-  </p:clrMapOvr>
-</p:sld>
-</file>
-
-<file path=ppt/slides/slide9.xml><?xml version="1.0" encoding="utf-8"?>
-<p:sld xmlns:a="http://schemas.openxmlformats.org/drawingml/2006/main" xmlns:p="http://schemas.openxmlformats.org/presentationml/2006/main" xmlns:r="http://schemas.openxmlformats.org/officeDocument/2006/relationships">
-  <p:cSld>
-    <p:bg>
-      <p:bgPr>
-        <a:solidFill>
-          <a:srgbClr val="03306E"/>
-        </a:solidFill>
-        <a:effectLst/>
-      </p:bgPr>
-    </p:bg>
-    <p:spTree>
-      <p:nvGrpSpPr>
-        <p:cNvPr id="1" name=""/>
-        <p:cNvGrpSpPr/>
-        <p:nvPr/>
-      </p:nvGrpSpPr>
-      <p:grpSpPr/>
-      <p:sp>
-        <p:nvSpPr>
-          <p:cNvPr id="2" name="TextBox 1"/>
-          <p:cNvSpPr txBox="1"/>
-          <p:nvPr/>
-        </p:nvSpPr>
-        <p:spPr>
-          <a:xfrm>
-            <a:off x="548640" y="320040"/>
-            <a:ext cx="11094415" cy="274320"/>
-          </a:xfrm>
-          <a:prstGeom prst="rect">
-            <a:avLst/>
-          </a:prstGeom>
-          <a:noFill/>
-        </p:spPr>
-        <p:txBody>
-          <a:bodyPr wrap="square" anchor="t" lIns="0" rIns="0" tIns="0" bIns="0"/>
-          <a:lstStyle/>
-          <a:p>
-            <a:pPr algn="l"/>
-            <a:r>
-              <a:rPr sz="1100" b="1" i="0">
-                <a:solidFill>
-                  <a:srgbClr val="A9C8F0"/>
-                </a:solidFill>
-                <a:latin typeface="Calibri"/>
-              </a:rPr>
-              <a:t>ENGINEERING CORE  ·  Core Component</a:t>
-            </a:r>
-          </a:p>
-        </p:txBody>
-      </p:sp>
-      <p:sp>
-        <p:nvSpPr>
-          <p:cNvPr id="3" name="TextBox 2"/>
-          <p:cNvSpPr txBox="1"/>
-          <p:nvPr/>
-        </p:nvSpPr>
-        <p:spPr>
-          <a:xfrm>
-            <a:off x="548640" y="566928"/>
-            <a:ext cx="11094415" cy="822960"/>
-          </a:xfrm>
-          <a:prstGeom prst="rect">
-            <a:avLst/>
-          </a:prstGeom>
-          <a:noFill/>
-        </p:spPr>
-        <p:txBody>
-          <a:bodyPr wrap="square" anchor="ctr" lIns="0" rIns="0" tIns="0" bIns="0"/>
-          <a:lstStyle/>
-          <a:p>
-            <a:pPr algn="l"/>
-            <a:r>
-              <a:rPr sz="3200" b="1" i="0">
-                <a:solidFill>
-                  <a:srgbClr val="FFFFFF"/>
-                </a:solidFill>
-                <a:latin typeface="Cambria"/>
-              </a:rPr>
-              <a:t>Exit ticket</a:t>
-            </a:r>
-          </a:p>
-        </p:txBody>
-      </p:sp>
-      <p:sp>
-        <p:nvSpPr>
-          <p:cNvPr id="4" name="Oval 3"/>
-          <p:cNvSpPr/>
-          <p:nvPr/>
-        </p:nvSpPr>
-        <p:spPr>
-          <a:xfrm>
-            <a:off x="548640" y="1737360"/>
-            <a:ext cx="502920" cy="502920"/>
-          </a:xfrm>
-          <a:prstGeom prst="ellipse">
-            <a:avLst/>
-          </a:prstGeom>
-          <a:solidFill>
-            <a:srgbClr val="F2B705"/>
-          </a:solidFill>
-          <a:ln>
-            <a:noFill/>
-          </a:ln>
-          <a:effectLst/>
-        </p:spPr>
-        <p:style>
-          <a:lnRef idx="1">
-            <a:schemeClr val="accent1"/>
-          </a:lnRef>
-          <a:fillRef idx="3">
-            <a:schemeClr val="accent1"/>
-          </a:fillRef>
-          <a:effectRef idx="2">
-            <a:schemeClr val="accent1"/>
-          </a:effectRef>
-          <a:fontRef idx="minor">
-            <a:schemeClr val="lt1"/>
-          </a:fontRef>
-        </p:style>
-        <p:txBody>
-          <a:bodyPr rtlCol="0" anchor="ctr" lIns="0" rIns="0" tIns="0" bIns="0"/>
-          <a:lstStyle/>
-          <a:p>
-            <a:pPr algn="ctr"/>
-            <a:r>
-              <a:rPr sz="1700" b="1">
-                <a:solidFill>
-                  <a:srgbClr val="202122"/>
-                </a:solidFill>
-                <a:latin typeface="Calibri"/>
-              </a:rPr>
-              <a:t>1</a:t>
-            </a:r>
-          </a:p>
-        </p:txBody>
-      </p:sp>
-      <p:sp>
-        <p:nvSpPr>
-          <p:cNvPr id="5" name="TextBox 4"/>
-          <p:cNvSpPr txBox="1"/>
-          <p:nvPr/>
-        </p:nvSpPr>
-        <p:spPr>
-          <a:xfrm>
-            <a:off x="1325880" y="1645920"/>
-            <a:ext cx="6583680" cy="822960"/>
-          </a:xfrm>
-          <a:prstGeom prst="rect">
-            <a:avLst/>
-          </a:prstGeom>
-          <a:noFill/>
-        </p:spPr>
-        <p:txBody>
-          <a:bodyPr wrap="square" anchor="ctr" lIns="0" rIns="0" tIns="0" bIns="0"/>
-          <a:lstStyle/>
-          <a:p>
-            <a:pPr algn="l"/>
-            <a:r>
-              <a:rPr sz="2000" b="0" i="0">
-                <a:solidFill>
-                  <a:srgbClr val="FFFFFF"/>
-                </a:solidFill>
-                <a:latin typeface="Calibri"/>
-              </a:rPr>
-              <a:t>Which AO do you think you would score lowest on, and why?</a:t>
-            </a:r>
-          </a:p>
-        </p:txBody>
-      </p:sp>
-      <p:sp>
-        <p:nvSpPr>
-          <p:cNvPr id="6" name="Oval 5"/>
-          <p:cNvSpPr/>
-          <p:nvPr/>
-        </p:nvSpPr>
-        <p:spPr>
-          <a:xfrm>
-            <a:off x="548640" y="2697480"/>
-            <a:ext cx="502920" cy="502920"/>
-          </a:xfrm>
-          <a:prstGeom prst="ellipse">
-            <a:avLst/>
-          </a:prstGeom>
-          <a:solidFill>
-            <a:srgbClr val="F2B705"/>
-          </a:solidFill>
-          <a:ln>
-            <a:noFill/>
-          </a:ln>
-          <a:effectLst/>
-        </p:spPr>
-        <p:style>
-          <a:lnRef idx="1">
-            <a:schemeClr val="accent1"/>
-          </a:lnRef>
-          <a:fillRef idx="3">
-            <a:schemeClr val="accent1"/>
-          </a:fillRef>
-          <a:effectRef idx="2">
-            <a:schemeClr val="accent1"/>
-          </a:effectRef>
-          <a:fontRef idx="minor">
-            <a:schemeClr val="lt1"/>
-          </a:fontRef>
-        </p:style>
-        <p:txBody>
-          <a:bodyPr rtlCol="0" anchor="ctr" lIns="0" rIns="0" tIns="0" bIns="0"/>
-          <a:lstStyle/>
-          <a:p>
-            <a:pPr algn="ctr"/>
-            <a:r>
-              <a:rPr sz="1700" b="1">
-                <a:solidFill>
-                  <a:srgbClr val="202122"/>
-                </a:solidFill>
-                <a:latin typeface="Calibri"/>
-              </a:rPr>
-              <a:t>2</a:t>
-            </a:r>
-          </a:p>
-        </p:txBody>
-      </p:sp>
-      <p:sp>
-        <p:nvSpPr>
-          <p:cNvPr id="7" name="TextBox 6"/>
-          <p:cNvSpPr txBox="1"/>
-          <p:nvPr/>
-        </p:nvSpPr>
-        <p:spPr>
-          <a:xfrm>
-            <a:off x="1325880" y="2606040"/>
-            <a:ext cx="6583680" cy="822960"/>
-          </a:xfrm>
-          <a:prstGeom prst="rect">
-            <a:avLst/>
-          </a:prstGeom>
-          <a:noFill/>
-        </p:spPr>
-        <p:txBody>
-          <a:bodyPr wrap="square" anchor="ctr" lIns="0" rIns="0" tIns="0" bIns="0"/>
-          <a:lstStyle/>
-          <a:p>
-            <a:pPr algn="l"/>
-            <a:r>
-              <a:rPr sz="2000" b="0" i="0">
-                <a:solidFill>
-                  <a:srgbClr val="FFFFFF"/>
-                </a:solidFill>
-                <a:latin typeface="Calibri"/>
-              </a:rPr>
-              <a:t>How can you show iteration in your approach?</a:t>
-            </a:r>
-          </a:p>
-        </p:txBody>
-      </p:sp>
-      <p:sp>
-        <p:nvSpPr>
-          <p:cNvPr id="8" name="Oval 7"/>
-          <p:cNvSpPr/>
-          <p:nvPr/>
-        </p:nvSpPr>
-        <p:spPr>
-          <a:xfrm>
-            <a:off x="548640" y="3657600"/>
-            <a:ext cx="502920" cy="502920"/>
-          </a:xfrm>
-          <a:prstGeom prst="ellipse">
-            <a:avLst/>
-          </a:prstGeom>
-          <a:solidFill>
-            <a:srgbClr val="F2B705"/>
-          </a:solidFill>
-          <a:ln>
-            <a:noFill/>
-          </a:ln>
-          <a:effectLst/>
-        </p:spPr>
-        <p:style>
-          <a:lnRef idx="1">
-            <a:schemeClr val="accent1"/>
-          </a:lnRef>
-          <a:fillRef idx="3">
-            <a:schemeClr val="accent1"/>
-          </a:fillRef>
-          <a:effectRef idx="2">
-            <a:schemeClr val="accent1"/>
-          </a:effectRef>
-          <a:fontRef idx="minor">
-            <a:schemeClr val="lt1"/>
-          </a:fontRef>
-        </p:style>
-        <p:txBody>
-          <a:bodyPr rtlCol="0" anchor="ctr" lIns="0" rIns="0" tIns="0" bIns="0"/>
-          <a:lstStyle/>
-          <a:p>
-            <a:pPr algn="ctr"/>
-            <a:r>
-              <a:rPr sz="1700" b="1">
-                <a:solidFill>
-                  <a:srgbClr val="202122"/>
-                </a:solidFill>
-                <a:latin typeface="Calibri"/>
-              </a:rPr>
-              <a:t>3</a:t>
-            </a:r>
-          </a:p>
-        </p:txBody>
-      </p:sp>
-      <p:sp>
-        <p:nvSpPr>
-          <p:cNvPr id="9" name="TextBox 8"/>
-          <p:cNvSpPr txBox="1"/>
-          <p:nvPr/>
-        </p:nvSpPr>
-        <p:spPr>
-          <a:xfrm>
-            <a:off x="1325880" y="3566160"/>
-            <a:ext cx="6583680" cy="822960"/>
-          </a:xfrm>
-          <a:prstGeom prst="rect">
-            <a:avLst/>
-          </a:prstGeom>
-          <a:noFill/>
-        </p:spPr>
-        <p:txBody>
-          <a:bodyPr wrap="square" anchor="ctr" lIns="0" rIns="0" tIns="0" bIns="0"/>
-          <a:lstStyle/>
-          <a:p>
-            <a:pPr algn="l"/>
-            <a:r>
-              <a:rPr sz="2000" b="0" i="0">
-                <a:solidFill>
-                  <a:srgbClr val="FFFFFF"/>
-                </a:solidFill>
-                <a:latin typeface="Calibri"/>
-              </a:rPr>
-              <a:t>Why consider rejected options in your review?</a:t>
-            </a:r>
-          </a:p>
-        </p:txBody>
-      </p:sp>
-      <p:sp>
-        <p:nvSpPr>
-          <p:cNvPr id="10" name="Rounded Rectangle 9"/>
-          <p:cNvSpPr/>
-          <p:nvPr/>
-        </p:nvSpPr>
-        <p:spPr>
-          <a:xfrm>
-            <a:off x="8229600" y="1645920"/>
-            <a:ext cx="3410712" cy="2926080"/>
-          </a:xfrm>
-          <a:prstGeom prst="roundRect">
-            <a:avLst>
-              <a:gd name="adj" fmla="val 8000"/>
-            </a:avLst>
-          </a:prstGeom>
-          <a:solidFill>
-            <a:srgbClr val="0645AD"/>
-          </a:solidFill>
-          <a:ln>
-            <a:noFill/>
-          </a:ln>
-          <a:effectLst/>
-        </p:spPr>
-        <p:style>
-          <a:lnRef idx="1">
-            <a:schemeClr val="accent1"/>
-          </a:lnRef>
-          <a:fillRef idx="3">
-            <a:schemeClr val="accent1"/>
-          </a:fillRef>
-          <a:effectRef idx="2">
-            <a:schemeClr val="accent1"/>
-          </a:effectRef>
-          <a:fontRef idx="minor">
-            <a:schemeClr val="lt1"/>
-          </a:fontRef>
-        </p:style>
-        <p:txBody>
-          <a:bodyPr rtlCol="0" anchor="ctr"/>
-          <a:lstStyle/>
-          <a:p/>
-        </p:txBody>
-      </p:sp>
-      <p:sp>
-        <p:nvSpPr>
-          <p:cNvPr id="11" name="TextBox 10"/>
-          <p:cNvSpPr txBox="1"/>
-          <p:nvPr/>
-        </p:nvSpPr>
-        <p:spPr>
-          <a:xfrm>
-            <a:off x="8503920" y="1874519"/>
-            <a:ext cx="2926080" cy="365760"/>
-          </a:xfrm>
-          <a:prstGeom prst="rect">
-            <a:avLst/>
-          </a:prstGeom>
-          <a:noFill/>
-        </p:spPr>
-        <p:txBody>
-          <a:bodyPr wrap="square" anchor="t" lIns="0" rIns="0" tIns="0" bIns="0"/>
-          <a:lstStyle/>
-          <a:p>
-            <a:pPr algn="l"/>
-            <a:r>
-              <a:rPr sz="1300" b="1" i="0">
-                <a:solidFill>
-                  <a:srgbClr val="A9C8F0"/>
-                </a:solidFill>
-                <a:latin typeface="Calibri"/>
-              </a:rPr>
-              <a:t>REVISE THIS TOPIC</a:t>
-            </a:r>
-          </a:p>
-        </p:txBody>
-      </p:sp>
-      <p:sp>
-        <p:nvSpPr>
-          <p:cNvPr id="12" name="TextBox 11"/>
-          <p:cNvSpPr txBox="1"/>
-          <p:nvPr/>
-        </p:nvSpPr>
-        <p:spPr>
-          <a:xfrm>
-            <a:off x="8503920" y="2286000"/>
-            <a:ext cx="2926080" cy="548640"/>
-          </a:xfrm>
-          <a:prstGeom prst="rect">
-            <a:avLst/>
-          </a:prstGeom>
-          <a:noFill/>
-        </p:spPr>
-        <p:txBody>
-          <a:bodyPr wrap="square" anchor="t" lIns="0" rIns="0" tIns="0" bIns="0"/>
-          <a:lstStyle/>
-          <a:p>
-            <a:pPr algn="l"/>
-            <a:r>
-              <a:rPr sz="1400" b="0" i="0">
-                <a:solidFill>
-                  <a:srgbClr val="FFFFFF"/>
-                </a:solidFill>
-                <a:latin typeface="Calibri"/>
-              </a:rPr>
-              <a:t>Revision notes for this lesson are on the study wiki:</a:t>
-            </a:r>
-          </a:p>
-        </p:txBody>
-      </p:sp>
-      <p:sp>
-        <p:nvSpPr>
-          <p:cNvPr id="13" name="TextBox 12"/>
-          <p:cNvSpPr txBox="1"/>
-          <p:nvPr/>
-        </p:nvSpPr>
-        <p:spPr>
-          <a:xfrm>
-            <a:off x="8503920" y="2926080"/>
-            <a:ext cx="2926080" cy="1463040"/>
-          </a:xfrm>
-          <a:prstGeom prst="rect">
-            <a:avLst/>
-          </a:prstGeom>
-          <a:noFill/>
-        </p:spPr>
-        <p:txBody>
-          <a:bodyPr wrap="square" anchor="t" lIns="0" rIns="0" tIns="0" bIns="0"/>
-          <a:lstStyle/>
-          <a:p>
-            <a:pPr algn="l"/>
-            <a:r>
-              <a:rPr sz="2000" b="1" i="0">
-                <a:solidFill>
-                  <a:srgbClr val="FFFFFF"/>
-                </a:solidFill>
-                <a:latin typeface="Cambria"/>
-              </a:rPr>
-              <a:t>Employer-set Project</a:t>
-            </a:r>
-          </a:p>
-        </p:txBody>
-      </p:sp>
-      <p:sp>
-        <p:nvSpPr>
-          <p:cNvPr id="14" name="TextBox 13"/>
-          <p:cNvSpPr txBox="1"/>
-          <p:nvPr/>
-        </p:nvSpPr>
-        <p:spPr>
-          <a:xfrm>
-            <a:off x="548640" y="5669280"/>
-            <a:ext cx="11094415" cy="548640"/>
-          </a:xfrm>
-          <a:prstGeom prst="rect">
-            <a:avLst/>
-          </a:prstGeom>
-          <a:noFill/>
-        </p:spPr>
-        <p:txBody>
-          <a:bodyPr wrap="square" anchor="t" lIns="0" rIns="0" tIns="0" bIns="0"/>
-          <a:lstStyle/>
-          <a:p>
-            <a:pPr algn="l"/>
-            <a:r>
-              <a:rPr sz="1200" b="0" i="0">
-                <a:solidFill>
-                  <a:srgbClr val="A9C8F0"/>
-                </a:solidFill>
-                <a:latin typeface="Calibri"/>
-              </a:rPr>
-              <a:t>https://lana6478.github.io/T-level-Design-Development-Engineering-Manufacturing/#/01-core-component/03-employer-set-project.md</a:t>
+              <a:rPr sz="1300" b="0" i="1">
+                <a:solidFill>
+                  <a:srgbClr val="54595D"/>
+                </a:solidFill>
+                <a:latin typeface="Calibri"/>
+              </a:rPr>
+              <a:t>Answer on mini whiteboards or in your book. Answers are in the speaker notes.</a:t>
             </a:r>
           </a:p>
         </p:txBody>
